--- a/site/showcase/exports/journal_diagram.pptx
+++ b/site/showcase/exports/journal_diagram.pptx
@@ -19,6 +19,10 @@
     <p:sldId id="267" r:id="rId19"/>
     <p:sldId id="268" r:id="rId20"/>
     <p:sldId id="269" r:id="rId21"/>
+    <p:sldId id="270" r:id="rId22"/>
+    <p:sldId id="271" r:id="rId23"/>
+    <p:sldId id="272" r:id="rId24"/>
+    <p:sldId id="273" r:id="rId25"/>
   </p:sldIdLst>
   <p:sldSz cx="9144000" cy="6858000" type="screen4x3"/>
   <p:notesSz cx="6858000" cy="9144000"/>
@@ -595,12 +599,72 @@
           </a:p>
           <a:p>
             <a:r>
-              <a:t>Evidence supporting this verdict</a:t>
-            </a:r>
-          </a:p>
-          <a:p>
-            <a:r>
-              <a:t>Record | No entries recorded.</a:t>
+              <a:t>Provider evidence / 3</a:t>
+            </a:r>
+          </a:p>
+          <a:p>
+            <a:r>
+              <a:t>Provider | Gemini Vision</a:t>
+            </a:r>
+          </a:p>
+          <a:p>
+            <a:r>
+              <a:t>Model | gemini-3.8-flash</a:t>
+            </a:r>
+          </a:p>
+          <a:p>
+            <a:r>
+              <a:t>Status | ok</a:t>
+            </a:r>
+          </a:p>
+          <a:p>
+            <a:r>
+              <a:t>Assessment | synthetic likely</a:t>
+            </a:r>
+          </a:p>
+          <a:p>
+            <a:r>
+              <a:t>Confidence | medium</a:t>
+            </a:r>
+          </a:p>
+          <a:p>
+            <a:r>
+              <a:t>Role in assessment | Supporting</a:t>
+            </a:r>
+          </a:p>
+          <a:p>
+            <a:r>
+              <a:t>Provider summary | synthetic likelihood 68/100; tells: model read this as AI editing over a photographic base image, sterile digital rendering style, slightly inconsistent anatomical blending in syringe and hand, typical AI-generated vector/digital medical illustration texture</a:t>
+            </a:r>
+          </a:p>
+          <a:p>
+            <a:r>
+              <a:t>Evidence 1 | Model read this as AI editing over a photographic base image</a:t>
+            </a:r>
+          </a:p>
+          <a:p>
+            <a:r>
+              <a:t>Evidence 2 | Sterile digital rendering style</a:t>
+            </a:r>
+          </a:p>
+          <a:p>
+            <a:r>
+              <a:t>Evidence 3 | Slightly inconsistent anatomical blending in syringe and hand</a:t>
+            </a:r>
+          </a:p>
+          <a:p>
+            <a:r>
+              <a:t>Evidence 4 | Typical AI-generated vector/digital medical illustration texture</a:t>
+            </a:r>
+          </a:p>
+          <a:p>
+            <a:r>
+              <a:t>Evidence 5 | Clean modern typography composited over generated artwork</a:t>
+            </a:r>
+          </a:p>
+          <a:p>
+            <a:r>
+              <a:t>Evidence 6 | Caveat: High-quality human digital medical illustrators use similar styles, making definitive technical separation difficult without source files.</a:t>
             </a:r>
           </a:p>
         </p:txBody>
@@ -675,17 +739,62 @@
           </a:p>
           <a:p>
             <a:r>
-              <a:t>Additional findings</a:t>
-            </a:r>
-          </a:p>
-          <a:p>
-            <a:r>
-              <a:t>Local forensic cues | Supporting observation; considered alongside the model assessments.</a:t>
-            </a:r>
-          </a:p>
-          <a:p>
-            <a:r>
-              <a:t>C2PA Content Credentials | Embedded credentials: none found. Origin remains unresolved by this check.</a:t>
+              <a:t>Content Credentials / provenance</a:t>
+            </a:r>
+          </a:p>
+          <a:p>
+            <a:r>
+              <a:t>Provider | C2PA Content Credentials</a:t>
+            </a:r>
+          </a:p>
+          <a:p>
+            <a:r>
+              <a:t>Model | Not recorded</a:t>
+            </a:r>
+          </a:p>
+          <a:p>
+            <a:r>
+              <a:t>Status | ok</a:t>
+            </a:r>
+          </a:p>
+          <a:p>
+            <a:r>
+              <a:t>Assessment | inconclusive</a:t>
+            </a:r>
+          </a:p>
+          <a:p>
+            <a:r>
+              <a:t>Confidence | Not recorded</a:t>
+            </a:r>
+          </a:p>
+          <a:p>
+            <a:r>
+              <a:t>Role in assessment | Additional finding</a:t>
+            </a:r>
+          </a:p>
+          <a:p>
+            <a:r>
+              <a:t>Provider summary | Embedded credentials: none found. Origin remains unresolved by this check.</a:t>
+            </a:r>
+          </a:p>
+          <a:p>
+            <a:r>
+              <a:t>Evidence 1 | Coverage: credentials embedded in the submitted file. External credentials were not retrieved.</a:t>
+            </a:r>
+          </a:p>
+          <a:p>
+            <a:r>
+              <a:t>Evidence 2 | Verifier: c2pa-python 0.37.12; native SDK 0.91.0; specification target 2.4; policy embedded-offline-reviewed-trust-v3.</a:t>
+            </a:r>
+          </a:p>
+          <a:p>
+            <a:r>
+              <a:t>Evidence 3 | Offline embedded-manifest verification; no network trust-list, manifest or revocation refresh.</a:t>
+            </a:r>
+          </a:p>
+          <a:p>
+            <a:r>
+              <a:t>Evidence 4 | No reviewed local C2PA trust snapshot installed. Provenance overrides are disabled.</a:t>
             </a:r>
           </a:p>
         </p:txBody>
@@ -760,22 +869,62 @@
           </a:p>
           <a:p>
             <a:r>
-              <a:t>How this assessment was reached</a:t>
-            </a:r>
-          </a:p>
-          <a:p>
-            <a:r>
-              <a:t>1. override | outcome=none; detail=No confirmed C2PA AI assertion or SynthID watermark. Origin remains unresolved by these checks.</a:t>
-            </a:r>
-          </a:p>
-          <a:p>
-            <a:r>
-              <a:t>2. model_agreement | synthetic=[]; authentic=[]; uncertain=[]; forensic_supports_synthetic=False</a:t>
-            </a:r>
-          </a:p>
-          <a:p>
-            <a:r>
-              <a:t>3. verdict | value=inconclusive; confidence=low; reason=No vision model returned a usable result. Check provider status in the table.</a:t>
+              <a:t>Content Credentials / provenance</a:t>
+            </a:r>
+          </a:p>
+          <a:p>
+            <a:r>
+              <a:t>Provider | C2PA Content Credentials</a:t>
+            </a:r>
+          </a:p>
+          <a:p>
+            <a:r>
+              <a:t>Model | Not recorded</a:t>
+            </a:r>
+          </a:p>
+          <a:p>
+            <a:r>
+              <a:t>Status | ok</a:t>
+            </a:r>
+          </a:p>
+          <a:p>
+            <a:r>
+              <a:t>Assessment | inconclusive</a:t>
+            </a:r>
+          </a:p>
+          <a:p>
+            <a:r>
+              <a:t>Confidence | Not recorded</a:t>
+            </a:r>
+          </a:p>
+          <a:p>
+            <a:r>
+              <a:t>Role in assessment | Additional finding</a:t>
+            </a:r>
+          </a:p>
+          <a:p>
+            <a:r>
+              <a:t>Provider summary | Embedded credentials: none found. Origin remains unresolved by this check.</a:t>
+            </a:r>
+          </a:p>
+          <a:p>
+            <a:r>
+              <a:t>Evidence 1 | Coverage: credentials embedded in the submitted file. External credentials were not retrieved.</a:t>
+            </a:r>
+          </a:p>
+          <a:p>
+            <a:r>
+              <a:t>Evidence 2 | Verifier: c2pa-python 0.37.12; native SDK 0.91.0; specification target 2.4; policy embedded-offline-reviewed-trust-v3.</a:t>
+            </a:r>
+          </a:p>
+          <a:p>
+            <a:r>
+              <a:t>Evidence 3 | Offline embedded-manifest verification; no network trust-list, manifest or revocation refresh.</a:t>
+            </a:r>
+          </a:p>
+          <a:p>
+            <a:r>
+              <a:t>Evidence 4 | No reviewed local C2PA trust snapshot installed. Provenance overrides are disabled.</a:t>
             </a:r>
           </a:p>
         </p:txBody>
@@ -850,57 +999,62 @@
           </a:p>
           <a:p>
             <a:r>
-              <a:t>File and analysis record</a:t>
-            </a:r>
-          </a:p>
-          <a:p>
-            <a:r>
-              <a:t>File | journal-diagram.png</a:t>
-            </a:r>
-          </a:p>
-          <a:p>
-            <a:r>
-              <a:t>Analysis ID | 8af36632-7cb1-41aa-ac9a-74b314ddfa52</a:t>
-            </a:r>
-          </a:p>
-          <a:p>
-            <a:r>
-              <a:t>Generated | 2026-09-26T18:37:48+00:00</a:t>
-            </a:r>
-          </a:p>
-          <a:p>
-            <a:r>
-              <a:t>Tool | SDA Vision 0.1.0</a:t>
-            </a:r>
-          </a:p>
-          <a:p>
-            <a:r>
-              <a:t>Models | Not recorded</a:t>
-            </a:r>
-          </a:p>
-          <a:p>
-            <a:r>
-              <a:t>Method version | verdict-consistency-2026-09-26.1</a:t>
-            </a:r>
-          </a:p>
-          <a:p>
-            <a:r>
-              <a:t>Analysis lens | general</a:t>
-            </a:r>
-          </a:p>
-          <a:p>
-            <a:r>
-              <a:t>Original SHA-256 | c9a680547869618d7c63648d317b1f27c03ede59d5113a7cd6818f5ce2bd654e</a:t>
-            </a:r>
-          </a:p>
-          <a:p>
-            <a:r>
-              <a:t>Ingestion note 1 | Local checks only. LLM visual checks have not been run for this example; no provider requests or fees. An Inconclusive combined result here reflects unavailable visual assessments, not three inconclusive model replies.</a:t>
-            </a:r>
-          </a:p>
-          <a:p>
-            <a:r>
-              <a:t>Ingestion note 2 | Presentation copy of saved report 60372b03-66fe-4d66-8a70-d43f0688945c. The descriptive filename replaces the earlier example ID for navigation. Original analysis dates, provider replies, scores and acquisition context are retained; no new model analysis.</a:t>
+              <a:t>Provider evidence / 5</a:t>
+            </a:r>
+          </a:p>
+          <a:p>
+            <a:r>
+              <a:t>Provider | Local forensic cues</a:t>
+            </a:r>
+          </a:p>
+          <a:p>
+            <a:r>
+              <a:t>Model | Not recorded</a:t>
+            </a:r>
+          </a:p>
+          <a:p>
+            <a:r>
+              <a:t>Status | ok</a:t>
+            </a:r>
+          </a:p>
+          <a:p>
+            <a:r>
+              <a:t>Assessment | partially synthetic</a:t>
+            </a:r>
+          </a:p>
+          <a:p>
+            <a:r>
+              <a:t>Confidence | low</a:t>
+            </a:r>
+          </a:p>
+          <a:p>
+            <a:r>
+              <a:t>Role in assessment | Additional finding</a:t>
+            </a:r>
+          </a:p>
+          <a:p>
+            <a:r>
+              <a:t>Provider summary | Heuristic synthetic likelihood 41/100 from metadata + pixel statistics.</a:t>
+            </a:r>
+          </a:p>
+          <a:p>
+            <a:r>
+              <a:t>Evidence 1 | No camera EXIF (common in AI exports, screenshots, and re-saves).</a:t>
+            </a:r>
+          </a:p>
+          <a:p>
+            <a:r>
+              <a:t>Evidence 2 | ELA mean 1.8, peak 62 (uniform high ELA can indicate generation/heavy edit).</a:t>
+            </a:r>
+          </a:p>
+          <a:p>
+            <a:r>
+              <a:t>Evidence 3 | High-frequency noise std 11.38 (very low/very uniform noise is a synthesis cue).</a:t>
+            </a:r>
+          </a:p>
+          <a:p>
+            <a:r>
+              <a:t>Evidence 4 | Spectral peakiness 19.81 (periodic frequency peaks can mark generated textures).</a:t>
             </a:r>
           </a:p>
         </p:txBody>
@@ -975,6 +1129,351 @@
           </a:p>
           <a:p>
             <a:r>
+              <a:t>Evidence supporting this verdict</a:t>
+            </a:r>
+          </a:p>
+          <a:p>
+            <a:r>
+              <a:t>Claude Vision | synthetic likelihood 80/100; tells: uniform soft airbrushed painterly shading across all elements, typical of current image-generation models, whole composite (portrait, anatomy, inset, icons, typography) rendered in one seamless style rather than assembled from separate assets, anatomically loose vasculature: arteries drawn over the brain surface and an idealized carotid path from neck to cortex, generic glowing highlights (red cortical hotspot, yellow injection-site glow) used as stylized emphasis</a:t>
+            </a:r>
+          </a:p>
+          <a:p>
+            <a:r>
+              <a:t>Gemini Vision | synthetic likelihood 68/100; tells: model read this as AI editing over a photographic base image, sterile digital rendering style, slightly inconsistent anatomical blending in syringe and hand, typical AI-generated vector/digital medical illustration texture</a:t>
+            </a:r>
+          </a:p>
+        </p:txBody>
+      </p:sp>
+      <p:sp>
+        <p:nvSpPr>
+          <p:cNvPr id="4" name="Slide Number Placeholder 3"/>
+          <p:cNvSpPr>
+            <a:spLocks noGrp="1"/>
+          </p:cNvSpPr>
+          <p:nvPr>
+            <p:ph type="sldNum" idx="5" sz="quarter"/>
+          </p:nvPr>
+        </p:nvSpPr>
+        <p:spPr/>
+      </p:sp>
+    </p:spTree>
+  </p:cSld>
+  <p:clrMapOvr>
+    <a:masterClrMapping/>
+  </p:clrMapOvr>
+</p:notes>
+</file>
+
+<file path=ppt/notesSlides/notesSlide15.xml><?xml version="1.0" encoding="utf-8"?>
+<p:notes xmlns:a="http://schemas.openxmlformats.org/drawingml/2006/main" xmlns:p="http://schemas.openxmlformats.org/presentationml/2006/main" xmlns:r="http://schemas.openxmlformats.org/officeDocument/2006/relationships">
+  <p:cSld>
+    <p:spTree>
+      <p:nvGrpSpPr>
+        <p:cNvPr id="1" name=""/>
+        <p:cNvGrpSpPr/>
+        <p:nvPr/>
+      </p:nvGrpSpPr>
+      <p:grpSpPr>
+        <a:xfrm>
+          <a:off x="0" y="0"/>
+          <a:ext cx="0" cy="0"/>
+          <a:chOff x="0" y="0"/>
+          <a:chExt cx="0" cy="0"/>
+        </a:xfrm>
+      </p:grpSpPr>
+      <p:sp>
+        <p:nvSpPr>
+          <p:cNvPr id="2" name="Slide Image Placeholder 1"/>
+          <p:cNvSpPr>
+            <a:spLocks noGrp="1"/>
+          </p:cNvSpPr>
+          <p:nvPr>
+            <p:ph type="sldImg" idx="2"/>
+          </p:nvPr>
+        </p:nvSpPr>
+        <p:spPr/>
+      </p:sp>
+      <p:sp>
+        <p:nvSpPr>
+          <p:cNvPr id="3" name="Notes Placeholder 2"/>
+          <p:cNvSpPr>
+            <a:spLocks noGrp="1"/>
+          </p:cNvSpPr>
+          <p:nvPr>
+            <p:ph type="body" idx="3" sz="quarter"/>
+          </p:nvPr>
+        </p:nvSpPr>
+        <p:spPr/>
+        <p:txBody>
+          <a:bodyPr/>
+          <a:lstStyle/>
+          <a:p>
+            <a:r>
+              <a:t>journal-diagram.png</a:t>
+            </a:r>
+          </a:p>
+          <a:p>
+            <a:r>
+              <a:t>Additional findings</a:t>
+            </a:r>
+          </a:p>
+          <a:p>
+            <a:r>
+              <a:t>OpenAI Vision | synthetic likelihood 45/100; tells: Entire image is a medical illustration, with no camera-photo base visible., Headings and labels are legible, with consistent serif typography and aligned layout., Anatomy and cellular elements use smooth shaded fills and clean outlines compatible with conventional digital illustration., Repeated particle motifs have variable internal squiggles, but no decisive generation artifact is visible.</a:t>
+            </a:r>
+          </a:p>
+          <a:p>
+            <a:r>
+              <a:t>Local forensic cues | Supporting observation; considered alongside the model assessments.</a:t>
+            </a:r>
+          </a:p>
+          <a:p>
+            <a:r>
+              <a:t>C2PA Content Credentials | Embedded credentials: none found. Origin remains unresolved by this check.</a:t>
+            </a:r>
+          </a:p>
+        </p:txBody>
+      </p:sp>
+      <p:sp>
+        <p:nvSpPr>
+          <p:cNvPr id="4" name="Slide Number Placeholder 3"/>
+          <p:cNvSpPr>
+            <a:spLocks noGrp="1"/>
+          </p:cNvSpPr>
+          <p:nvPr>
+            <p:ph type="sldNum" idx="5" sz="quarter"/>
+          </p:nvPr>
+        </p:nvSpPr>
+        <p:spPr/>
+      </p:sp>
+    </p:spTree>
+  </p:cSld>
+  <p:clrMapOvr>
+    <a:masterClrMapping/>
+  </p:clrMapOvr>
+</p:notes>
+</file>
+
+<file path=ppt/notesSlides/notesSlide16.xml><?xml version="1.0" encoding="utf-8"?>
+<p:notes xmlns:a="http://schemas.openxmlformats.org/drawingml/2006/main" xmlns:p="http://schemas.openxmlformats.org/presentationml/2006/main" xmlns:r="http://schemas.openxmlformats.org/officeDocument/2006/relationships">
+  <p:cSld>
+    <p:spTree>
+      <p:nvGrpSpPr>
+        <p:cNvPr id="1" name=""/>
+        <p:cNvGrpSpPr/>
+        <p:nvPr/>
+      </p:nvGrpSpPr>
+      <p:grpSpPr>
+        <a:xfrm>
+          <a:off x="0" y="0"/>
+          <a:ext cx="0" cy="0"/>
+          <a:chOff x="0" y="0"/>
+          <a:chExt cx="0" cy="0"/>
+        </a:xfrm>
+      </p:grpSpPr>
+      <p:sp>
+        <p:nvSpPr>
+          <p:cNvPr id="2" name="Slide Image Placeholder 1"/>
+          <p:cNvSpPr>
+            <a:spLocks noGrp="1"/>
+          </p:cNvSpPr>
+          <p:nvPr>
+            <p:ph type="sldImg" idx="2"/>
+          </p:nvPr>
+        </p:nvSpPr>
+        <p:spPr/>
+      </p:sp>
+      <p:sp>
+        <p:nvSpPr>
+          <p:cNvPr id="3" name="Notes Placeholder 2"/>
+          <p:cNvSpPr>
+            <a:spLocks noGrp="1"/>
+          </p:cNvSpPr>
+          <p:nvPr>
+            <p:ph type="body" idx="3" sz="quarter"/>
+          </p:nvPr>
+        </p:nvSpPr>
+        <p:spPr/>
+        <p:txBody>
+          <a:bodyPr/>
+          <a:lstStyle/>
+          <a:p>
+            <a:r>
+              <a:t>journal-diagram.png</a:t>
+            </a:r>
+          </a:p>
+          <a:p>
+            <a:r>
+              <a:t>Visible text</a:t>
+            </a:r>
+          </a:p>
+          <a:p>
+            <a:r>
+              <a:t>Recorded text | Biomedical Signals • Research Commentary • 2025 | mRNA Vaccination and the Brain: A Proposed Pathway | CAN PARTICLES CROSS THE BLOOD–BRAIN BARRIER? | Brain | Bloodstream | Suggested outcomes | Inflammation | Brain fog | Memory changes | Figure 1. Hypothetical pathway illustrated for discussion.</a:t>
+            </a:r>
+          </a:p>
+        </p:txBody>
+      </p:sp>
+      <p:sp>
+        <p:nvSpPr>
+          <p:cNvPr id="4" name="Slide Number Placeholder 3"/>
+          <p:cNvSpPr>
+            <a:spLocks noGrp="1"/>
+          </p:cNvSpPr>
+          <p:nvPr>
+            <p:ph type="sldNum" idx="5" sz="quarter"/>
+          </p:nvPr>
+        </p:nvSpPr>
+        <p:spPr/>
+      </p:sp>
+    </p:spTree>
+  </p:cSld>
+  <p:clrMapOvr>
+    <a:masterClrMapping/>
+  </p:clrMapOvr>
+</p:notes>
+</file>
+
+<file path=ppt/notesSlides/notesSlide17.xml><?xml version="1.0" encoding="utf-8"?>
+<p:notes xmlns:a="http://schemas.openxmlformats.org/drawingml/2006/main" xmlns:p="http://schemas.openxmlformats.org/presentationml/2006/main" xmlns:r="http://schemas.openxmlformats.org/officeDocument/2006/relationships">
+  <p:cSld>
+    <p:spTree>
+      <p:nvGrpSpPr>
+        <p:cNvPr id="1" name=""/>
+        <p:cNvGrpSpPr/>
+        <p:nvPr/>
+      </p:nvGrpSpPr>
+      <p:grpSpPr>
+        <a:xfrm>
+          <a:off x="0" y="0"/>
+          <a:ext cx="0" cy="0"/>
+          <a:chOff x="0" y="0"/>
+          <a:chExt cx="0" cy="0"/>
+        </a:xfrm>
+      </p:grpSpPr>
+      <p:sp>
+        <p:nvSpPr>
+          <p:cNvPr id="2" name="Slide Image Placeholder 1"/>
+          <p:cNvSpPr>
+            <a:spLocks noGrp="1"/>
+          </p:cNvSpPr>
+          <p:nvPr>
+            <p:ph type="sldImg" idx="2"/>
+          </p:nvPr>
+        </p:nvSpPr>
+        <p:spPr/>
+      </p:sp>
+      <p:sp>
+        <p:nvSpPr>
+          <p:cNvPr id="3" name="Notes Placeholder 2"/>
+          <p:cNvSpPr>
+            <a:spLocks noGrp="1"/>
+          </p:cNvSpPr>
+          <p:nvPr>
+            <p:ph type="body" idx="3" sz="quarter"/>
+          </p:nvPr>
+        </p:nvSpPr>
+        <p:spPr/>
+        <p:txBody>
+          <a:bodyPr/>
+          <a:lstStyle/>
+          <a:p>
+            <a:r>
+              <a:t>journal-diagram.png</a:t>
+            </a:r>
+          </a:p>
+          <a:p>
+            <a:r>
+              <a:t>How this assessment was reached</a:t>
+            </a:r>
+          </a:p>
+          <a:p>
+            <a:r>
+              <a:t>1. override | outcome=none; detail=No confirmed C2PA AI assertion or SynthID watermark. Origin remains unresolved by these checks.</a:t>
+            </a:r>
+          </a:p>
+          <a:p>
+            <a:r>
+              <a:t>2. model_agreement | synthetic=['Claude Vision', 'Gemini Vision']; authentic=[]; uncertain=['OpenAI Vision']; forensic_supports_synthetic=False</a:t>
+            </a:r>
+          </a:p>
+          <a:p>
+            <a:r>
+              <a:t>3. verdict | value=synthetic_likely; confidence=medium; reason=2 models agree this is likely synthetic.</a:t>
+            </a:r>
+          </a:p>
+        </p:txBody>
+      </p:sp>
+      <p:sp>
+        <p:nvSpPr>
+          <p:cNvPr id="4" name="Slide Number Placeholder 3"/>
+          <p:cNvSpPr>
+            <a:spLocks noGrp="1"/>
+          </p:cNvSpPr>
+          <p:nvPr>
+            <p:ph type="sldNum" idx="5" sz="quarter"/>
+          </p:nvPr>
+        </p:nvSpPr>
+        <p:spPr/>
+      </p:sp>
+    </p:spTree>
+  </p:cSld>
+  <p:clrMapOvr>
+    <a:masterClrMapping/>
+  </p:clrMapOvr>
+</p:notes>
+</file>
+
+<file path=ppt/notesSlides/notesSlide18.xml><?xml version="1.0" encoding="utf-8"?>
+<p:notes xmlns:a="http://schemas.openxmlformats.org/drawingml/2006/main" xmlns:p="http://schemas.openxmlformats.org/presentationml/2006/main" xmlns:r="http://schemas.openxmlformats.org/officeDocument/2006/relationships">
+  <p:cSld>
+    <p:spTree>
+      <p:nvGrpSpPr>
+        <p:cNvPr id="1" name=""/>
+        <p:cNvGrpSpPr/>
+        <p:nvPr/>
+      </p:nvGrpSpPr>
+      <p:grpSpPr>
+        <a:xfrm>
+          <a:off x="0" y="0"/>
+          <a:ext cx="0" cy="0"/>
+          <a:chOff x="0" y="0"/>
+          <a:chExt cx="0" cy="0"/>
+        </a:xfrm>
+      </p:grpSpPr>
+      <p:sp>
+        <p:nvSpPr>
+          <p:cNvPr id="2" name="Slide Image Placeholder 1"/>
+          <p:cNvSpPr>
+            <a:spLocks noGrp="1"/>
+          </p:cNvSpPr>
+          <p:nvPr>
+            <p:ph type="sldImg" idx="2"/>
+          </p:nvPr>
+        </p:nvSpPr>
+        <p:spPr/>
+      </p:sp>
+      <p:sp>
+        <p:nvSpPr>
+          <p:cNvPr id="3" name="Notes Placeholder 2"/>
+          <p:cNvSpPr>
+            <a:spLocks noGrp="1"/>
+          </p:cNvSpPr>
+          <p:nvPr>
+            <p:ph type="body" idx="3" sz="quarter"/>
+          </p:nvPr>
+        </p:nvSpPr>
+        <p:spPr/>
+        <p:txBody>
+          <a:bodyPr/>
+          <a:lstStyle/>
+          <a:p>
+            <a:r>
+              <a:t>journal-diagram.png</a:t>
+            </a:r>
+          </a:p>
+          <a:p>
+            <a:r>
               <a:t>File and analysis record</a:t>
             </a:r>
           </a:p>
@@ -985,12 +1484,12 @@
           </a:p>
           <a:p>
             <a:r>
-              <a:t>Analysis ID | 8af36632-7cb1-41aa-ac9a-74b314ddfa52</a:t>
-            </a:r>
-          </a:p>
-          <a:p>
-            <a:r>
-              <a:t>Generated | 2026-09-26T18:37:48+00:00</a:t>
+              <a:t>Analysis ID | 8faa3dd9-dfff-476f-a33e-cd661e1e6f35</a:t>
+            </a:r>
+          </a:p>
+          <a:p>
+            <a:r>
+              <a:t>Generated | 2026-09-26T22:31:05+00:00</a:t>
             </a:r>
           </a:p>
           <a:p>
@@ -1000,12 +1499,12 @@
           </a:p>
           <a:p>
             <a:r>
-              <a:t>Models | Not recorded</a:t>
-            </a:r>
-          </a:p>
-          <a:p>
-            <a:r>
-              <a:t>Method version | verdict-consistency-2026-09-26.1</a:t>
+              <a:t>Models | claude-opus-5-5, gemini-3.8-flash, gpt-6-astra</a:t>
+            </a:r>
+          </a:p>
+          <a:p>
+            <a:r>
+              <a:t>Method version | pdf-preparation-2026-09-26.1</a:t>
             </a:r>
           </a:p>
           <a:p>
@@ -1020,12 +1519,12 @@
           </a:p>
           <a:p>
             <a:r>
-              <a:t>Ingestion note 1 | Local checks only. LLM visual checks have not been run for this example; no provider requests or fees. An Inconclusive combined result here reflects unavailable visual assessments, not three inconclusive model replies.</a:t>
-            </a:r>
-          </a:p>
-          <a:p>
-            <a:r>
-              <a:t>Ingestion note 2 | Presentation copy of saved report 60372b03-66fe-4d66-8a70-d43f0688945c. The descriptive filename replaces the earlier example ID for navigation. Original analysis dates, provider replies, scores and acquisition context are retained; no new model analysis.</a:t>
+              <a:t>Ingestion note 1 | Fresh provider replies acquired for eleven-examples-refresh-20260926-r1; report assembled locally from the saved responses without further API calls.</a:t>
+            </a:r>
+          </a:p>
+          <a:p>
+            <a:r>
+              <a:t>Ingestion note 2 | Provider latency values are restored from the acquisition receipts (maximum sampled-frame latency per provider); raw replies and assessment results are unchanged by this bookkeeping step.</a:t>
             </a:r>
           </a:p>
         </p:txBody>
@@ -1105,32 +1604,32 @@
           </a:p>
           <a:p>
             <a:r>
-              <a:t>Finding | Inconclusive</a:t>
-            </a:r>
-          </a:p>
-          <a:p>
-            <a:r>
-              <a:t>Recorded verdict | inconclusive</a:t>
-            </a:r>
-          </a:p>
-          <a:p>
-            <a:r>
-              <a:t>Confidence | low</a:t>
-            </a:r>
-          </a:p>
-          <a:p>
-            <a:r>
-              <a:t>Indicative rating | n/a</a:t>
-            </a:r>
-          </a:p>
-          <a:p>
-            <a:r>
-              <a:t>Rating basis | no numeric score</a:t>
-            </a:r>
-          </a:p>
-          <a:p>
-            <a:r>
-              <a:t>Explanation | No vision model returned a usable result. Check provider status in the table.</a:t>
+              <a:t>Finding | Leaning synthetic</a:t>
+            </a:r>
+          </a:p>
+          <a:p>
+            <a:r>
+              <a:t>Recorded verdict | synthetic likely</a:t>
+            </a:r>
+          </a:p>
+          <a:p>
+            <a:r>
+              <a:t>Confidence | medium</a:t>
+            </a:r>
+          </a:p>
+          <a:p>
+            <a:r>
+              <a:t>Indicative rating | 68/100</a:t>
+            </a:r>
+          </a:p>
+          <a:p>
+            <a:r>
+              <a:t>Rating basis | median of available model ratings; not a calibrated probability</a:t>
+            </a:r>
+          </a:p>
+          <a:p>
+            <a:r>
+              <a:t>Explanation | 2 models agree this is likely synthetic.</a:t>
             </a:r>
           </a:p>
           <a:p>
@@ -1220,17 +1719,17 @@
           </a:p>
           <a:p>
             <a:r>
-              <a:t>Claude Vision | vision / disabled | inconclusive | n/a</a:t>
-            </a:r>
-          </a:p>
-          <a:p>
-            <a:r>
-              <a:t>OpenAI Vision | vision / disabled | inconclusive | n/a</a:t>
-            </a:r>
-          </a:p>
-          <a:p>
-            <a:r>
-              <a:t>Gemini Vision | vision / disabled | inconclusive | n/a</a:t>
+              <a:t>Claude Vision | vision / ok | synthetic likely | 80/100</a:t>
+            </a:r>
+          </a:p>
+          <a:p>
+            <a:r>
+              <a:t>OpenAI Vision | vision / ok | inconclusive | 45/100</a:t>
+            </a:r>
+          </a:p>
+          <a:p>
+            <a:r>
+              <a:t>Gemini Vision | vision / ok | synthetic likely | 68/100</a:t>
             </a:r>
           </a:p>
           <a:p>
@@ -1325,37 +1824,77 @@
           </a:p>
           <a:p>
             <a:r>
-              <a:t>Model | Not recorded</a:t>
-            </a:r>
-          </a:p>
-          <a:p>
-            <a:r>
-              <a:t>Status | disabled</a:t>
-            </a:r>
-          </a:p>
-          <a:p>
-            <a:r>
-              <a:t>Assessment | inconclusive</a:t>
-            </a:r>
-          </a:p>
-          <a:p>
-            <a:r>
-              <a:t>Confidence | Not recorded</a:t>
-            </a:r>
-          </a:p>
-          <a:p>
-            <a:r>
-              <a:t>Role in assessment | Not listed</a:t>
-            </a:r>
-          </a:p>
-          <a:p>
-            <a:r>
-              <a:t>Provider summary | LLM visual check not run for this example. This testing record contains local file checks only.</a:t>
-            </a:r>
-          </a:p>
-          <a:p>
-            <a:r>
-              <a:t>Evidence 1 | No request or image was sent to this provider for this record.</a:t>
+              <a:t>Model | claude-opus-5-5</a:t>
+            </a:r>
+          </a:p>
+          <a:p>
+            <a:r>
+              <a:t>Status | ok</a:t>
+            </a:r>
+          </a:p>
+          <a:p>
+            <a:r>
+              <a:t>Assessment | synthetic likely</a:t>
+            </a:r>
+          </a:p>
+          <a:p>
+            <a:r>
+              <a:t>Confidence | medium</a:t>
+            </a:r>
+          </a:p>
+          <a:p>
+            <a:r>
+              <a:t>Role in assessment | Supporting</a:t>
+            </a:r>
+          </a:p>
+          <a:p>
+            <a:r>
+              <a:t>Provider summary | synthetic likelihood 80/100; tells: uniform soft airbrushed painterly shading across all elements, typical of current image-generation models, whole composite (portrait, anatomy, inset, icons, typography) rendered in one seamless style rather than assembled from separate assets, anatomically loose vasculature: arteries drawn over the brain surface and an idealized carotid path from neck to cortex, generic glowing highlights (red cortical hotspot, yellow injection-site glow) used as stylized emphasis</a:t>
+            </a:r>
+          </a:p>
+          <a:p>
+            <a:r>
+              <a:t>Evidence 1 | Uniform soft airbrushed painterly shading across all elements, typical of current image-generation models</a:t>
+            </a:r>
+          </a:p>
+          <a:p>
+            <a:r>
+              <a:t>Evidence 2 | Whole composite (portrait, anatomy, inset, icons, typography) rendered in one seamless style rather than assembled from separate assets</a:t>
+            </a:r>
+          </a:p>
+          <a:p>
+            <a:r>
+              <a:t>Evidence 3 | Anatomically loose vasculature: arteries drawn over the brain surface and an idealized carotid path from neck to cortex</a:t>
+            </a:r>
+          </a:p>
+          <a:p>
+            <a:r>
+              <a:t>Evidence 4 | Generic glowing highlights (red cortical hotspot, yellow injection-site glow) used as stylized emphasis</a:t>
+            </a:r>
+          </a:p>
+          <a:p>
+            <a:r>
+              <a:t>Evidence 5 | Repetitive near-identical lipid-nanoparticle and red blood cell motifs with slight random variation</a:t>
+            </a:r>
+          </a:p>
+          <a:p>
+            <a:r>
+              <a:t>Evidence 6 | Clean but slightly generic serif typography and masthead ('Biomedical Signals'), consistent with high-fidelity text rendering in recent generators</a:t>
+            </a:r>
+          </a:p>
+          <a:p>
+            <a:r>
+              <a:t>Evidence 7 | No camera-origin signals (no sensor noise, lens blur, or optical depth of field); content is digital illustration throughout</a:t>
+            </a:r>
+          </a:p>
+          <a:p>
+            <a:r>
+              <a:t>Evidence 8 | Gloved hand and syringe are plausible but smoothly idealized, with simplified plunger and needle detail</a:t>
+            </a:r>
+          </a:p>
+          <a:p>
+            <a:r>
+              <a:t>Evidence 9 | Caveat: This is an illustration, not a photo, so camera-forensic cues do not apply. Skilled human illustrators using digital airbrush styles can produce similar output. Check for C2PA/metadata, reverse-image search, and verify whether 'Biomedical Signals' is a real publication.</a:t>
             </a:r>
           </a:p>
         </p:txBody>
@@ -1430,47 +1969,87 @@
           </a:p>
           <a:p>
             <a:r>
-              <a:t>Provider evidence / 2</a:t>
-            </a:r>
-          </a:p>
-          <a:p>
-            <a:r>
-              <a:t>Provider | OpenAI Vision</a:t>
-            </a:r>
-          </a:p>
-          <a:p>
-            <a:r>
-              <a:t>Model | Not recorded</a:t>
-            </a:r>
-          </a:p>
-          <a:p>
-            <a:r>
-              <a:t>Status | disabled</a:t>
-            </a:r>
-          </a:p>
-          <a:p>
-            <a:r>
-              <a:t>Assessment | inconclusive</a:t>
-            </a:r>
-          </a:p>
-          <a:p>
-            <a:r>
-              <a:t>Confidence | Not recorded</a:t>
-            </a:r>
-          </a:p>
-          <a:p>
-            <a:r>
-              <a:t>Role in assessment | Not listed</a:t>
-            </a:r>
-          </a:p>
-          <a:p>
-            <a:r>
-              <a:t>Provider summary | LLM visual check not run for this example. This testing record contains local file checks only.</a:t>
-            </a:r>
-          </a:p>
-          <a:p>
-            <a:r>
-              <a:t>Evidence 1 | No request or image was sent to this provider for this record.</a:t>
+              <a:t>Provider evidence / 1</a:t>
+            </a:r>
+          </a:p>
+          <a:p>
+            <a:r>
+              <a:t>Provider | Claude Vision</a:t>
+            </a:r>
+          </a:p>
+          <a:p>
+            <a:r>
+              <a:t>Model | claude-opus-5-5</a:t>
+            </a:r>
+          </a:p>
+          <a:p>
+            <a:r>
+              <a:t>Status | ok</a:t>
+            </a:r>
+          </a:p>
+          <a:p>
+            <a:r>
+              <a:t>Assessment | synthetic likely</a:t>
+            </a:r>
+          </a:p>
+          <a:p>
+            <a:r>
+              <a:t>Confidence | medium</a:t>
+            </a:r>
+          </a:p>
+          <a:p>
+            <a:r>
+              <a:t>Role in assessment | Supporting</a:t>
+            </a:r>
+          </a:p>
+          <a:p>
+            <a:r>
+              <a:t>Provider summary | synthetic likelihood 80/100; tells: uniform soft airbrushed painterly shading across all elements, typical of current image-generation models, whole composite (portrait, anatomy, inset, icons, typography) rendered in one seamless style rather than assembled from separate assets, anatomically loose vasculature: arteries drawn over the brain surface and an idealized carotid path from neck to cortex, generic glowing highlights (red cortical hotspot, yellow injection-site glow) used as stylized emphasis</a:t>
+            </a:r>
+          </a:p>
+          <a:p>
+            <a:r>
+              <a:t>Evidence 1 | Uniform soft airbrushed painterly shading across all elements, typical of current image-generation models</a:t>
+            </a:r>
+          </a:p>
+          <a:p>
+            <a:r>
+              <a:t>Evidence 2 | Whole composite (portrait, anatomy, inset, icons, typography) rendered in one seamless style rather than assembled from separate assets</a:t>
+            </a:r>
+          </a:p>
+          <a:p>
+            <a:r>
+              <a:t>Evidence 3 | Anatomically loose vasculature: arteries drawn over the brain surface and an idealized carotid path from neck to cortex</a:t>
+            </a:r>
+          </a:p>
+          <a:p>
+            <a:r>
+              <a:t>Evidence 4 | Generic glowing highlights (red cortical hotspot, yellow injection-site glow) used as stylized emphasis</a:t>
+            </a:r>
+          </a:p>
+          <a:p>
+            <a:r>
+              <a:t>Evidence 5 | Repetitive near-identical lipid-nanoparticle and red blood cell motifs with slight random variation</a:t>
+            </a:r>
+          </a:p>
+          <a:p>
+            <a:r>
+              <a:t>Evidence 6 | Clean but slightly generic serif typography and masthead ('Biomedical Signals'), consistent with high-fidelity text rendering in recent generators</a:t>
+            </a:r>
+          </a:p>
+          <a:p>
+            <a:r>
+              <a:t>Evidence 7 | No camera-origin signals (no sensor noise, lens blur, or optical depth of field); content is digital illustration throughout</a:t>
+            </a:r>
+          </a:p>
+          <a:p>
+            <a:r>
+              <a:t>Evidence 8 | Gloved hand and syringe are plausible but smoothly idealized, with simplified plunger and needle detail</a:t>
+            </a:r>
+          </a:p>
+          <a:p>
+            <a:r>
+              <a:t>Evidence 9 | Caveat: This is an illustration, not a photo, so camera-forensic cues do not apply. Skilled human illustrators using digital airbrush styles can produce similar output. Check for C2PA/metadata, reverse-image search, and verify whether 'Biomedical Signals' is a real publication.</a:t>
             </a:r>
           </a:p>
         </p:txBody>
@@ -1545,47 +2124,87 @@
           </a:p>
           <a:p>
             <a:r>
-              <a:t>Provider evidence / 3</a:t>
-            </a:r>
-          </a:p>
-          <a:p>
-            <a:r>
-              <a:t>Provider | Gemini Vision</a:t>
-            </a:r>
-          </a:p>
-          <a:p>
-            <a:r>
-              <a:t>Model | Not recorded</a:t>
-            </a:r>
-          </a:p>
-          <a:p>
-            <a:r>
-              <a:t>Status | disabled</a:t>
-            </a:r>
-          </a:p>
-          <a:p>
-            <a:r>
-              <a:t>Assessment | inconclusive</a:t>
-            </a:r>
-          </a:p>
-          <a:p>
-            <a:r>
-              <a:t>Confidence | Not recorded</a:t>
-            </a:r>
-          </a:p>
-          <a:p>
-            <a:r>
-              <a:t>Role in assessment | Not listed</a:t>
-            </a:r>
-          </a:p>
-          <a:p>
-            <a:r>
-              <a:t>Provider summary | LLM visual check not run for this example. This testing record contains local file checks only.</a:t>
-            </a:r>
-          </a:p>
-          <a:p>
-            <a:r>
-              <a:t>Evidence 1 | No request or image was sent to this provider for this record.</a:t>
+              <a:t>Provider evidence / 1</a:t>
+            </a:r>
+          </a:p>
+          <a:p>
+            <a:r>
+              <a:t>Provider | Claude Vision</a:t>
+            </a:r>
+          </a:p>
+          <a:p>
+            <a:r>
+              <a:t>Model | claude-opus-5-5</a:t>
+            </a:r>
+          </a:p>
+          <a:p>
+            <a:r>
+              <a:t>Status | ok</a:t>
+            </a:r>
+          </a:p>
+          <a:p>
+            <a:r>
+              <a:t>Assessment | synthetic likely</a:t>
+            </a:r>
+          </a:p>
+          <a:p>
+            <a:r>
+              <a:t>Confidence | medium</a:t>
+            </a:r>
+          </a:p>
+          <a:p>
+            <a:r>
+              <a:t>Role in assessment | Supporting</a:t>
+            </a:r>
+          </a:p>
+          <a:p>
+            <a:r>
+              <a:t>Provider summary | synthetic likelihood 80/100; tells: uniform soft airbrushed painterly shading across all elements, typical of current image-generation models, whole composite (portrait, anatomy, inset, icons, typography) rendered in one seamless style rather than assembled from separate assets, anatomically loose vasculature: arteries drawn over the brain surface and an idealized carotid path from neck to cortex, generic glowing highlights (red cortical hotspot, yellow injection-site glow) used as stylized emphasis</a:t>
+            </a:r>
+          </a:p>
+          <a:p>
+            <a:r>
+              <a:t>Evidence 1 | Uniform soft airbrushed painterly shading across all elements, typical of current image-generation models</a:t>
+            </a:r>
+          </a:p>
+          <a:p>
+            <a:r>
+              <a:t>Evidence 2 | Whole composite (portrait, anatomy, inset, icons, typography) rendered in one seamless style rather than assembled from separate assets</a:t>
+            </a:r>
+          </a:p>
+          <a:p>
+            <a:r>
+              <a:t>Evidence 3 | Anatomically loose vasculature: arteries drawn over the brain surface and an idealized carotid path from neck to cortex</a:t>
+            </a:r>
+          </a:p>
+          <a:p>
+            <a:r>
+              <a:t>Evidence 4 | Generic glowing highlights (red cortical hotspot, yellow injection-site glow) used as stylized emphasis</a:t>
+            </a:r>
+          </a:p>
+          <a:p>
+            <a:r>
+              <a:t>Evidence 5 | Repetitive near-identical lipid-nanoparticle and red blood cell motifs with slight random variation</a:t>
+            </a:r>
+          </a:p>
+          <a:p>
+            <a:r>
+              <a:t>Evidence 6 | Clean but slightly generic serif typography and masthead ('Biomedical Signals'), consistent with high-fidelity text rendering in recent generators</a:t>
+            </a:r>
+          </a:p>
+          <a:p>
+            <a:r>
+              <a:t>Evidence 7 | No camera-origin signals (no sensor noise, lens blur, or optical depth of field); content is digital illustration throughout</a:t>
+            </a:r>
+          </a:p>
+          <a:p>
+            <a:r>
+              <a:t>Evidence 8 | Gloved hand and syringe are plausible but smoothly idealized, with simplified plunger and needle detail</a:t>
+            </a:r>
+          </a:p>
+          <a:p>
+            <a:r>
+              <a:t>Evidence 9 | Caveat: This is an illustration, not a photo, so camera-forensic cues do not apply. Skilled human illustrators using digital airbrush styles can produce similar output. Check for C2PA/metadata, reverse-image search, and verify whether 'Biomedical Signals' is a real publication.</a:t>
             </a:r>
           </a:p>
         </p:txBody>
@@ -1660,17 +2279,17 @@
           </a:p>
           <a:p>
             <a:r>
-              <a:t>Content Credentials / provenance</a:t>
-            </a:r>
-          </a:p>
-          <a:p>
-            <a:r>
-              <a:t>Provider | C2PA Content Credentials</a:t>
-            </a:r>
-          </a:p>
-          <a:p>
-            <a:r>
-              <a:t>Model | Not recorded</a:t>
+              <a:t>Provider evidence / 2</a:t>
+            </a:r>
+          </a:p>
+          <a:p>
+            <a:r>
+              <a:t>Provider | OpenAI Vision</a:t>
+            </a:r>
+          </a:p>
+          <a:p>
+            <a:r>
+              <a:t>Model | gpt-6-astra</a:t>
             </a:r>
           </a:p>
           <a:p>
@@ -1685,7 +2304,7 @@
           </a:p>
           <a:p>
             <a:r>
-              <a:t>Confidence | Not recorded</a:t>
+              <a:t>Confidence | low</a:t>
             </a:r>
           </a:p>
           <a:p>
@@ -1695,27 +2314,32 @@
           </a:p>
           <a:p>
             <a:r>
-              <a:t>Provider summary | Embedded credentials: none found. Origin remains unresolved by this check.</a:t>
-            </a:r>
-          </a:p>
-          <a:p>
-            <a:r>
-              <a:t>Evidence 1 | Coverage: credentials embedded in the submitted file. External credentials were not retrieved.</a:t>
-            </a:r>
-          </a:p>
-          <a:p>
-            <a:r>
-              <a:t>Evidence 2 | Verifier: c2pa-python 0.37.12; native SDK 0.91.0; specification target 2.4; policy embedded-offline-reviewed-trust-v3.</a:t>
-            </a:r>
-          </a:p>
-          <a:p>
-            <a:r>
-              <a:t>Evidence 3 | Offline embedded-manifest verification; no network trust-list, manifest or revocation refresh.</a:t>
-            </a:r>
-          </a:p>
-          <a:p>
-            <a:r>
-              <a:t>Evidence 4 | No reviewed local C2PA trust snapshot installed. Provenance overrides are disabled.</a:t>
+              <a:t>Provider summary | synthetic likelihood 45/100; tells: Entire image is a medical illustration, with no camera-photo base visible., Headings and labels are legible, with consistent serif typography and aligned layout., Anatomy and cellular elements use smooth shaded fills and clean outlines compatible with conventional digital illustration., Repeated particle motifs have variable internal squiggles, but no decisive generation artifact is visible.</a:t>
+            </a:r>
+          </a:p>
+          <a:p>
+            <a:r>
+              <a:t>Evidence 1 | Entire image is a medical illustration, with no camera-photo base visible.</a:t>
+            </a:r>
+          </a:p>
+          <a:p>
+            <a:r>
+              <a:t>Evidence 2 | Headings and labels are legible, with consistent serif typography and aligned layout.</a:t>
+            </a:r>
+          </a:p>
+          <a:p>
+            <a:r>
+              <a:t>Evidence 3 | Anatomy and cellular elements use smooth shaded fills and clean outlines compatible with conventional digital illustration.</a:t>
+            </a:r>
+          </a:p>
+          <a:p>
+            <a:r>
+              <a:t>Evidence 4 | Repeated particle motifs have variable internal squiggles, but no decisive generation artifact is visible.</a:t>
+            </a:r>
+          </a:p>
+          <a:p>
+            <a:r>
+              <a:t>Evidence 5 | Caveat: Conventional digital artwork and AI-assisted illustration can look alike; source files and provenance are needed to distinguish them.</a:t>
             </a:r>
           </a:p>
         </p:txBody>
@@ -1790,17 +2414,17 @@
           </a:p>
           <a:p>
             <a:r>
-              <a:t>Content Credentials / provenance</a:t>
-            </a:r>
-          </a:p>
-          <a:p>
-            <a:r>
-              <a:t>Provider | C2PA Content Credentials</a:t>
-            </a:r>
-          </a:p>
-          <a:p>
-            <a:r>
-              <a:t>Model | Not recorded</a:t>
+              <a:t>Provider evidence / 2</a:t>
+            </a:r>
+          </a:p>
+          <a:p>
+            <a:r>
+              <a:t>Provider | OpenAI Vision</a:t>
+            </a:r>
+          </a:p>
+          <a:p>
+            <a:r>
+              <a:t>Model | gpt-6-astra</a:t>
             </a:r>
           </a:p>
           <a:p>
@@ -1815,7 +2439,7 @@
           </a:p>
           <a:p>
             <a:r>
-              <a:t>Confidence | Not recorded</a:t>
+              <a:t>Confidence | low</a:t>
             </a:r>
           </a:p>
           <a:p>
@@ -1825,27 +2449,32 @@
           </a:p>
           <a:p>
             <a:r>
-              <a:t>Provider summary | Embedded credentials: none found. Origin remains unresolved by this check.</a:t>
-            </a:r>
-          </a:p>
-          <a:p>
-            <a:r>
-              <a:t>Evidence 1 | Coverage: credentials embedded in the submitted file. External credentials were not retrieved.</a:t>
-            </a:r>
-          </a:p>
-          <a:p>
-            <a:r>
-              <a:t>Evidence 2 | Verifier: c2pa-python 0.37.12; native SDK 0.91.0; specification target 2.4; policy embedded-offline-reviewed-trust-v3.</a:t>
-            </a:r>
-          </a:p>
-          <a:p>
-            <a:r>
-              <a:t>Evidence 3 | Offline embedded-manifest verification; no network trust-list, manifest or revocation refresh.</a:t>
-            </a:r>
-          </a:p>
-          <a:p>
-            <a:r>
-              <a:t>Evidence 4 | No reviewed local C2PA trust snapshot installed. Provenance overrides are disabled.</a:t>
+              <a:t>Provider summary | synthetic likelihood 45/100; tells: Entire image is a medical illustration, with no camera-photo base visible., Headings and labels are legible, with consistent serif typography and aligned layout., Anatomy and cellular elements use smooth shaded fills and clean outlines compatible with conventional digital illustration., Repeated particle motifs have variable internal squiggles, but no decisive generation artifact is visible.</a:t>
+            </a:r>
+          </a:p>
+          <a:p>
+            <a:r>
+              <a:t>Evidence 1 | Entire image is a medical illustration, with no camera-photo base visible.</a:t>
+            </a:r>
+          </a:p>
+          <a:p>
+            <a:r>
+              <a:t>Evidence 2 | Headings and labels are legible, with consistent serif typography and aligned layout.</a:t>
+            </a:r>
+          </a:p>
+          <a:p>
+            <a:r>
+              <a:t>Evidence 3 | Anatomy and cellular elements use smooth shaded fills and clean outlines compatible with conventional digital illustration.</a:t>
+            </a:r>
+          </a:p>
+          <a:p>
+            <a:r>
+              <a:t>Evidence 4 | Repeated particle motifs have variable internal squiggles, but no decisive generation artifact is visible.</a:t>
+            </a:r>
+          </a:p>
+          <a:p>
+            <a:r>
+              <a:t>Evidence 5 | Caveat: Conventional digital artwork and AI-assisted illustration can look alike; source files and provenance are needed to distinguish them.</a:t>
             </a:r>
           </a:p>
         </p:txBody>
@@ -1920,17 +2549,17 @@
           </a:p>
           <a:p>
             <a:r>
-              <a:t>Provider evidence / 5</a:t>
-            </a:r>
-          </a:p>
-          <a:p>
-            <a:r>
-              <a:t>Provider | Local forensic cues</a:t>
-            </a:r>
-          </a:p>
-          <a:p>
-            <a:r>
-              <a:t>Model | Not recorded</a:t>
+              <a:t>Provider evidence / 3</a:t>
+            </a:r>
+          </a:p>
+          <a:p>
+            <a:r>
+              <a:t>Provider | Gemini Vision</a:t>
+            </a:r>
+          </a:p>
+          <a:p>
+            <a:r>
+              <a:t>Model | gemini-3.8-flash</a:t>
             </a:r>
           </a:p>
           <a:p>
@@ -1940,42 +2569,52 @@
           </a:p>
           <a:p>
             <a:r>
-              <a:t>Assessment | partially synthetic</a:t>
-            </a:r>
-          </a:p>
-          <a:p>
-            <a:r>
-              <a:t>Confidence | low</a:t>
-            </a:r>
-          </a:p>
-          <a:p>
-            <a:r>
-              <a:t>Role in assessment | Additional finding</a:t>
-            </a:r>
-          </a:p>
-          <a:p>
-            <a:r>
-              <a:t>Provider summary | Heuristic synthetic likelihood 41/100 from metadata + pixel statistics.</a:t>
-            </a:r>
-          </a:p>
-          <a:p>
-            <a:r>
-              <a:t>Evidence 1 | No camera EXIF (common in AI exports, screenshots, and re-saves).</a:t>
-            </a:r>
-          </a:p>
-          <a:p>
-            <a:r>
-              <a:t>Evidence 2 | ELA mean 1.8, peak 62 (uniform high ELA can indicate generation/heavy edit).</a:t>
-            </a:r>
-          </a:p>
-          <a:p>
-            <a:r>
-              <a:t>Evidence 3 | High-frequency noise std 11.38 (very low/very uniform noise is a synthesis cue).</a:t>
-            </a:r>
-          </a:p>
-          <a:p>
-            <a:r>
-              <a:t>Evidence 4 | Spectral peakiness 19.81 (periodic frequency peaks can mark generated textures).</a:t>
+              <a:t>Assessment | synthetic likely</a:t>
+            </a:r>
+          </a:p>
+          <a:p>
+            <a:r>
+              <a:t>Confidence | medium</a:t>
+            </a:r>
+          </a:p>
+          <a:p>
+            <a:r>
+              <a:t>Role in assessment | Supporting</a:t>
+            </a:r>
+          </a:p>
+          <a:p>
+            <a:r>
+              <a:t>Provider summary | synthetic likelihood 68/100; tells: model read this as AI editing over a photographic base image, sterile digital rendering style, slightly inconsistent anatomical blending in syringe and hand, typical AI-generated vector/digital medical illustration texture</a:t>
+            </a:r>
+          </a:p>
+          <a:p>
+            <a:r>
+              <a:t>Evidence 1 | Model read this as AI editing over a photographic base image</a:t>
+            </a:r>
+          </a:p>
+          <a:p>
+            <a:r>
+              <a:t>Evidence 2 | Sterile digital rendering style</a:t>
+            </a:r>
+          </a:p>
+          <a:p>
+            <a:r>
+              <a:t>Evidence 3 | Slightly inconsistent anatomical blending in syringe and hand</a:t>
+            </a:r>
+          </a:p>
+          <a:p>
+            <a:r>
+              <a:t>Evidence 4 | Typical AI-generated vector/digital medical illustration texture</a:t>
+            </a:r>
+          </a:p>
+          <a:p>
+            <a:r>
+              <a:t>Evidence 5 | Clean modern typography composited over generated artwork</a:t>
+            </a:r>
+          </a:p>
+          <a:p>
+            <a:r>
+              <a:t>Evidence 6 | Caveat: High-quality human digital medical illustrators use similar styles, making definitive technical separation difficult without source files.</a:t>
             </a:r>
           </a:p>
         </p:txBody>
@@ -5312,7 +5951,7 @@
               </a:defRPr>
             </a:pPr>
             <a:r>
-              <a:t>Evidence supporting this verdict</a:t>
+              <a:t>Provider evidence / 3 (continued)</a:t>
             </a:r>
           </a:p>
         </p:txBody>
@@ -5532,7 +6171,7 @@
                         </a:defRPr>
                       </a:pPr>
                       <a:r>
-                        <a:t>Record</a:t>
+                        <a:t>Evidence 4</a:t>
                       </a:r>
                     </a:p>
                   </a:txBody>
@@ -5562,7 +6201,202 @@
                         </a:defRPr>
                       </a:pPr>
                       <a:r>
-                        <a:t>No entries recorded.</a:t>
+                        <a:t>Typical AI-generated vector/digital medical illustration texture</a:t>
+                      </a:r>
+                    </a:p>
+                  </a:txBody>
+                  <a:tcPr marL="82296" marR="82296" marT="64008" marB="64008">
+                    <a:solidFill>
+                      <a:srgbClr val="F1F7F7"/>
+                    </a:solidFill>
+                  </a:tcPr>
+                </a:tc>
+              </a:tr>
+            </a:tbl>
+          </a:graphicData>
+        </a:graphic>
+      </p:graphicFrame>
+      <p:graphicFrame>
+        <p:nvGraphicFramePr>
+          <p:cNvPr id="8" name="Table 7"/>
+          <p:cNvGraphicFramePr>
+            <a:graphicFrameLocks noGrp="1"/>
+          </p:cNvGraphicFramePr>
+          <p:nvPr/>
+        </p:nvGraphicFramePr>
+        <p:xfrm>
+          <a:off x="365760" y="2050288"/>
+          <a:ext cx="8412479" cy="349504"/>
+        </p:xfrm>
+        <a:graphic>
+          <a:graphicData uri="http://schemas.openxmlformats.org/drawingml/2006/table">
+            <a:tbl>
+              <a:tblPr firstRow="1" bandRow="1">
+                <a:tableStyleId>{5C22544A-7EE6-4342-B048-85BDC9FD1C3A}</a:tableStyleId>
+              </a:tblPr>
+              <a:tblGrid>
+                <a:gridCol w="2271369"/>
+                <a:gridCol w="6141110"/>
+              </a:tblGrid>
+              <a:tr h="349504">
+                <a:tc>
+                  <a:txBody>
+                    <a:bodyPr wrap="none"/>
+                    <a:lstStyle/>
+                    <a:p>
+                      <a:pPr>
+                        <a:lnSpc>
+                          <a:spcPts val="1600"/>
+                        </a:lnSpc>
+                        <a:spcAft>
+                          <a:spcPts val="0"/>
+                        </a:spcAft>
+                        <a:defRPr sz="1200" b="0">
+                          <a:solidFill>
+                            <a:srgbClr val="21243A"/>
+                          </a:solidFill>
+                          <a:latin typeface="Arial"/>
+                        </a:defRPr>
+                      </a:pPr>
+                      <a:r>
+                        <a:t>Evidence 5</a:t>
+                      </a:r>
+                    </a:p>
+                  </a:txBody>
+                  <a:tcPr marL="82296" marR="82296" marT="64008" marB="64008">
+                    <a:solidFill>
+                      <a:srgbClr val="FFFFFF"/>
+                    </a:solidFill>
+                  </a:tcPr>
+                </a:tc>
+                <a:tc>
+                  <a:txBody>
+                    <a:bodyPr wrap="none"/>
+                    <a:lstStyle/>
+                    <a:p>
+                      <a:pPr>
+                        <a:lnSpc>
+                          <a:spcPts val="1600"/>
+                        </a:lnSpc>
+                        <a:spcAft>
+                          <a:spcPts val="0"/>
+                        </a:spcAft>
+                        <a:defRPr sz="1200" b="0">
+                          <a:solidFill>
+                            <a:srgbClr val="21243A"/>
+                          </a:solidFill>
+                          <a:latin typeface="Arial"/>
+                        </a:defRPr>
+                      </a:pPr>
+                      <a:r>
+                        <a:t>Clean modern typography composited over generated artwork</a:t>
+                      </a:r>
+                    </a:p>
+                  </a:txBody>
+                  <a:tcPr marL="82296" marR="82296" marT="64008" marB="64008">
+                    <a:solidFill>
+                      <a:srgbClr val="FFFFFF"/>
+                    </a:solidFill>
+                  </a:tcPr>
+                </a:tc>
+              </a:tr>
+            </a:tbl>
+          </a:graphicData>
+        </a:graphic>
+      </p:graphicFrame>
+      <p:graphicFrame>
+        <p:nvGraphicFramePr>
+          <p:cNvPr id="9" name="Table 8"/>
+          <p:cNvGraphicFramePr>
+            <a:graphicFrameLocks noGrp="1"/>
+          </p:cNvGraphicFramePr>
+          <p:nvPr/>
+        </p:nvGraphicFramePr>
+        <p:xfrm>
+          <a:off x="365760" y="2399792"/>
+          <a:ext cx="8412479" cy="552704"/>
+        </p:xfrm>
+        <a:graphic>
+          <a:graphicData uri="http://schemas.openxmlformats.org/drawingml/2006/table">
+            <a:tbl>
+              <a:tblPr firstRow="1" bandRow="1">
+                <a:tableStyleId>{5C22544A-7EE6-4342-B048-85BDC9FD1C3A}</a:tableStyleId>
+              </a:tblPr>
+              <a:tblGrid>
+                <a:gridCol w="2271369"/>
+                <a:gridCol w="6141110"/>
+              </a:tblGrid>
+              <a:tr h="552704">
+                <a:tc>
+                  <a:txBody>
+                    <a:bodyPr wrap="none"/>
+                    <a:lstStyle/>
+                    <a:p>
+                      <a:pPr>
+                        <a:lnSpc>
+                          <a:spcPts val="1600"/>
+                        </a:lnSpc>
+                        <a:spcAft>
+                          <a:spcPts val="0"/>
+                        </a:spcAft>
+                        <a:defRPr sz="1200" b="0">
+                          <a:solidFill>
+                            <a:srgbClr val="21243A"/>
+                          </a:solidFill>
+                          <a:latin typeface="Arial"/>
+                        </a:defRPr>
+                      </a:pPr>
+                      <a:r>
+                        <a:t>Evidence 6</a:t>
+                      </a:r>
+                    </a:p>
+                  </a:txBody>
+                  <a:tcPr marL="82296" marR="82296" marT="64008" marB="64008">
+                    <a:solidFill>
+                      <a:srgbClr val="F1F7F7"/>
+                    </a:solidFill>
+                  </a:tcPr>
+                </a:tc>
+                <a:tc>
+                  <a:txBody>
+                    <a:bodyPr wrap="none"/>
+                    <a:lstStyle/>
+                    <a:p>
+                      <a:pPr>
+                        <a:lnSpc>
+                          <a:spcPts val="1600"/>
+                        </a:lnSpc>
+                        <a:spcAft>
+                          <a:spcPts val="0"/>
+                        </a:spcAft>
+                        <a:defRPr sz="1200" b="0">
+                          <a:solidFill>
+                            <a:srgbClr val="21243A"/>
+                          </a:solidFill>
+                          <a:latin typeface="Arial"/>
+                        </a:defRPr>
+                      </a:pPr>
+                      <a:r>
+                        <a:t>Caveat: High-quality human digital medical illustrators use similar styles, making</a:t>
+                      </a:r>
+                    </a:p>
+                    <a:p>
+                      <a:pPr>
+                        <a:lnSpc>
+                          <a:spcPts val="1600"/>
+                        </a:lnSpc>
+                        <a:spcAft>
+                          <a:spcPts val="0"/>
+                        </a:spcAft>
+                        <a:defRPr sz="1200" b="0">
+                          <a:solidFill>
+                            <a:srgbClr val="21243A"/>
+                          </a:solidFill>
+                          <a:latin typeface="Arial"/>
+                        </a:defRPr>
+                      </a:pPr>
+                      <a:r>
+                        <a:t>definitive technical separation difficult without source files.</a:t>
                       </a:r>
                     </a:p>
                   </a:txBody>
@@ -5674,7 +6508,7 @@
               </a:defRPr>
             </a:pPr>
             <a:r>
-              <a:t>Additional findings</a:t>
+              <a:t>Content Credentials / provenance</a:t>
             </a:r>
           </a:p>
         </p:txBody>
@@ -5894,7 +6728,7 @@
                         </a:defRPr>
                       </a:pPr>
                       <a:r>
-                        <a:t>Local forensic cues</a:t>
+                        <a:t>Provider</a:t>
                       </a:r>
                     </a:p>
                   </a:txBody>
@@ -5924,7 +6758,7 @@
                         </a:defRPr>
                       </a:pPr>
                       <a:r>
-                        <a:t>Supporting observation; considered alongside the model assessments.</a:t>
+                        <a:t>C2PA Content Credentials</a:t>
                       </a:r>
                     </a:p>
                   </a:txBody>
@@ -5982,7 +6816,7 @@
                         </a:defRPr>
                       </a:pPr>
                       <a:r>
-                        <a:t>C2PA Content Credentials</a:t>
+                        <a:t>Model</a:t>
                       </a:r>
                     </a:p>
                   </a:txBody>
@@ -6012,7 +6846,768 @@
                         </a:defRPr>
                       </a:pPr>
                       <a:r>
+                        <a:t>Not recorded</a:t>
+                      </a:r>
+                    </a:p>
+                  </a:txBody>
+                  <a:tcPr marL="82296" marR="82296" marT="64008" marB="64008">
+                    <a:solidFill>
+                      <a:srgbClr val="FFFFFF"/>
+                    </a:solidFill>
+                  </a:tcPr>
+                </a:tc>
+              </a:tr>
+            </a:tbl>
+          </a:graphicData>
+        </a:graphic>
+      </p:graphicFrame>
+      <p:graphicFrame>
+        <p:nvGraphicFramePr>
+          <p:cNvPr id="9" name="Table 8"/>
+          <p:cNvGraphicFramePr>
+            <a:graphicFrameLocks noGrp="1"/>
+          </p:cNvGraphicFramePr>
+          <p:nvPr/>
+        </p:nvGraphicFramePr>
+        <p:xfrm>
+          <a:off x="365760" y="2399792"/>
+          <a:ext cx="8412479" cy="349504"/>
+        </p:xfrm>
+        <a:graphic>
+          <a:graphicData uri="http://schemas.openxmlformats.org/drawingml/2006/table">
+            <a:tbl>
+              <a:tblPr firstRow="1" bandRow="1">
+                <a:tableStyleId>{5C22544A-7EE6-4342-B048-85BDC9FD1C3A}</a:tableStyleId>
+              </a:tblPr>
+              <a:tblGrid>
+                <a:gridCol w="2271369"/>
+                <a:gridCol w="6141110"/>
+              </a:tblGrid>
+              <a:tr h="349504">
+                <a:tc>
+                  <a:txBody>
+                    <a:bodyPr wrap="none"/>
+                    <a:lstStyle/>
+                    <a:p>
+                      <a:pPr>
+                        <a:lnSpc>
+                          <a:spcPts val="1600"/>
+                        </a:lnSpc>
+                        <a:spcAft>
+                          <a:spcPts val="0"/>
+                        </a:spcAft>
+                        <a:defRPr sz="1200" b="0">
+                          <a:solidFill>
+                            <a:srgbClr val="21243A"/>
+                          </a:solidFill>
+                          <a:latin typeface="Arial"/>
+                        </a:defRPr>
+                      </a:pPr>
+                      <a:r>
+                        <a:t>Status</a:t>
+                      </a:r>
+                    </a:p>
+                  </a:txBody>
+                  <a:tcPr marL="82296" marR="82296" marT="64008" marB="64008">
+                    <a:solidFill>
+                      <a:srgbClr val="F1F7F7"/>
+                    </a:solidFill>
+                  </a:tcPr>
+                </a:tc>
+                <a:tc>
+                  <a:txBody>
+                    <a:bodyPr wrap="none"/>
+                    <a:lstStyle/>
+                    <a:p>
+                      <a:pPr>
+                        <a:lnSpc>
+                          <a:spcPts val="1600"/>
+                        </a:lnSpc>
+                        <a:spcAft>
+                          <a:spcPts val="0"/>
+                        </a:spcAft>
+                        <a:defRPr sz="1200" b="0">
+                          <a:solidFill>
+                            <a:srgbClr val="21243A"/>
+                          </a:solidFill>
+                          <a:latin typeface="Arial"/>
+                        </a:defRPr>
+                      </a:pPr>
+                      <a:r>
+                        <a:t>ok</a:t>
+                      </a:r>
+                    </a:p>
+                  </a:txBody>
+                  <a:tcPr marL="82296" marR="82296" marT="64008" marB="64008">
+                    <a:solidFill>
+                      <a:srgbClr val="F1F7F7"/>
+                    </a:solidFill>
+                  </a:tcPr>
+                </a:tc>
+              </a:tr>
+            </a:tbl>
+          </a:graphicData>
+        </a:graphic>
+      </p:graphicFrame>
+      <p:graphicFrame>
+        <p:nvGraphicFramePr>
+          <p:cNvPr id="10" name="Table 9"/>
+          <p:cNvGraphicFramePr>
+            <a:graphicFrameLocks noGrp="1"/>
+          </p:cNvGraphicFramePr>
+          <p:nvPr/>
+        </p:nvGraphicFramePr>
+        <p:xfrm>
+          <a:off x="365760" y="2749296"/>
+          <a:ext cx="8412479" cy="349504"/>
+        </p:xfrm>
+        <a:graphic>
+          <a:graphicData uri="http://schemas.openxmlformats.org/drawingml/2006/table">
+            <a:tbl>
+              <a:tblPr firstRow="1" bandRow="1">
+                <a:tableStyleId>{5C22544A-7EE6-4342-B048-85BDC9FD1C3A}</a:tableStyleId>
+              </a:tblPr>
+              <a:tblGrid>
+                <a:gridCol w="2271369"/>
+                <a:gridCol w="6141110"/>
+              </a:tblGrid>
+              <a:tr h="349504">
+                <a:tc>
+                  <a:txBody>
+                    <a:bodyPr wrap="none"/>
+                    <a:lstStyle/>
+                    <a:p>
+                      <a:pPr>
+                        <a:lnSpc>
+                          <a:spcPts val="1600"/>
+                        </a:lnSpc>
+                        <a:spcAft>
+                          <a:spcPts val="0"/>
+                        </a:spcAft>
+                        <a:defRPr sz="1200" b="0">
+                          <a:solidFill>
+                            <a:srgbClr val="21243A"/>
+                          </a:solidFill>
+                          <a:latin typeface="Arial"/>
+                        </a:defRPr>
+                      </a:pPr>
+                      <a:r>
+                        <a:t>Assessment</a:t>
+                      </a:r>
+                    </a:p>
+                  </a:txBody>
+                  <a:tcPr marL="82296" marR="82296" marT="64008" marB="64008">
+                    <a:solidFill>
+                      <a:srgbClr val="FFFFFF"/>
+                    </a:solidFill>
+                  </a:tcPr>
+                </a:tc>
+                <a:tc>
+                  <a:txBody>
+                    <a:bodyPr wrap="none"/>
+                    <a:lstStyle/>
+                    <a:p>
+                      <a:pPr>
+                        <a:lnSpc>
+                          <a:spcPts val="1600"/>
+                        </a:lnSpc>
+                        <a:spcAft>
+                          <a:spcPts val="0"/>
+                        </a:spcAft>
+                        <a:defRPr sz="1200" b="0">
+                          <a:solidFill>
+                            <a:srgbClr val="21243A"/>
+                          </a:solidFill>
+                          <a:latin typeface="Arial"/>
+                        </a:defRPr>
+                      </a:pPr>
+                      <a:r>
+                        <a:t>inconclusive</a:t>
+                      </a:r>
+                    </a:p>
+                  </a:txBody>
+                  <a:tcPr marL="82296" marR="82296" marT="64008" marB="64008">
+                    <a:solidFill>
+                      <a:srgbClr val="FFFFFF"/>
+                    </a:solidFill>
+                  </a:tcPr>
+                </a:tc>
+              </a:tr>
+            </a:tbl>
+          </a:graphicData>
+        </a:graphic>
+      </p:graphicFrame>
+      <p:graphicFrame>
+        <p:nvGraphicFramePr>
+          <p:cNvPr id="11" name="Table 10"/>
+          <p:cNvGraphicFramePr>
+            <a:graphicFrameLocks noGrp="1"/>
+          </p:cNvGraphicFramePr>
+          <p:nvPr/>
+        </p:nvGraphicFramePr>
+        <p:xfrm>
+          <a:off x="365760" y="3098800"/>
+          <a:ext cx="8412479" cy="349504"/>
+        </p:xfrm>
+        <a:graphic>
+          <a:graphicData uri="http://schemas.openxmlformats.org/drawingml/2006/table">
+            <a:tbl>
+              <a:tblPr firstRow="1" bandRow="1">
+                <a:tableStyleId>{5C22544A-7EE6-4342-B048-85BDC9FD1C3A}</a:tableStyleId>
+              </a:tblPr>
+              <a:tblGrid>
+                <a:gridCol w="2271369"/>
+                <a:gridCol w="6141110"/>
+              </a:tblGrid>
+              <a:tr h="349504">
+                <a:tc>
+                  <a:txBody>
+                    <a:bodyPr wrap="none"/>
+                    <a:lstStyle/>
+                    <a:p>
+                      <a:pPr>
+                        <a:lnSpc>
+                          <a:spcPts val="1600"/>
+                        </a:lnSpc>
+                        <a:spcAft>
+                          <a:spcPts val="0"/>
+                        </a:spcAft>
+                        <a:defRPr sz="1200" b="0">
+                          <a:solidFill>
+                            <a:srgbClr val="21243A"/>
+                          </a:solidFill>
+                          <a:latin typeface="Arial"/>
+                        </a:defRPr>
+                      </a:pPr>
+                      <a:r>
+                        <a:t>Confidence</a:t>
+                      </a:r>
+                    </a:p>
+                  </a:txBody>
+                  <a:tcPr marL="82296" marR="82296" marT="64008" marB="64008">
+                    <a:solidFill>
+                      <a:srgbClr val="F1F7F7"/>
+                    </a:solidFill>
+                  </a:tcPr>
+                </a:tc>
+                <a:tc>
+                  <a:txBody>
+                    <a:bodyPr wrap="none"/>
+                    <a:lstStyle/>
+                    <a:p>
+                      <a:pPr>
+                        <a:lnSpc>
+                          <a:spcPts val="1600"/>
+                        </a:lnSpc>
+                        <a:spcAft>
+                          <a:spcPts val="0"/>
+                        </a:spcAft>
+                        <a:defRPr sz="1200" b="0">
+                          <a:solidFill>
+                            <a:srgbClr val="21243A"/>
+                          </a:solidFill>
+                          <a:latin typeface="Arial"/>
+                        </a:defRPr>
+                      </a:pPr>
+                      <a:r>
+                        <a:t>Not recorded</a:t>
+                      </a:r>
+                    </a:p>
+                  </a:txBody>
+                  <a:tcPr marL="82296" marR="82296" marT="64008" marB="64008">
+                    <a:solidFill>
+                      <a:srgbClr val="F1F7F7"/>
+                    </a:solidFill>
+                  </a:tcPr>
+                </a:tc>
+              </a:tr>
+            </a:tbl>
+          </a:graphicData>
+        </a:graphic>
+      </p:graphicFrame>
+      <p:graphicFrame>
+        <p:nvGraphicFramePr>
+          <p:cNvPr id="12" name="Table 11"/>
+          <p:cNvGraphicFramePr>
+            <a:graphicFrameLocks noGrp="1"/>
+          </p:cNvGraphicFramePr>
+          <p:nvPr/>
+        </p:nvGraphicFramePr>
+        <p:xfrm>
+          <a:off x="365760" y="3448304"/>
+          <a:ext cx="8412479" cy="349504"/>
+        </p:xfrm>
+        <a:graphic>
+          <a:graphicData uri="http://schemas.openxmlformats.org/drawingml/2006/table">
+            <a:tbl>
+              <a:tblPr firstRow="1" bandRow="1">
+                <a:tableStyleId>{5C22544A-7EE6-4342-B048-85BDC9FD1C3A}</a:tableStyleId>
+              </a:tblPr>
+              <a:tblGrid>
+                <a:gridCol w="2271369"/>
+                <a:gridCol w="6141110"/>
+              </a:tblGrid>
+              <a:tr h="349504">
+                <a:tc>
+                  <a:txBody>
+                    <a:bodyPr wrap="none"/>
+                    <a:lstStyle/>
+                    <a:p>
+                      <a:pPr>
+                        <a:lnSpc>
+                          <a:spcPts val="1600"/>
+                        </a:lnSpc>
+                        <a:spcAft>
+                          <a:spcPts val="0"/>
+                        </a:spcAft>
+                        <a:defRPr sz="1200" b="0">
+                          <a:solidFill>
+                            <a:srgbClr val="21243A"/>
+                          </a:solidFill>
+                          <a:latin typeface="Arial"/>
+                        </a:defRPr>
+                      </a:pPr>
+                      <a:r>
+                        <a:t>Role in assessment</a:t>
+                      </a:r>
+                    </a:p>
+                  </a:txBody>
+                  <a:tcPr marL="82296" marR="82296" marT="64008" marB="64008">
+                    <a:solidFill>
+                      <a:srgbClr val="FFFFFF"/>
+                    </a:solidFill>
+                  </a:tcPr>
+                </a:tc>
+                <a:tc>
+                  <a:txBody>
+                    <a:bodyPr wrap="none"/>
+                    <a:lstStyle/>
+                    <a:p>
+                      <a:pPr>
+                        <a:lnSpc>
+                          <a:spcPts val="1600"/>
+                        </a:lnSpc>
+                        <a:spcAft>
+                          <a:spcPts val="0"/>
+                        </a:spcAft>
+                        <a:defRPr sz="1200" b="0">
+                          <a:solidFill>
+                            <a:srgbClr val="21243A"/>
+                          </a:solidFill>
+                          <a:latin typeface="Arial"/>
+                        </a:defRPr>
+                      </a:pPr>
+                      <a:r>
+                        <a:t>Additional finding</a:t>
+                      </a:r>
+                    </a:p>
+                  </a:txBody>
+                  <a:tcPr marL="82296" marR="82296" marT="64008" marB="64008">
+                    <a:solidFill>
+                      <a:srgbClr val="FFFFFF"/>
+                    </a:solidFill>
+                  </a:tcPr>
+                </a:tc>
+              </a:tr>
+            </a:tbl>
+          </a:graphicData>
+        </a:graphic>
+      </p:graphicFrame>
+      <p:graphicFrame>
+        <p:nvGraphicFramePr>
+          <p:cNvPr id="13" name="Table 12"/>
+          <p:cNvGraphicFramePr>
+            <a:graphicFrameLocks noGrp="1"/>
+          </p:cNvGraphicFramePr>
+          <p:nvPr/>
+        </p:nvGraphicFramePr>
+        <p:xfrm>
+          <a:off x="365760" y="3797808"/>
+          <a:ext cx="8412479" cy="349504"/>
+        </p:xfrm>
+        <a:graphic>
+          <a:graphicData uri="http://schemas.openxmlformats.org/drawingml/2006/table">
+            <a:tbl>
+              <a:tblPr firstRow="1" bandRow="1">
+                <a:tableStyleId>{5C22544A-7EE6-4342-B048-85BDC9FD1C3A}</a:tableStyleId>
+              </a:tblPr>
+              <a:tblGrid>
+                <a:gridCol w="2271369"/>
+                <a:gridCol w="6141110"/>
+              </a:tblGrid>
+              <a:tr h="349504">
+                <a:tc>
+                  <a:txBody>
+                    <a:bodyPr wrap="none"/>
+                    <a:lstStyle/>
+                    <a:p>
+                      <a:pPr>
+                        <a:lnSpc>
+                          <a:spcPts val="1600"/>
+                        </a:lnSpc>
+                        <a:spcAft>
+                          <a:spcPts val="0"/>
+                        </a:spcAft>
+                        <a:defRPr sz="1200" b="0">
+                          <a:solidFill>
+                            <a:srgbClr val="21243A"/>
+                          </a:solidFill>
+                          <a:latin typeface="Arial"/>
+                        </a:defRPr>
+                      </a:pPr>
+                      <a:r>
+                        <a:t>Provider summary</a:t>
+                      </a:r>
+                    </a:p>
+                  </a:txBody>
+                  <a:tcPr marL="82296" marR="82296" marT="64008" marB="64008">
+                    <a:solidFill>
+                      <a:srgbClr val="F1F7F7"/>
+                    </a:solidFill>
+                  </a:tcPr>
+                </a:tc>
+                <a:tc>
+                  <a:txBody>
+                    <a:bodyPr wrap="none"/>
+                    <a:lstStyle/>
+                    <a:p>
+                      <a:pPr>
+                        <a:lnSpc>
+                          <a:spcPts val="1600"/>
+                        </a:lnSpc>
+                        <a:spcAft>
+                          <a:spcPts val="0"/>
+                        </a:spcAft>
+                        <a:defRPr sz="1200" b="0">
+                          <a:solidFill>
+                            <a:srgbClr val="21243A"/>
+                          </a:solidFill>
+                          <a:latin typeface="Arial"/>
+                        </a:defRPr>
+                      </a:pPr>
+                      <a:r>
                         <a:t>Embedded credentials: none found. Origin remains unresolved by this check.</a:t>
+                      </a:r>
+                    </a:p>
+                  </a:txBody>
+                  <a:tcPr marL="82296" marR="82296" marT="64008" marB="64008">
+                    <a:solidFill>
+                      <a:srgbClr val="F1F7F7"/>
+                    </a:solidFill>
+                  </a:tcPr>
+                </a:tc>
+              </a:tr>
+            </a:tbl>
+          </a:graphicData>
+        </a:graphic>
+      </p:graphicFrame>
+      <p:graphicFrame>
+        <p:nvGraphicFramePr>
+          <p:cNvPr id="14" name="Table 13"/>
+          <p:cNvGraphicFramePr>
+            <a:graphicFrameLocks noGrp="1"/>
+          </p:cNvGraphicFramePr>
+          <p:nvPr/>
+        </p:nvGraphicFramePr>
+        <p:xfrm>
+          <a:off x="365760" y="4147312"/>
+          <a:ext cx="8412479" cy="552704"/>
+        </p:xfrm>
+        <a:graphic>
+          <a:graphicData uri="http://schemas.openxmlformats.org/drawingml/2006/table">
+            <a:tbl>
+              <a:tblPr firstRow="1" bandRow="1">
+                <a:tableStyleId>{5C22544A-7EE6-4342-B048-85BDC9FD1C3A}</a:tableStyleId>
+              </a:tblPr>
+              <a:tblGrid>
+                <a:gridCol w="2271369"/>
+                <a:gridCol w="6141110"/>
+              </a:tblGrid>
+              <a:tr h="552704">
+                <a:tc>
+                  <a:txBody>
+                    <a:bodyPr wrap="none"/>
+                    <a:lstStyle/>
+                    <a:p>
+                      <a:pPr>
+                        <a:lnSpc>
+                          <a:spcPts val="1600"/>
+                        </a:lnSpc>
+                        <a:spcAft>
+                          <a:spcPts val="0"/>
+                        </a:spcAft>
+                        <a:defRPr sz="1200" b="0">
+                          <a:solidFill>
+                            <a:srgbClr val="21243A"/>
+                          </a:solidFill>
+                          <a:latin typeface="Arial"/>
+                        </a:defRPr>
+                      </a:pPr>
+                      <a:r>
+                        <a:t>Evidence 1</a:t>
+                      </a:r>
+                    </a:p>
+                  </a:txBody>
+                  <a:tcPr marL="82296" marR="82296" marT="64008" marB="64008">
+                    <a:solidFill>
+                      <a:srgbClr val="FFFFFF"/>
+                    </a:solidFill>
+                  </a:tcPr>
+                </a:tc>
+                <a:tc>
+                  <a:txBody>
+                    <a:bodyPr wrap="none"/>
+                    <a:lstStyle/>
+                    <a:p>
+                      <a:pPr>
+                        <a:lnSpc>
+                          <a:spcPts val="1600"/>
+                        </a:lnSpc>
+                        <a:spcAft>
+                          <a:spcPts val="0"/>
+                        </a:spcAft>
+                        <a:defRPr sz="1200" b="0">
+                          <a:solidFill>
+                            <a:srgbClr val="21243A"/>
+                          </a:solidFill>
+                          <a:latin typeface="Arial"/>
+                        </a:defRPr>
+                      </a:pPr>
+                      <a:r>
+                        <a:t>Coverage: credentials embedded in the submitted file. External credentials were</a:t>
+                      </a:r>
+                    </a:p>
+                    <a:p>
+                      <a:pPr>
+                        <a:lnSpc>
+                          <a:spcPts val="1600"/>
+                        </a:lnSpc>
+                        <a:spcAft>
+                          <a:spcPts val="0"/>
+                        </a:spcAft>
+                        <a:defRPr sz="1200" b="0">
+                          <a:solidFill>
+                            <a:srgbClr val="21243A"/>
+                          </a:solidFill>
+                          <a:latin typeface="Arial"/>
+                        </a:defRPr>
+                      </a:pPr>
+                      <a:r>
+                        <a:t>not retrieved.</a:t>
+                      </a:r>
+                    </a:p>
+                  </a:txBody>
+                  <a:tcPr marL="82296" marR="82296" marT="64008" marB="64008">
+                    <a:solidFill>
+                      <a:srgbClr val="FFFFFF"/>
+                    </a:solidFill>
+                  </a:tcPr>
+                </a:tc>
+              </a:tr>
+            </a:tbl>
+          </a:graphicData>
+        </a:graphic>
+      </p:graphicFrame>
+      <p:graphicFrame>
+        <p:nvGraphicFramePr>
+          <p:cNvPr id="15" name="Table 14"/>
+          <p:cNvGraphicFramePr>
+            <a:graphicFrameLocks noGrp="1"/>
+          </p:cNvGraphicFramePr>
+          <p:nvPr/>
+        </p:nvGraphicFramePr>
+        <p:xfrm>
+          <a:off x="365760" y="4700016"/>
+          <a:ext cx="8412479" cy="552704"/>
+        </p:xfrm>
+        <a:graphic>
+          <a:graphicData uri="http://schemas.openxmlformats.org/drawingml/2006/table">
+            <a:tbl>
+              <a:tblPr firstRow="1" bandRow="1">
+                <a:tableStyleId>{5C22544A-7EE6-4342-B048-85BDC9FD1C3A}</a:tableStyleId>
+              </a:tblPr>
+              <a:tblGrid>
+                <a:gridCol w="2271369"/>
+                <a:gridCol w="6141110"/>
+              </a:tblGrid>
+              <a:tr h="552704">
+                <a:tc>
+                  <a:txBody>
+                    <a:bodyPr wrap="none"/>
+                    <a:lstStyle/>
+                    <a:p>
+                      <a:pPr>
+                        <a:lnSpc>
+                          <a:spcPts val="1600"/>
+                        </a:lnSpc>
+                        <a:spcAft>
+                          <a:spcPts val="0"/>
+                        </a:spcAft>
+                        <a:defRPr sz="1200" b="0">
+                          <a:solidFill>
+                            <a:srgbClr val="21243A"/>
+                          </a:solidFill>
+                          <a:latin typeface="Arial"/>
+                        </a:defRPr>
+                      </a:pPr>
+                      <a:r>
+                        <a:t>Evidence 2</a:t>
+                      </a:r>
+                    </a:p>
+                  </a:txBody>
+                  <a:tcPr marL="82296" marR="82296" marT="64008" marB="64008">
+                    <a:solidFill>
+                      <a:srgbClr val="F1F7F7"/>
+                    </a:solidFill>
+                  </a:tcPr>
+                </a:tc>
+                <a:tc>
+                  <a:txBody>
+                    <a:bodyPr wrap="none"/>
+                    <a:lstStyle/>
+                    <a:p>
+                      <a:pPr>
+                        <a:lnSpc>
+                          <a:spcPts val="1600"/>
+                        </a:lnSpc>
+                        <a:spcAft>
+                          <a:spcPts val="0"/>
+                        </a:spcAft>
+                        <a:defRPr sz="1200" b="0">
+                          <a:solidFill>
+                            <a:srgbClr val="21243A"/>
+                          </a:solidFill>
+                          <a:latin typeface="Arial"/>
+                        </a:defRPr>
+                      </a:pPr>
+                      <a:r>
+                        <a:t>Verifier: c2pa-python 0.37.12; native SDK 0.91.0; specification target 2.4; policy</a:t>
+                      </a:r>
+                    </a:p>
+                    <a:p>
+                      <a:pPr>
+                        <a:lnSpc>
+                          <a:spcPts val="1600"/>
+                        </a:lnSpc>
+                        <a:spcAft>
+                          <a:spcPts val="0"/>
+                        </a:spcAft>
+                        <a:defRPr sz="1200" b="0">
+                          <a:solidFill>
+                            <a:srgbClr val="21243A"/>
+                          </a:solidFill>
+                          <a:latin typeface="Arial"/>
+                        </a:defRPr>
+                      </a:pPr>
+                      <a:r>
+                        <a:t>embedded-offline-reviewed-trust-v3.</a:t>
+                      </a:r>
+                    </a:p>
+                  </a:txBody>
+                  <a:tcPr marL="82296" marR="82296" marT="64008" marB="64008">
+                    <a:solidFill>
+                      <a:srgbClr val="F1F7F7"/>
+                    </a:solidFill>
+                  </a:tcPr>
+                </a:tc>
+              </a:tr>
+            </a:tbl>
+          </a:graphicData>
+        </a:graphic>
+      </p:graphicFrame>
+      <p:graphicFrame>
+        <p:nvGraphicFramePr>
+          <p:cNvPr id="16" name="Table 15"/>
+          <p:cNvGraphicFramePr>
+            <a:graphicFrameLocks noGrp="1"/>
+          </p:cNvGraphicFramePr>
+          <p:nvPr/>
+        </p:nvGraphicFramePr>
+        <p:xfrm>
+          <a:off x="365760" y="5252720"/>
+          <a:ext cx="8412479" cy="552704"/>
+        </p:xfrm>
+        <a:graphic>
+          <a:graphicData uri="http://schemas.openxmlformats.org/drawingml/2006/table">
+            <a:tbl>
+              <a:tblPr firstRow="1" bandRow="1">
+                <a:tableStyleId>{5C22544A-7EE6-4342-B048-85BDC9FD1C3A}</a:tableStyleId>
+              </a:tblPr>
+              <a:tblGrid>
+                <a:gridCol w="2271369"/>
+                <a:gridCol w="6141110"/>
+              </a:tblGrid>
+              <a:tr h="552704">
+                <a:tc>
+                  <a:txBody>
+                    <a:bodyPr wrap="none"/>
+                    <a:lstStyle/>
+                    <a:p>
+                      <a:pPr>
+                        <a:lnSpc>
+                          <a:spcPts val="1600"/>
+                        </a:lnSpc>
+                        <a:spcAft>
+                          <a:spcPts val="0"/>
+                        </a:spcAft>
+                        <a:defRPr sz="1200" b="0">
+                          <a:solidFill>
+                            <a:srgbClr val="21243A"/>
+                          </a:solidFill>
+                          <a:latin typeface="Arial"/>
+                        </a:defRPr>
+                      </a:pPr>
+                      <a:r>
+                        <a:t>Evidence 3</a:t>
+                      </a:r>
+                    </a:p>
+                  </a:txBody>
+                  <a:tcPr marL="82296" marR="82296" marT="64008" marB="64008">
+                    <a:solidFill>
+                      <a:srgbClr val="FFFFFF"/>
+                    </a:solidFill>
+                  </a:tcPr>
+                </a:tc>
+                <a:tc>
+                  <a:txBody>
+                    <a:bodyPr wrap="none"/>
+                    <a:lstStyle/>
+                    <a:p>
+                      <a:pPr>
+                        <a:lnSpc>
+                          <a:spcPts val="1600"/>
+                        </a:lnSpc>
+                        <a:spcAft>
+                          <a:spcPts val="0"/>
+                        </a:spcAft>
+                        <a:defRPr sz="1200" b="0">
+                          <a:solidFill>
+                            <a:srgbClr val="21243A"/>
+                          </a:solidFill>
+                          <a:latin typeface="Arial"/>
+                        </a:defRPr>
+                      </a:pPr>
+                      <a:r>
+                        <a:t>Offline embedded-manifest verification; no network trust-list, manifest or</a:t>
+                      </a:r>
+                    </a:p>
+                    <a:p>
+                      <a:pPr>
+                        <a:lnSpc>
+                          <a:spcPts val="1600"/>
+                        </a:lnSpc>
+                        <a:spcAft>
+                          <a:spcPts val="0"/>
+                        </a:spcAft>
+                        <a:defRPr sz="1200" b="0">
+                          <a:solidFill>
+                            <a:srgbClr val="21243A"/>
+                          </a:solidFill>
+                          <a:latin typeface="Arial"/>
+                        </a:defRPr>
+                      </a:pPr>
+                      <a:r>
+                        <a:t>revocation refresh.</a:t>
                       </a:r>
                     </a:p>
                   </a:txBody>
@@ -6124,7 +7719,7 @@
               </a:defRPr>
             </a:pPr>
             <a:r>
-              <a:t>How this assessment was reached</a:t>
+              <a:t>Content Credentials / provenance (continued)</a:t>
             </a:r>
           </a:p>
         </p:txBody>
@@ -6344,7 +7939,7 @@
                         </a:defRPr>
                       </a:pPr>
                       <a:r>
-                        <a:t>1. override</a:t>
+                        <a:t>Evidence 4</a:t>
                       </a:r>
                     </a:p>
                   </a:txBody>
@@ -6374,221 +7969,26 @@
                         </a:defRPr>
                       </a:pPr>
                       <a:r>
-                        <a:t>outcome=none; detail=No confirmed C2PA AI assertion or SynthID watermark.</a:t>
-                      </a:r>
-                    </a:p>
-                    <a:p>
-                      <a:pPr>
-                        <a:lnSpc>
-                          <a:spcPts val="1600"/>
-                        </a:lnSpc>
-                        <a:spcAft>
-                          <a:spcPts val="0"/>
-                        </a:spcAft>
-                        <a:defRPr sz="1200" b="0">
-                          <a:solidFill>
-                            <a:srgbClr val="21243A"/>
-                          </a:solidFill>
-                          <a:latin typeface="Arial"/>
-                        </a:defRPr>
-                      </a:pPr>
-                      <a:r>
-                        <a:t>Origin remains unresolved by these checks.</a:t>
-                      </a:r>
-                    </a:p>
-                  </a:txBody>
-                  <a:tcPr marL="82296" marR="82296" marT="64008" marB="64008">
-                    <a:solidFill>
-                      <a:srgbClr val="F1F7F7"/>
-                    </a:solidFill>
-                  </a:tcPr>
-                </a:tc>
-              </a:tr>
-            </a:tbl>
-          </a:graphicData>
-        </a:graphic>
-      </p:graphicFrame>
-      <p:graphicFrame>
-        <p:nvGraphicFramePr>
-          <p:cNvPr id="8" name="Table 7"/>
-          <p:cNvGraphicFramePr>
-            <a:graphicFrameLocks noGrp="1"/>
-          </p:cNvGraphicFramePr>
-          <p:nvPr/>
-        </p:nvGraphicFramePr>
-        <p:xfrm>
-          <a:off x="365760" y="2253488"/>
-          <a:ext cx="8412479" cy="349504"/>
-        </p:xfrm>
-        <a:graphic>
-          <a:graphicData uri="http://schemas.openxmlformats.org/drawingml/2006/table">
-            <a:tbl>
-              <a:tblPr firstRow="1" bandRow="1">
-                <a:tableStyleId>{5C22544A-7EE6-4342-B048-85BDC9FD1C3A}</a:tableStyleId>
-              </a:tblPr>
-              <a:tblGrid>
-                <a:gridCol w="2271369"/>
-                <a:gridCol w="6141110"/>
-              </a:tblGrid>
-              <a:tr h="349504">
-                <a:tc>
-                  <a:txBody>
-                    <a:bodyPr wrap="none"/>
-                    <a:lstStyle/>
-                    <a:p>
-                      <a:pPr>
-                        <a:lnSpc>
-                          <a:spcPts val="1600"/>
-                        </a:lnSpc>
-                        <a:spcAft>
-                          <a:spcPts val="0"/>
-                        </a:spcAft>
-                        <a:defRPr sz="1200" b="0">
-                          <a:solidFill>
-                            <a:srgbClr val="21243A"/>
-                          </a:solidFill>
-                          <a:latin typeface="Arial"/>
-                        </a:defRPr>
-                      </a:pPr>
-                      <a:r>
-                        <a:t>2. model_agreement</a:t>
-                      </a:r>
-                    </a:p>
-                  </a:txBody>
-                  <a:tcPr marL="82296" marR="82296" marT="64008" marB="64008">
-                    <a:solidFill>
-                      <a:srgbClr val="FFFFFF"/>
-                    </a:solidFill>
-                  </a:tcPr>
-                </a:tc>
-                <a:tc>
-                  <a:txBody>
-                    <a:bodyPr wrap="none"/>
-                    <a:lstStyle/>
-                    <a:p>
-                      <a:pPr>
-                        <a:lnSpc>
-                          <a:spcPts val="1600"/>
-                        </a:lnSpc>
-                        <a:spcAft>
-                          <a:spcPts val="0"/>
-                        </a:spcAft>
-                        <a:defRPr sz="1200" b="0">
-                          <a:solidFill>
-                            <a:srgbClr val="21243A"/>
-                          </a:solidFill>
-                          <a:latin typeface="Arial"/>
-                        </a:defRPr>
-                      </a:pPr>
-                      <a:r>
-                        <a:t>synthetic=[]; authentic=[]; uncertain=[]; forensic_supports_synthetic=False</a:t>
-                      </a:r>
-                    </a:p>
-                  </a:txBody>
-                  <a:tcPr marL="82296" marR="82296" marT="64008" marB="64008">
-                    <a:solidFill>
-                      <a:srgbClr val="FFFFFF"/>
-                    </a:solidFill>
-                  </a:tcPr>
-                </a:tc>
-              </a:tr>
-            </a:tbl>
-          </a:graphicData>
-        </a:graphic>
-      </p:graphicFrame>
-      <p:graphicFrame>
-        <p:nvGraphicFramePr>
-          <p:cNvPr id="9" name="Table 8"/>
-          <p:cNvGraphicFramePr>
-            <a:graphicFrameLocks noGrp="1"/>
-          </p:cNvGraphicFramePr>
-          <p:nvPr/>
-        </p:nvGraphicFramePr>
-        <p:xfrm>
-          <a:off x="365760" y="2602992"/>
-          <a:ext cx="8412479" cy="552704"/>
-        </p:xfrm>
-        <a:graphic>
-          <a:graphicData uri="http://schemas.openxmlformats.org/drawingml/2006/table">
-            <a:tbl>
-              <a:tblPr firstRow="1" bandRow="1">
-                <a:tableStyleId>{5C22544A-7EE6-4342-B048-85BDC9FD1C3A}</a:tableStyleId>
-              </a:tblPr>
-              <a:tblGrid>
-                <a:gridCol w="2271369"/>
-                <a:gridCol w="6141110"/>
-              </a:tblGrid>
-              <a:tr h="552704">
-                <a:tc>
-                  <a:txBody>
-                    <a:bodyPr wrap="none"/>
-                    <a:lstStyle/>
-                    <a:p>
-                      <a:pPr>
-                        <a:lnSpc>
-                          <a:spcPts val="1600"/>
-                        </a:lnSpc>
-                        <a:spcAft>
-                          <a:spcPts val="0"/>
-                        </a:spcAft>
-                        <a:defRPr sz="1200" b="0">
-                          <a:solidFill>
-                            <a:srgbClr val="21243A"/>
-                          </a:solidFill>
-                          <a:latin typeface="Arial"/>
-                        </a:defRPr>
-                      </a:pPr>
-                      <a:r>
-                        <a:t>3. verdict</a:t>
-                      </a:r>
-                    </a:p>
-                  </a:txBody>
-                  <a:tcPr marL="82296" marR="82296" marT="64008" marB="64008">
-                    <a:solidFill>
-                      <a:srgbClr val="F1F7F7"/>
-                    </a:solidFill>
-                  </a:tcPr>
-                </a:tc>
-                <a:tc>
-                  <a:txBody>
-                    <a:bodyPr wrap="none"/>
-                    <a:lstStyle/>
-                    <a:p>
-                      <a:pPr>
-                        <a:lnSpc>
-                          <a:spcPts val="1600"/>
-                        </a:lnSpc>
-                        <a:spcAft>
-                          <a:spcPts val="0"/>
-                        </a:spcAft>
-                        <a:defRPr sz="1200" b="0">
-                          <a:solidFill>
-                            <a:srgbClr val="21243A"/>
-                          </a:solidFill>
-                          <a:latin typeface="Arial"/>
-                        </a:defRPr>
-                      </a:pPr>
-                      <a:r>
-                        <a:t>value=inconclusive; confidence=low; reason=No vision model returned a usable</a:t>
-                      </a:r>
-                    </a:p>
-                    <a:p>
-                      <a:pPr>
-                        <a:lnSpc>
-                          <a:spcPts val="1600"/>
-                        </a:lnSpc>
-                        <a:spcAft>
-                          <a:spcPts val="0"/>
-                        </a:spcAft>
-                        <a:defRPr sz="1200" b="0">
-                          <a:solidFill>
-                            <a:srgbClr val="21243A"/>
-                          </a:solidFill>
-                          <a:latin typeface="Arial"/>
-                        </a:defRPr>
-                      </a:pPr>
-                      <a:r>
-                        <a:t>result. Check provider status in the table.</a:t>
+                        <a:t>No reviewed local C2PA trust snapshot installed. Provenance overrides are</a:t>
+                      </a:r>
+                    </a:p>
+                    <a:p>
+                      <a:pPr>
+                        <a:lnSpc>
+                          <a:spcPts val="1600"/>
+                        </a:lnSpc>
+                        <a:spcAft>
+                          <a:spcPts val="0"/>
+                        </a:spcAft>
+                        <a:defRPr sz="1200" b="0">
+                          <a:solidFill>
+                            <a:srgbClr val="21243A"/>
+                          </a:solidFill>
+                          <a:latin typeface="Arial"/>
+                        </a:defRPr>
+                      </a:pPr>
+                      <a:r>
+                        <a:t>disabled.</a:t>
                       </a:r>
                     </a:p>
                   </a:txBody>
@@ -6700,7 +8100,7 @@
               </a:defRPr>
             </a:pPr>
             <a:r>
-              <a:t>File and analysis record</a:t>
+              <a:t>Provider evidence / 5</a:t>
             </a:r>
           </a:p>
         </p:txBody>
@@ -6920,7 +8320,7 @@
                         </a:defRPr>
                       </a:pPr>
                       <a:r>
-                        <a:t>File</a:t>
+                        <a:t>Provider</a:t>
                       </a:r>
                     </a:p>
                   </a:txBody>
@@ -6950,7 +8350,7 @@
                         </a:defRPr>
                       </a:pPr>
                       <a:r>
-                        <a:t>journal-diagram.png</a:t>
+                        <a:t>Local forensic cues</a:t>
                       </a:r>
                     </a:p>
                   </a:txBody>
@@ -7008,7 +8408,7 @@
                         </a:defRPr>
                       </a:pPr>
                       <a:r>
-                        <a:t>Analysis ID</a:t>
+                        <a:t>Model</a:t>
                       </a:r>
                     </a:p>
                   </a:txBody>
@@ -7038,7 +8438,7 @@
                         </a:defRPr>
                       </a:pPr>
                       <a:r>
-                        <a:t>8af36632-7cb1-41aa-ac9a-74b314ddfa52</a:t>
+                        <a:t>Not recorded</a:t>
                       </a:r>
                     </a:p>
                   </a:txBody>
@@ -7096,7 +8496,7 @@
                         </a:defRPr>
                       </a:pPr>
                       <a:r>
-                        <a:t>Generated</a:t>
+                        <a:t>Status</a:t>
                       </a:r>
                     </a:p>
                   </a:txBody>
@@ -7126,7 +8526,7 @@
                         </a:defRPr>
                       </a:pPr>
                       <a:r>
-                        <a:t>2026-09-26T18:37:48+00:00</a:t>
+                        <a:t>ok</a:t>
                       </a:r>
                     </a:p>
                   </a:txBody>
@@ -7184,7 +8584,7 @@
                         </a:defRPr>
                       </a:pPr>
                       <a:r>
-                        <a:t>Tool</a:t>
+                        <a:t>Assessment</a:t>
                       </a:r>
                     </a:p>
                   </a:txBody>
@@ -7214,7 +8614,7 @@
                         </a:defRPr>
                       </a:pPr>
                       <a:r>
-                        <a:t>SDA Vision 0.1.0</a:t>
+                        <a:t>partially synthetic</a:t>
                       </a:r>
                     </a:p>
                   </a:txBody>
@@ -7272,7 +8672,7 @@
                         </a:defRPr>
                       </a:pPr>
                       <a:r>
-                        <a:t>Models</a:t>
+                        <a:t>Confidence</a:t>
                       </a:r>
                     </a:p>
                   </a:txBody>
@@ -7302,7 +8702,7 @@
                         </a:defRPr>
                       </a:pPr>
                       <a:r>
-                        <a:t>Not recorded</a:t>
+                        <a:t>low</a:t>
                       </a:r>
                     </a:p>
                   </a:txBody>
@@ -7360,7 +8760,7 @@
                         </a:defRPr>
                       </a:pPr>
                       <a:r>
-                        <a:t>Method version</a:t>
+                        <a:t>Role in assessment</a:t>
                       </a:r>
                     </a:p>
                   </a:txBody>
@@ -7390,7 +8790,7 @@
                         </a:defRPr>
                       </a:pPr>
                       <a:r>
-                        <a:t>verdict-consistency-2026-09-26.1</a:t>
+                        <a:t>Additional finding</a:t>
                       </a:r>
                     </a:p>
                   </a:txBody>
@@ -7448,7 +8848,7 @@
                         </a:defRPr>
                       </a:pPr>
                       <a:r>
-                        <a:t>Analysis lens</a:t>
+                        <a:t>Provider summary</a:t>
                       </a:r>
                     </a:p>
                   </a:txBody>
@@ -7478,7 +8878,7 @@
                         </a:defRPr>
                       </a:pPr>
                       <a:r>
-                        <a:t>general</a:t>
+                        <a:t>Heuristic synthetic likelihood 41/100 from metadata + pixel statistics.</a:t>
                       </a:r>
                     </a:p>
                   </a:txBody>
@@ -7536,7 +8936,7 @@
                         </a:defRPr>
                       </a:pPr>
                       <a:r>
-                        <a:t>Original SHA-256</a:t>
+                        <a:t>Evidence 1</a:t>
                       </a:r>
                     </a:p>
                   </a:txBody>
@@ -7566,7 +8966,7 @@
                         </a:defRPr>
                       </a:pPr>
                       <a:r>
-                        <a:t>c9a680547869618d7c63648d317b1f27c03ede59d5113a7cd6818f5ce2bd654e</a:t>
+                        <a:t>No camera EXIF (common in AI exports, screenshots, and re-saves).</a:t>
                       </a:r>
                     </a:p>
                   </a:txBody>
@@ -7591,7 +8991,7 @@
         </p:nvGraphicFramePr>
         <p:xfrm>
           <a:off x="365760" y="4496816"/>
-          <a:ext cx="8412479" cy="755904"/>
+          <a:ext cx="8412479" cy="349504"/>
         </p:xfrm>
         <a:graphic>
           <a:graphicData uri="http://schemas.openxmlformats.org/drawingml/2006/table">
@@ -7603,28 +9003,28 @@
                 <a:gridCol w="2271369"/>
                 <a:gridCol w="6141110"/>
               </a:tblGrid>
-              <a:tr h="755904">
-                <a:tc>
-                  <a:txBody>
-                    <a:bodyPr wrap="none"/>
-                    <a:lstStyle/>
-                    <a:p>
-                      <a:pPr>
-                        <a:lnSpc>
-                          <a:spcPts val="1600"/>
-                        </a:lnSpc>
-                        <a:spcAft>
-                          <a:spcPts val="0"/>
-                        </a:spcAft>
-                        <a:defRPr sz="1200" b="0">
-                          <a:solidFill>
-                            <a:srgbClr val="21243A"/>
-                          </a:solidFill>
-                          <a:latin typeface="Arial"/>
-                        </a:defRPr>
-                      </a:pPr>
-                      <a:r>
-                        <a:t>Ingestion note 1</a:t>
+              <a:tr h="349504">
+                <a:tc>
+                  <a:txBody>
+                    <a:bodyPr wrap="none"/>
+                    <a:lstStyle/>
+                    <a:p>
+                      <a:pPr>
+                        <a:lnSpc>
+                          <a:spcPts val="1600"/>
+                        </a:lnSpc>
+                        <a:spcAft>
+                          <a:spcPts val="0"/>
+                        </a:spcAft>
+                        <a:defRPr sz="1200" b="0">
+                          <a:solidFill>
+                            <a:srgbClr val="21243A"/>
+                          </a:solidFill>
+                          <a:latin typeface="Arial"/>
+                        </a:defRPr>
+                      </a:pPr>
+                      <a:r>
+                        <a:t>Evidence 2</a:t>
                       </a:r>
                     </a:p>
                   </a:txBody>
@@ -7654,45 +9054,7 @@
                         </a:defRPr>
                       </a:pPr>
                       <a:r>
-                        <a:t>Local checks only. LLM visual checks have not been run for this example; no</a:t>
-                      </a:r>
-                    </a:p>
-                    <a:p>
-                      <a:pPr>
-                        <a:lnSpc>
-                          <a:spcPts val="1600"/>
-                        </a:lnSpc>
-                        <a:spcAft>
-                          <a:spcPts val="0"/>
-                        </a:spcAft>
-                        <a:defRPr sz="1200" b="0">
-                          <a:solidFill>
-                            <a:srgbClr val="21243A"/>
-                          </a:solidFill>
-                          <a:latin typeface="Arial"/>
-                        </a:defRPr>
-                      </a:pPr>
-                      <a:r>
-                        <a:t>provider requests or fees. An Inconclusive combined result here reflects</a:t>
-                      </a:r>
-                    </a:p>
-                    <a:p>
-                      <a:pPr>
-                        <a:lnSpc>
-                          <a:spcPts val="1600"/>
-                        </a:lnSpc>
-                        <a:spcAft>
-                          <a:spcPts val="0"/>
-                        </a:spcAft>
-                        <a:defRPr sz="1200" b="0">
-                          <a:solidFill>
-                            <a:srgbClr val="21243A"/>
-                          </a:solidFill>
-                          <a:latin typeface="Arial"/>
-                        </a:defRPr>
-                      </a:pPr>
-                      <a:r>
-                        <a:t>unavailable visual assessments, not three inconclusive model replies.</a:t>
+                        <a:t>ELA mean 1.8, peak 62 (uniform high ELA can indicate generation/heavy edit).</a:t>
                       </a:r>
                     </a:p>
                   </a:txBody>
@@ -7716,8 +9078,8 @@
           <p:nvPr/>
         </p:nvGraphicFramePr>
         <p:xfrm>
-          <a:off x="365760" y="5252720"/>
-          <a:ext cx="8412479" cy="755904"/>
+          <a:off x="365760" y="4846320"/>
+          <a:ext cx="8412479" cy="349504"/>
         </p:xfrm>
         <a:graphic>
           <a:graphicData uri="http://schemas.openxmlformats.org/drawingml/2006/table">
@@ -7729,28 +9091,28 @@
                 <a:gridCol w="2271369"/>
                 <a:gridCol w="6141110"/>
               </a:tblGrid>
-              <a:tr h="755904">
-                <a:tc>
-                  <a:txBody>
-                    <a:bodyPr wrap="none"/>
-                    <a:lstStyle/>
-                    <a:p>
-                      <a:pPr>
-                        <a:lnSpc>
-                          <a:spcPts val="1600"/>
-                        </a:lnSpc>
-                        <a:spcAft>
-                          <a:spcPts val="0"/>
-                        </a:spcAft>
-                        <a:defRPr sz="1200" b="0">
-                          <a:solidFill>
-                            <a:srgbClr val="21243A"/>
-                          </a:solidFill>
-                          <a:latin typeface="Arial"/>
-                        </a:defRPr>
-                      </a:pPr>
-                      <a:r>
-                        <a:t>Ingestion note 2</a:t>
+              <a:tr h="349504">
+                <a:tc>
+                  <a:txBody>
+                    <a:bodyPr wrap="none"/>
+                    <a:lstStyle/>
+                    <a:p>
+                      <a:pPr>
+                        <a:lnSpc>
+                          <a:spcPts val="1600"/>
+                        </a:lnSpc>
+                        <a:spcAft>
+                          <a:spcPts val="0"/>
+                        </a:spcAft>
+                        <a:defRPr sz="1200" b="0">
+                          <a:solidFill>
+                            <a:srgbClr val="21243A"/>
+                          </a:solidFill>
+                          <a:latin typeface="Arial"/>
+                        </a:defRPr>
+                      </a:pPr>
+                      <a:r>
+                        <a:t>Evidence 3</a:t>
                       </a:r>
                     </a:p>
                   </a:txBody>
@@ -7780,51 +9142,101 @@
                         </a:defRPr>
                       </a:pPr>
                       <a:r>
-                        <a:t>Presentation copy of saved report 60372b03-66fe-4d66-8a70-d43f0688945c. The</a:t>
-                      </a:r>
-                    </a:p>
-                    <a:p>
-                      <a:pPr>
-                        <a:lnSpc>
-                          <a:spcPts val="1600"/>
-                        </a:lnSpc>
-                        <a:spcAft>
-                          <a:spcPts val="0"/>
-                        </a:spcAft>
-                        <a:defRPr sz="1200" b="0">
-                          <a:solidFill>
-                            <a:srgbClr val="21243A"/>
-                          </a:solidFill>
-                          <a:latin typeface="Arial"/>
-                        </a:defRPr>
-                      </a:pPr>
-                      <a:r>
-                        <a:t>descriptive filename replaces the earlier example ID for navigation. Original</a:t>
-                      </a:r>
-                    </a:p>
-                    <a:p>
-                      <a:pPr>
-                        <a:lnSpc>
-                          <a:spcPts val="1600"/>
-                        </a:lnSpc>
-                        <a:spcAft>
-                          <a:spcPts val="0"/>
-                        </a:spcAft>
-                        <a:defRPr sz="1200" b="0">
-                          <a:solidFill>
-                            <a:srgbClr val="21243A"/>
-                          </a:solidFill>
-                          <a:latin typeface="Arial"/>
-                        </a:defRPr>
-                      </a:pPr>
-                      <a:r>
-                        <a:t>analysis dates, provider replies, scores and acquisition context are retained; no</a:t>
+                        <a:t>High-frequency noise std 11.38 (very low/very uniform noise is a synthesis cue).</a:t>
                       </a:r>
                     </a:p>
                   </a:txBody>
                   <a:tcPr marL="82296" marR="82296" marT="64008" marB="64008">
                     <a:solidFill>
                       <a:srgbClr val="FFFFFF"/>
+                    </a:solidFill>
+                  </a:tcPr>
+                </a:tc>
+              </a:tr>
+            </a:tbl>
+          </a:graphicData>
+        </a:graphic>
+      </p:graphicFrame>
+      <p:graphicFrame>
+        <p:nvGraphicFramePr>
+          <p:cNvPr id="17" name="Table 16"/>
+          <p:cNvGraphicFramePr>
+            <a:graphicFrameLocks noGrp="1"/>
+          </p:cNvGraphicFramePr>
+          <p:nvPr/>
+        </p:nvGraphicFramePr>
+        <p:xfrm>
+          <a:off x="365760" y="5195824"/>
+          <a:ext cx="8412479" cy="349504"/>
+        </p:xfrm>
+        <a:graphic>
+          <a:graphicData uri="http://schemas.openxmlformats.org/drawingml/2006/table">
+            <a:tbl>
+              <a:tblPr firstRow="1" bandRow="1">
+                <a:tableStyleId>{5C22544A-7EE6-4342-B048-85BDC9FD1C3A}</a:tableStyleId>
+              </a:tblPr>
+              <a:tblGrid>
+                <a:gridCol w="2271369"/>
+                <a:gridCol w="6141110"/>
+              </a:tblGrid>
+              <a:tr h="349504">
+                <a:tc>
+                  <a:txBody>
+                    <a:bodyPr wrap="none"/>
+                    <a:lstStyle/>
+                    <a:p>
+                      <a:pPr>
+                        <a:lnSpc>
+                          <a:spcPts val="1600"/>
+                        </a:lnSpc>
+                        <a:spcAft>
+                          <a:spcPts val="0"/>
+                        </a:spcAft>
+                        <a:defRPr sz="1200" b="0">
+                          <a:solidFill>
+                            <a:srgbClr val="21243A"/>
+                          </a:solidFill>
+                          <a:latin typeface="Arial"/>
+                        </a:defRPr>
+                      </a:pPr>
+                      <a:r>
+                        <a:t>Evidence 4</a:t>
+                      </a:r>
+                    </a:p>
+                  </a:txBody>
+                  <a:tcPr marL="82296" marR="82296" marT="64008" marB="64008">
+                    <a:solidFill>
+                      <a:srgbClr val="F1F7F7"/>
+                    </a:solidFill>
+                  </a:tcPr>
+                </a:tc>
+                <a:tc>
+                  <a:txBody>
+                    <a:bodyPr wrap="none"/>
+                    <a:lstStyle/>
+                    <a:p>
+                      <a:pPr>
+                        <a:lnSpc>
+                          <a:spcPts val="1600"/>
+                        </a:lnSpc>
+                        <a:spcAft>
+                          <a:spcPts val="0"/>
+                        </a:spcAft>
+                        <a:defRPr sz="1200" b="0">
+                          <a:solidFill>
+                            <a:srgbClr val="21243A"/>
+                          </a:solidFill>
+                          <a:latin typeface="Arial"/>
+                        </a:defRPr>
+                      </a:pPr>
+                      <a:r>
+                        <a:t>Spectral peakiness 19.81 (periodic frequency peaks can mark generated textures).</a:t>
+                      </a:r>
+                    </a:p>
+                  </a:txBody>
+                  <a:tcPr marL="82296" marR="82296" marT="64008" marB="64008">
+                    <a:solidFill>
+                      <a:srgbClr val="F1F7F7"/>
                     </a:solidFill>
                   </a:tcPr>
                 </a:tc>
@@ -7930,7 +9342,7 @@
               </a:defRPr>
             </a:pPr>
             <a:r>
-              <a:t>File and analysis record (continued)</a:t>
+              <a:t>Evidence supporting this verdict</a:t>
             </a:r>
           </a:p>
         </p:txBody>
@@ -8015,6 +9427,2274 @@
             </a:pPr>
             <a:r>
               <a:t>14</a:t>
+            </a:r>
+          </a:p>
+        </p:txBody>
+      </p:sp>
+      <p:graphicFrame>
+        <p:nvGraphicFramePr>
+          <p:cNvPr id="6" name="Table 5"/>
+          <p:cNvGraphicFramePr>
+            <a:graphicFrameLocks noGrp="1"/>
+          </p:cNvGraphicFramePr>
+          <p:nvPr/>
+        </p:nvGraphicFramePr>
+        <p:xfrm>
+          <a:off x="365760" y="1353312"/>
+          <a:ext cx="8412479" cy="347472"/>
+        </p:xfrm>
+        <a:graphic>
+          <a:graphicData uri="http://schemas.openxmlformats.org/drawingml/2006/table">
+            <a:tbl>
+              <a:tblPr firstRow="1" bandRow="1">
+                <a:tableStyleId>{5C22544A-7EE6-4342-B048-85BDC9FD1C3A}</a:tableStyleId>
+              </a:tblPr>
+              <a:tblGrid>
+                <a:gridCol w="2271369"/>
+                <a:gridCol w="6141110"/>
+              </a:tblGrid>
+              <a:tr h="347472">
+                <a:tc>
+                  <a:txBody>
+                    <a:bodyPr wrap="none"/>
+                    <a:lstStyle/>
+                    <a:p>
+                      <a:pPr>
+                        <a:lnSpc>
+                          <a:spcPts val="1600"/>
+                        </a:lnSpc>
+                        <a:spcAft>
+                          <a:spcPts val="0"/>
+                        </a:spcAft>
+                        <a:defRPr sz="1200" b="1">
+                          <a:solidFill>
+                            <a:srgbClr val="FFFFFF"/>
+                          </a:solidFill>
+                          <a:latin typeface="Arial"/>
+                        </a:defRPr>
+                      </a:pPr>
+                      <a:r>
+                        <a:t>Field</a:t>
+                      </a:r>
+                    </a:p>
+                  </a:txBody>
+                  <a:tcPr marL="82296" marR="82296" marT="64008" marB="64008">
+                    <a:solidFill>
+                      <a:srgbClr val="16787C"/>
+                    </a:solidFill>
+                  </a:tcPr>
+                </a:tc>
+                <a:tc>
+                  <a:txBody>
+                    <a:bodyPr wrap="none"/>
+                    <a:lstStyle/>
+                    <a:p>
+                      <a:pPr>
+                        <a:lnSpc>
+                          <a:spcPts val="1600"/>
+                        </a:lnSpc>
+                        <a:spcAft>
+                          <a:spcPts val="0"/>
+                        </a:spcAft>
+                        <a:defRPr sz="1200" b="1">
+                          <a:solidFill>
+                            <a:srgbClr val="FFFFFF"/>
+                          </a:solidFill>
+                          <a:latin typeface="Arial"/>
+                        </a:defRPr>
+                      </a:pPr>
+                      <a:r>
+                        <a:t>Recorded detail</a:t>
+                      </a:r>
+                    </a:p>
+                  </a:txBody>
+                  <a:tcPr marL="82296" marR="82296" marT="64008" marB="64008">
+                    <a:solidFill>
+                      <a:srgbClr val="16787C"/>
+                    </a:solidFill>
+                  </a:tcPr>
+                </a:tc>
+              </a:tr>
+            </a:tbl>
+          </a:graphicData>
+        </a:graphic>
+      </p:graphicFrame>
+      <p:graphicFrame>
+        <p:nvGraphicFramePr>
+          <p:cNvPr id="7" name="Table 6"/>
+          <p:cNvGraphicFramePr>
+            <a:graphicFrameLocks noGrp="1"/>
+          </p:cNvGraphicFramePr>
+          <p:nvPr/>
+        </p:nvGraphicFramePr>
+        <p:xfrm>
+          <a:off x="365760" y="1700784"/>
+          <a:ext cx="8412479" cy="1568704"/>
+        </p:xfrm>
+        <a:graphic>
+          <a:graphicData uri="http://schemas.openxmlformats.org/drawingml/2006/table">
+            <a:tbl>
+              <a:tblPr firstRow="1" bandRow="1">
+                <a:tableStyleId>{5C22544A-7EE6-4342-B048-85BDC9FD1C3A}</a:tableStyleId>
+              </a:tblPr>
+              <a:tblGrid>
+                <a:gridCol w="2271369"/>
+                <a:gridCol w="6141110"/>
+              </a:tblGrid>
+              <a:tr h="1568704">
+                <a:tc>
+                  <a:txBody>
+                    <a:bodyPr wrap="none"/>
+                    <a:lstStyle/>
+                    <a:p>
+                      <a:pPr>
+                        <a:lnSpc>
+                          <a:spcPts val="1600"/>
+                        </a:lnSpc>
+                        <a:spcAft>
+                          <a:spcPts val="0"/>
+                        </a:spcAft>
+                        <a:defRPr sz="1200" b="0">
+                          <a:solidFill>
+                            <a:srgbClr val="21243A"/>
+                          </a:solidFill>
+                          <a:latin typeface="Arial"/>
+                        </a:defRPr>
+                      </a:pPr>
+                      <a:r>
+                        <a:t>Claude Vision</a:t>
+                      </a:r>
+                    </a:p>
+                  </a:txBody>
+                  <a:tcPr marL="82296" marR="82296" marT="64008" marB="64008">
+                    <a:solidFill>
+                      <a:srgbClr val="F1F7F7"/>
+                    </a:solidFill>
+                  </a:tcPr>
+                </a:tc>
+                <a:tc>
+                  <a:txBody>
+                    <a:bodyPr wrap="none"/>
+                    <a:lstStyle/>
+                    <a:p>
+                      <a:pPr>
+                        <a:lnSpc>
+                          <a:spcPts val="1600"/>
+                        </a:lnSpc>
+                        <a:spcAft>
+                          <a:spcPts val="0"/>
+                        </a:spcAft>
+                        <a:defRPr sz="1200" b="0">
+                          <a:solidFill>
+                            <a:srgbClr val="21243A"/>
+                          </a:solidFill>
+                          <a:latin typeface="Arial"/>
+                        </a:defRPr>
+                      </a:pPr>
+                      <a:r>
+                        <a:t>synthetic likelihood 80/100; tells: uniform soft airbrushed painterly shading across</a:t>
+                      </a:r>
+                    </a:p>
+                    <a:p>
+                      <a:pPr>
+                        <a:lnSpc>
+                          <a:spcPts val="1600"/>
+                        </a:lnSpc>
+                        <a:spcAft>
+                          <a:spcPts val="0"/>
+                        </a:spcAft>
+                        <a:defRPr sz="1200" b="0">
+                          <a:solidFill>
+                            <a:srgbClr val="21243A"/>
+                          </a:solidFill>
+                          <a:latin typeface="Arial"/>
+                        </a:defRPr>
+                      </a:pPr>
+                      <a:r>
+                        <a:t>all elements, typical of current image-generation models, whole composite</a:t>
+                      </a:r>
+                    </a:p>
+                    <a:p>
+                      <a:pPr>
+                        <a:lnSpc>
+                          <a:spcPts val="1600"/>
+                        </a:lnSpc>
+                        <a:spcAft>
+                          <a:spcPts val="0"/>
+                        </a:spcAft>
+                        <a:defRPr sz="1200" b="0">
+                          <a:solidFill>
+                            <a:srgbClr val="21243A"/>
+                          </a:solidFill>
+                          <a:latin typeface="Arial"/>
+                        </a:defRPr>
+                      </a:pPr>
+                      <a:r>
+                        <a:t>(portrait, anatomy, inset, icons, typography) rendered in one seamless style rather</a:t>
+                      </a:r>
+                    </a:p>
+                    <a:p>
+                      <a:pPr>
+                        <a:lnSpc>
+                          <a:spcPts val="1600"/>
+                        </a:lnSpc>
+                        <a:spcAft>
+                          <a:spcPts val="0"/>
+                        </a:spcAft>
+                        <a:defRPr sz="1200" b="0">
+                          <a:solidFill>
+                            <a:srgbClr val="21243A"/>
+                          </a:solidFill>
+                          <a:latin typeface="Arial"/>
+                        </a:defRPr>
+                      </a:pPr>
+                      <a:r>
+                        <a:t>than assembled from separate assets, anatomically loose vasculature: arteries</a:t>
+                      </a:r>
+                    </a:p>
+                    <a:p>
+                      <a:pPr>
+                        <a:lnSpc>
+                          <a:spcPts val="1600"/>
+                        </a:lnSpc>
+                        <a:spcAft>
+                          <a:spcPts val="0"/>
+                        </a:spcAft>
+                        <a:defRPr sz="1200" b="0">
+                          <a:solidFill>
+                            <a:srgbClr val="21243A"/>
+                          </a:solidFill>
+                          <a:latin typeface="Arial"/>
+                        </a:defRPr>
+                      </a:pPr>
+                      <a:r>
+                        <a:t>drawn over the brain surface and an idealized carotid path from neck to cortex,</a:t>
+                      </a:r>
+                    </a:p>
+                    <a:p>
+                      <a:pPr>
+                        <a:lnSpc>
+                          <a:spcPts val="1600"/>
+                        </a:lnSpc>
+                        <a:spcAft>
+                          <a:spcPts val="0"/>
+                        </a:spcAft>
+                        <a:defRPr sz="1200" b="0">
+                          <a:solidFill>
+                            <a:srgbClr val="21243A"/>
+                          </a:solidFill>
+                          <a:latin typeface="Arial"/>
+                        </a:defRPr>
+                      </a:pPr>
+                      <a:r>
+                        <a:t>generic glowing highlights (red cortical hotspot, yellow injection-site glow) used as</a:t>
+                      </a:r>
+                    </a:p>
+                    <a:p>
+                      <a:pPr>
+                        <a:lnSpc>
+                          <a:spcPts val="1600"/>
+                        </a:lnSpc>
+                        <a:spcAft>
+                          <a:spcPts val="0"/>
+                        </a:spcAft>
+                        <a:defRPr sz="1200" b="0">
+                          <a:solidFill>
+                            <a:srgbClr val="21243A"/>
+                          </a:solidFill>
+                          <a:latin typeface="Arial"/>
+                        </a:defRPr>
+                      </a:pPr>
+                      <a:r>
+                        <a:t>stylized emphasis</a:t>
+                      </a:r>
+                    </a:p>
+                  </a:txBody>
+                  <a:tcPr marL="82296" marR="82296" marT="64008" marB="64008">
+                    <a:solidFill>
+                      <a:srgbClr val="F1F7F7"/>
+                    </a:solidFill>
+                  </a:tcPr>
+                </a:tc>
+              </a:tr>
+            </a:tbl>
+          </a:graphicData>
+        </a:graphic>
+      </p:graphicFrame>
+      <p:graphicFrame>
+        <p:nvGraphicFramePr>
+          <p:cNvPr id="8" name="Table 7"/>
+          <p:cNvGraphicFramePr>
+            <a:graphicFrameLocks noGrp="1"/>
+          </p:cNvGraphicFramePr>
+          <p:nvPr/>
+        </p:nvGraphicFramePr>
+        <p:xfrm>
+          <a:off x="365760" y="3269488"/>
+          <a:ext cx="8412479" cy="959103"/>
+        </p:xfrm>
+        <a:graphic>
+          <a:graphicData uri="http://schemas.openxmlformats.org/drawingml/2006/table">
+            <a:tbl>
+              <a:tblPr firstRow="1" bandRow="1">
+                <a:tableStyleId>{5C22544A-7EE6-4342-B048-85BDC9FD1C3A}</a:tableStyleId>
+              </a:tblPr>
+              <a:tblGrid>
+                <a:gridCol w="2271369"/>
+                <a:gridCol w="6141110"/>
+              </a:tblGrid>
+              <a:tr h="959103">
+                <a:tc>
+                  <a:txBody>
+                    <a:bodyPr wrap="none"/>
+                    <a:lstStyle/>
+                    <a:p>
+                      <a:pPr>
+                        <a:lnSpc>
+                          <a:spcPts val="1600"/>
+                        </a:lnSpc>
+                        <a:spcAft>
+                          <a:spcPts val="0"/>
+                        </a:spcAft>
+                        <a:defRPr sz="1200" b="0">
+                          <a:solidFill>
+                            <a:srgbClr val="21243A"/>
+                          </a:solidFill>
+                          <a:latin typeface="Arial"/>
+                        </a:defRPr>
+                      </a:pPr>
+                      <a:r>
+                        <a:t>Gemini Vision</a:t>
+                      </a:r>
+                    </a:p>
+                  </a:txBody>
+                  <a:tcPr marL="82296" marR="82296" marT="64008" marB="64008">
+                    <a:solidFill>
+                      <a:srgbClr val="FFFFFF"/>
+                    </a:solidFill>
+                  </a:tcPr>
+                </a:tc>
+                <a:tc>
+                  <a:txBody>
+                    <a:bodyPr wrap="none"/>
+                    <a:lstStyle/>
+                    <a:p>
+                      <a:pPr>
+                        <a:lnSpc>
+                          <a:spcPts val="1600"/>
+                        </a:lnSpc>
+                        <a:spcAft>
+                          <a:spcPts val="0"/>
+                        </a:spcAft>
+                        <a:defRPr sz="1200" b="0">
+                          <a:solidFill>
+                            <a:srgbClr val="21243A"/>
+                          </a:solidFill>
+                          <a:latin typeface="Arial"/>
+                        </a:defRPr>
+                      </a:pPr>
+                      <a:r>
+                        <a:t>synthetic likelihood 68/100; tells: model read this as AI editing over a</a:t>
+                      </a:r>
+                    </a:p>
+                    <a:p>
+                      <a:pPr>
+                        <a:lnSpc>
+                          <a:spcPts val="1600"/>
+                        </a:lnSpc>
+                        <a:spcAft>
+                          <a:spcPts val="0"/>
+                        </a:spcAft>
+                        <a:defRPr sz="1200" b="0">
+                          <a:solidFill>
+                            <a:srgbClr val="21243A"/>
+                          </a:solidFill>
+                          <a:latin typeface="Arial"/>
+                        </a:defRPr>
+                      </a:pPr>
+                      <a:r>
+                        <a:t>photographic base image, sterile digital rendering style, slightly inconsistent</a:t>
+                      </a:r>
+                    </a:p>
+                    <a:p>
+                      <a:pPr>
+                        <a:lnSpc>
+                          <a:spcPts val="1600"/>
+                        </a:lnSpc>
+                        <a:spcAft>
+                          <a:spcPts val="0"/>
+                        </a:spcAft>
+                        <a:defRPr sz="1200" b="0">
+                          <a:solidFill>
+                            <a:srgbClr val="21243A"/>
+                          </a:solidFill>
+                          <a:latin typeface="Arial"/>
+                        </a:defRPr>
+                      </a:pPr>
+                      <a:r>
+                        <a:t>anatomical blending in syringe and hand, typical AI-generated vector/digital</a:t>
+                      </a:r>
+                    </a:p>
+                    <a:p>
+                      <a:pPr>
+                        <a:lnSpc>
+                          <a:spcPts val="1600"/>
+                        </a:lnSpc>
+                        <a:spcAft>
+                          <a:spcPts val="0"/>
+                        </a:spcAft>
+                        <a:defRPr sz="1200" b="0">
+                          <a:solidFill>
+                            <a:srgbClr val="21243A"/>
+                          </a:solidFill>
+                          <a:latin typeface="Arial"/>
+                        </a:defRPr>
+                      </a:pPr>
+                      <a:r>
+                        <a:t>medical illustration texture</a:t>
+                      </a:r>
+                    </a:p>
+                  </a:txBody>
+                  <a:tcPr marL="82296" marR="82296" marT="64008" marB="64008">
+                    <a:solidFill>
+                      <a:srgbClr val="FFFFFF"/>
+                    </a:solidFill>
+                  </a:tcPr>
+                </a:tc>
+              </a:tr>
+            </a:tbl>
+          </a:graphicData>
+        </a:graphic>
+      </p:graphicFrame>
+    </p:spTree>
+  </p:cSld>
+  <p:clrMapOvr>
+    <a:masterClrMapping/>
+  </p:clrMapOvr>
+</p:sld>
+</file>
+
+<file path=ppt/slides/slide15.xml><?xml version="1.0" encoding="utf-8"?>
+<p:sld xmlns:a="http://schemas.openxmlformats.org/drawingml/2006/main" xmlns:p="http://schemas.openxmlformats.org/presentationml/2006/main" xmlns:r="http://schemas.openxmlformats.org/officeDocument/2006/relationships">
+  <p:cSld>
+    <p:spTree>
+      <p:nvGrpSpPr>
+        <p:cNvPr id="1" name=""/>
+        <p:cNvGrpSpPr/>
+        <p:nvPr/>
+      </p:nvGrpSpPr>
+      <p:grpSpPr/>
+      <p:sp>
+        <p:nvSpPr>
+          <p:cNvPr id="2" name="TextBox 1"/>
+          <p:cNvSpPr txBox="1"/>
+          <p:nvPr/>
+        </p:nvSpPr>
+        <p:spPr>
+          <a:xfrm>
+            <a:off x="365760" y="219456"/>
+            <a:ext cx="8412480" cy="228600"/>
+          </a:xfrm>
+          <a:prstGeom prst="rect">
+            <a:avLst/>
+          </a:prstGeom>
+          <a:noFill/>
+        </p:spPr>
+        <p:txBody>
+          <a:bodyPr wrap="square" lIns="0" rIns="0" tIns="0" bIns="0">
+            <a:spAutoFit/>
+          </a:bodyPr>
+          <a:lstStyle/>
+          <a:p>
+            <a:pPr>
+              <a:lnSpc>
+                <a:spcPct val="115000"/>
+              </a:lnSpc>
+              <a:spcAft>
+                <a:spcPts val="0"/>
+              </a:spcAft>
+              <a:defRPr sz="1100" b="1">
+                <a:solidFill>
+                  <a:srgbClr val="C5006A"/>
+                </a:solidFill>
+                <a:latin typeface="Arial"/>
+              </a:defRPr>
+            </a:pPr>
+            <a:r>
+              <a:t>SDA VISION / RESEARCH REPORT</a:t>
+            </a:r>
+          </a:p>
+        </p:txBody>
+      </p:sp>
+      <p:sp>
+        <p:nvSpPr>
+          <p:cNvPr id="3" name="TextBox 2"/>
+          <p:cNvSpPr txBox="1"/>
+          <p:nvPr/>
+        </p:nvSpPr>
+        <p:spPr>
+          <a:xfrm>
+            <a:off x="365760" y="658368"/>
+            <a:ext cx="8412480" cy="612648"/>
+          </a:xfrm>
+          <a:prstGeom prst="rect">
+            <a:avLst/>
+          </a:prstGeom>
+          <a:noFill/>
+        </p:spPr>
+        <p:txBody>
+          <a:bodyPr wrap="square" lIns="0" rIns="0" tIns="0" bIns="0">
+            <a:spAutoFit/>
+          </a:bodyPr>
+          <a:lstStyle/>
+          <a:p>
+            <a:pPr>
+              <a:lnSpc>
+                <a:spcPct val="115000"/>
+              </a:lnSpc>
+              <a:spcAft>
+                <a:spcPts val="0"/>
+              </a:spcAft>
+              <a:defRPr sz="2200" b="1">
+                <a:solidFill>
+                  <a:srgbClr val="21243A"/>
+                </a:solidFill>
+                <a:latin typeface="Arial"/>
+              </a:defRPr>
+            </a:pPr>
+            <a:r>
+              <a:t>Additional findings</a:t>
+            </a:r>
+          </a:p>
+        </p:txBody>
+      </p:sp>
+      <p:sp>
+        <p:nvSpPr>
+          <p:cNvPr id="4" name="TextBox 3"/>
+          <p:cNvSpPr txBox="1"/>
+          <p:nvPr/>
+        </p:nvSpPr>
+        <p:spPr>
+          <a:xfrm>
+            <a:off x="365760" y="6291072"/>
+            <a:ext cx="8001000" cy="365760"/>
+          </a:xfrm>
+          <a:prstGeom prst="rect">
+            <a:avLst/>
+          </a:prstGeom>
+          <a:noFill/>
+        </p:spPr>
+        <p:txBody>
+          <a:bodyPr wrap="square" lIns="0" rIns="0" tIns="0" bIns="0">
+            <a:spAutoFit/>
+          </a:bodyPr>
+          <a:lstStyle/>
+          <a:p>
+            <a:pPr>
+              <a:lnSpc>
+                <a:spcPct val="115000"/>
+              </a:lnSpc>
+              <a:spcAft>
+                <a:spcPts val="0"/>
+              </a:spcAft>
+              <a:defRPr sz="800" b="0">
+                <a:solidFill>
+                  <a:srgbClr val="545B6D"/>
+                </a:solidFill>
+                <a:latin typeface="Arial"/>
+              </a:defRPr>
+            </a:pPr>
+            <a:r>
+              <a:t>Research assessment. Ratings are not calibrated probabilities.</a:t>
+            </a:r>
+          </a:p>
+        </p:txBody>
+      </p:sp>
+      <p:sp>
+        <p:nvSpPr>
+          <p:cNvPr id="5" name="TextBox 4"/>
+          <p:cNvSpPr txBox="1"/>
+          <p:nvPr/>
+        </p:nvSpPr>
+        <p:spPr>
+          <a:xfrm>
+            <a:off x="8394192" y="6318504"/>
+            <a:ext cx="365760" cy="228600"/>
+          </a:xfrm>
+          <a:prstGeom prst="rect">
+            <a:avLst/>
+          </a:prstGeom>
+          <a:noFill/>
+        </p:spPr>
+        <p:txBody>
+          <a:bodyPr wrap="square" lIns="0" rIns="0" tIns="0" bIns="0">
+            <a:spAutoFit/>
+          </a:bodyPr>
+          <a:lstStyle/>
+          <a:p>
+            <a:pPr>
+              <a:lnSpc>
+                <a:spcPct val="115000"/>
+              </a:lnSpc>
+              <a:spcAft>
+                <a:spcPts val="0"/>
+              </a:spcAft>
+              <a:defRPr sz="900" b="0">
+                <a:solidFill>
+                  <a:srgbClr val="545B6D"/>
+                </a:solidFill>
+                <a:latin typeface="Arial"/>
+              </a:defRPr>
+            </a:pPr>
+            <a:r>
+              <a:t>15</a:t>
+            </a:r>
+          </a:p>
+        </p:txBody>
+      </p:sp>
+      <p:graphicFrame>
+        <p:nvGraphicFramePr>
+          <p:cNvPr id="6" name="Table 5"/>
+          <p:cNvGraphicFramePr>
+            <a:graphicFrameLocks noGrp="1"/>
+          </p:cNvGraphicFramePr>
+          <p:nvPr/>
+        </p:nvGraphicFramePr>
+        <p:xfrm>
+          <a:off x="365760" y="1353312"/>
+          <a:ext cx="8412479" cy="347472"/>
+        </p:xfrm>
+        <a:graphic>
+          <a:graphicData uri="http://schemas.openxmlformats.org/drawingml/2006/table">
+            <a:tbl>
+              <a:tblPr firstRow="1" bandRow="1">
+                <a:tableStyleId>{5C22544A-7EE6-4342-B048-85BDC9FD1C3A}</a:tableStyleId>
+              </a:tblPr>
+              <a:tblGrid>
+                <a:gridCol w="2271369"/>
+                <a:gridCol w="6141110"/>
+              </a:tblGrid>
+              <a:tr h="347472">
+                <a:tc>
+                  <a:txBody>
+                    <a:bodyPr wrap="none"/>
+                    <a:lstStyle/>
+                    <a:p>
+                      <a:pPr>
+                        <a:lnSpc>
+                          <a:spcPts val="1600"/>
+                        </a:lnSpc>
+                        <a:spcAft>
+                          <a:spcPts val="0"/>
+                        </a:spcAft>
+                        <a:defRPr sz="1200" b="1">
+                          <a:solidFill>
+                            <a:srgbClr val="FFFFFF"/>
+                          </a:solidFill>
+                          <a:latin typeface="Arial"/>
+                        </a:defRPr>
+                      </a:pPr>
+                      <a:r>
+                        <a:t>Field</a:t>
+                      </a:r>
+                    </a:p>
+                  </a:txBody>
+                  <a:tcPr marL="82296" marR="82296" marT="64008" marB="64008">
+                    <a:solidFill>
+                      <a:srgbClr val="16787C"/>
+                    </a:solidFill>
+                  </a:tcPr>
+                </a:tc>
+                <a:tc>
+                  <a:txBody>
+                    <a:bodyPr wrap="none"/>
+                    <a:lstStyle/>
+                    <a:p>
+                      <a:pPr>
+                        <a:lnSpc>
+                          <a:spcPts val="1600"/>
+                        </a:lnSpc>
+                        <a:spcAft>
+                          <a:spcPts val="0"/>
+                        </a:spcAft>
+                        <a:defRPr sz="1200" b="1">
+                          <a:solidFill>
+                            <a:srgbClr val="FFFFFF"/>
+                          </a:solidFill>
+                          <a:latin typeface="Arial"/>
+                        </a:defRPr>
+                      </a:pPr>
+                      <a:r>
+                        <a:t>Recorded detail</a:t>
+                      </a:r>
+                    </a:p>
+                  </a:txBody>
+                  <a:tcPr marL="82296" marR="82296" marT="64008" marB="64008">
+                    <a:solidFill>
+                      <a:srgbClr val="16787C"/>
+                    </a:solidFill>
+                  </a:tcPr>
+                </a:tc>
+              </a:tr>
+            </a:tbl>
+          </a:graphicData>
+        </a:graphic>
+      </p:graphicFrame>
+      <p:graphicFrame>
+        <p:nvGraphicFramePr>
+          <p:cNvPr id="7" name="Table 6"/>
+          <p:cNvGraphicFramePr>
+            <a:graphicFrameLocks noGrp="1"/>
+          </p:cNvGraphicFramePr>
+          <p:nvPr/>
+        </p:nvGraphicFramePr>
+        <p:xfrm>
+          <a:off x="365760" y="1700784"/>
+          <a:ext cx="8412479" cy="1365503"/>
+        </p:xfrm>
+        <a:graphic>
+          <a:graphicData uri="http://schemas.openxmlformats.org/drawingml/2006/table">
+            <a:tbl>
+              <a:tblPr firstRow="1" bandRow="1">
+                <a:tableStyleId>{5C22544A-7EE6-4342-B048-85BDC9FD1C3A}</a:tableStyleId>
+              </a:tblPr>
+              <a:tblGrid>
+                <a:gridCol w="2271369"/>
+                <a:gridCol w="6141110"/>
+              </a:tblGrid>
+              <a:tr h="1365503">
+                <a:tc>
+                  <a:txBody>
+                    <a:bodyPr wrap="none"/>
+                    <a:lstStyle/>
+                    <a:p>
+                      <a:pPr>
+                        <a:lnSpc>
+                          <a:spcPts val="1600"/>
+                        </a:lnSpc>
+                        <a:spcAft>
+                          <a:spcPts val="0"/>
+                        </a:spcAft>
+                        <a:defRPr sz="1200" b="0">
+                          <a:solidFill>
+                            <a:srgbClr val="21243A"/>
+                          </a:solidFill>
+                          <a:latin typeface="Arial"/>
+                        </a:defRPr>
+                      </a:pPr>
+                      <a:r>
+                        <a:t>OpenAI Vision</a:t>
+                      </a:r>
+                    </a:p>
+                  </a:txBody>
+                  <a:tcPr marL="82296" marR="82296" marT="64008" marB="64008">
+                    <a:solidFill>
+                      <a:srgbClr val="F1F7F7"/>
+                    </a:solidFill>
+                  </a:tcPr>
+                </a:tc>
+                <a:tc>
+                  <a:txBody>
+                    <a:bodyPr wrap="none"/>
+                    <a:lstStyle/>
+                    <a:p>
+                      <a:pPr>
+                        <a:lnSpc>
+                          <a:spcPts val="1600"/>
+                        </a:lnSpc>
+                        <a:spcAft>
+                          <a:spcPts val="0"/>
+                        </a:spcAft>
+                        <a:defRPr sz="1200" b="0">
+                          <a:solidFill>
+                            <a:srgbClr val="21243A"/>
+                          </a:solidFill>
+                          <a:latin typeface="Arial"/>
+                        </a:defRPr>
+                      </a:pPr>
+                      <a:r>
+                        <a:t>synthetic likelihood 45/100; tells: Entire image is a medical illustration, with no</a:t>
+                      </a:r>
+                    </a:p>
+                    <a:p>
+                      <a:pPr>
+                        <a:lnSpc>
+                          <a:spcPts val="1600"/>
+                        </a:lnSpc>
+                        <a:spcAft>
+                          <a:spcPts val="0"/>
+                        </a:spcAft>
+                        <a:defRPr sz="1200" b="0">
+                          <a:solidFill>
+                            <a:srgbClr val="21243A"/>
+                          </a:solidFill>
+                          <a:latin typeface="Arial"/>
+                        </a:defRPr>
+                      </a:pPr>
+                      <a:r>
+                        <a:t>camera-photo base visible., Headings and labels are legible, with consistent serif</a:t>
+                      </a:r>
+                    </a:p>
+                    <a:p>
+                      <a:pPr>
+                        <a:lnSpc>
+                          <a:spcPts val="1600"/>
+                        </a:lnSpc>
+                        <a:spcAft>
+                          <a:spcPts val="0"/>
+                        </a:spcAft>
+                        <a:defRPr sz="1200" b="0">
+                          <a:solidFill>
+                            <a:srgbClr val="21243A"/>
+                          </a:solidFill>
+                          <a:latin typeface="Arial"/>
+                        </a:defRPr>
+                      </a:pPr>
+                      <a:r>
+                        <a:t>typography and aligned layout., Anatomy and cellular elements use smooth</a:t>
+                      </a:r>
+                    </a:p>
+                    <a:p>
+                      <a:pPr>
+                        <a:lnSpc>
+                          <a:spcPts val="1600"/>
+                        </a:lnSpc>
+                        <a:spcAft>
+                          <a:spcPts val="0"/>
+                        </a:spcAft>
+                        <a:defRPr sz="1200" b="0">
+                          <a:solidFill>
+                            <a:srgbClr val="21243A"/>
+                          </a:solidFill>
+                          <a:latin typeface="Arial"/>
+                        </a:defRPr>
+                      </a:pPr>
+                      <a:r>
+                        <a:t>shaded fills and clean outlines compatible with conventional digital illustration.,</a:t>
+                      </a:r>
+                    </a:p>
+                    <a:p>
+                      <a:pPr>
+                        <a:lnSpc>
+                          <a:spcPts val="1600"/>
+                        </a:lnSpc>
+                        <a:spcAft>
+                          <a:spcPts val="0"/>
+                        </a:spcAft>
+                        <a:defRPr sz="1200" b="0">
+                          <a:solidFill>
+                            <a:srgbClr val="21243A"/>
+                          </a:solidFill>
+                          <a:latin typeface="Arial"/>
+                        </a:defRPr>
+                      </a:pPr>
+                      <a:r>
+                        <a:t>Repeated particle motifs have variable internal squiggles, but no decisive</a:t>
+                      </a:r>
+                    </a:p>
+                    <a:p>
+                      <a:pPr>
+                        <a:lnSpc>
+                          <a:spcPts val="1600"/>
+                        </a:lnSpc>
+                        <a:spcAft>
+                          <a:spcPts val="0"/>
+                        </a:spcAft>
+                        <a:defRPr sz="1200" b="0">
+                          <a:solidFill>
+                            <a:srgbClr val="21243A"/>
+                          </a:solidFill>
+                          <a:latin typeface="Arial"/>
+                        </a:defRPr>
+                      </a:pPr>
+                      <a:r>
+                        <a:t>generation artifact is visible.</a:t>
+                      </a:r>
+                    </a:p>
+                  </a:txBody>
+                  <a:tcPr marL="82296" marR="82296" marT="64008" marB="64008">
+                    <a:solidFill>
+                      <a:srgbClr val="F1F7F7"/>
+                    </a:solidFill>
+                  </a:tcPr>
+                </a:tc>
+              </a:tr>
+            </a:tbl>
+          </a:graphicData>
+        </a:graphic>
+      </p:graphicFrame>
+      <p:graphicFrame>
+        <p:nvGraphicFramePr>
+          <p:cNvPr id="8" name="Table 7"/>
+          <p:cNvGraphicFramePr>
+            <a:graphicFrameLocks noGrp="1"/>
+          </p:cNvGraphicFramePr>
+          <p:nvPr/>
+        </p:nvGraphicFramePr>
+        <p:xfrm>
+          <a:off x="365760" y="3066288"/>
+          <a:ext cx="8412479" cy="349504"/>
+        </p:xfrm>
+        <a:graphic>
+          <a:graphicData uri="http://schemas.openxmlformats.org/drawingml/2006/table">
+            <a:tbl>
+              <a:tblPr firstRow="1" bandRow="1">
+                <a:tableStyleId>{5C22544A-7EE6-4342-B048-85BDC9FD1C3A}</a:tableStyleId>
+              </a:tblPr>
+              <a:tblGrid>
+                <a:gridCol w="2271369"/>
+                <a:gridCol w="6141110"/>
+              </a:tblGrid>
+              <a:tr h="349504">
+                <a:tc>
+                  <a:txBody>
+                    <a:bodyPr wrap="none"/>
+                    <a:lstStyle/>
+                    <a:p>
+                      <a:pPr>
+                        <a:lnSpc>
+                          <a:spcPts val="1600"/>
+                        </a:lnSpc>
+                        <a:spcAft>
+                          <a:spcPts val="0"/>
+                        </a:spcAft>
+                        <a:defRPr sz="1200" b="0">
+                          <a:solidFill>
+                            <a:srgbClr val="21243A"/>
+                          </a:solidFill>
+                          <a:latin typeface="Arial"/>
+                        </a:defRPr>
+                      </a:pPr>
+                      <a:r>
+                        <a:t>Local forensic cues</a:t>
+                      </a:r>
+                    </a:p>
+                  </a:txBody>
+                  <a:tcPr marL="82296" marR="82296" marT="64008" marB="64008">
+                    <a:solidFill>
+                      <a:srgbClr val="FFFFFF"/>
+                    </a:solidFill>
+                  </a:tcPr>
+                </a:tc>
+                <a:tc>
+                  <a:txBody>
+                    <a:bodyPr wrap="none"/>
+                    <a:lstStyle/>
+                    <a:p>
+                      <a:pPr>
+                        <a:lnSpc>
+                          <a:spcPts val="1600"/>
+                        </a:lnSpc>
+                        <a:spcAft>
+                          <a:spcPts val="0"/>
+                        </a:spcAft>
+                        <a:defRPr sz="1200" b="0">
+                          <a:solidFill>
+                            <a:srgbClr val="21243A"/>
+                          </a:solidFill>
+                          <a:latin typeface="Arial"/>
+                        </a:defRPr>
+                      </a:pPr>
+                      <a:r>
+                        <a:t>Supporting observation; considered alongside the model assessments.</a:t>
+                      </a:r>
+                    </a:p>
+                  </a:txBody>
+                  <a:tcPr marL="82296" marR="82296" marT="64008" marB="64008">
+                    <a:solidFill>
+                      <a:srgbClr val="FFFFFF"/>
+                    </a:solidFill>
+                  </a:tcPr>
+                </a:tc>
+              </a:tr>
+            </a:tbl>
+          </a:graphicData>
+        </a:graphic>
+      </p:graphicFrame>
+      <p:graphicFrame>
+        <p:nvGraphicFramePr>
+          <p:cNvPr id="9" name="Table 8"/>
+          <p:cNvGraphicFramePr>
+            <a:graphicFrameLocks noGrp="1"/>
+          </p:cNvGraphicFramePr>
+          <p:nvPr/>
+        </p:nvGraphicFramePr>
+        <p:xfrm>
+          <a:off x="365760" y="3415792"/>
+          <a:ext cx="8412479" cy="349504"/>
+        </p:xfrm>
+        <a:graphic>
+          <a:graphicData uri="http://schemas.openxmlformats.org/drawingml/2006/table">
+            <a:tbl>
+              <a:tblPr firstRow="1" bandRow="1">
+                <a:tableStyleId>{5C22544A-7EE6-4342-B048-85BDC9FD1C3A}</a:tableStyleId>
+              </a:tblPr>
+              <a:tblGrid>
+                <a:gridCol w="2271369"/>
+                <a:gridCol w="6141110"/>
+              </a:tblGrid>
+              <a:tr h="349504">
+                <a:tc>
+                  <a:txBody>
+                    <a:bodyPr wrap="none"/>
+                    <a:lstStyle/>
+                    <a:p>
+                      <a:pPr>
+                        <a:lnSpc>
+                          <a:spcPts val="1600"/>
+                        </a:lnSpc>
+                        <a:spcAft>
+                          <a:spcPts val="0"/>
+                        </a:spcAft>
+                        <a:defRPr sz="1200" b="0">
+                          <a:solidFill>
+                            <a:srgbClr val="21243A"/>
+                          </a:solidFill>
+                          <a:latin typeface="Arial"/>
+                        </a:defRPr>
+                      </a:pPr>
+                      <a:r>
+                        <a:t>C2PA Content Credentials</a:t>
+                      </a:r>
+                    </a:p>
+                  </a:txBody>
+                  <a:tcPr marL="82296" marR="82296" marT="64008" marB="64008">
+                    <a:solidFill>
+                      <a:srgbClr val="F1F7F7"/>
+                    </a:solidFill>
+                  </a:tcPr>
+                </a:tc>
+                <a:tc>
+                  <a:txBody>
+                    <a:bodyPr wrap="none"/>
+                    <a:lstStyle/>
+                    <a:p>
+                      <a:pPr>
+                        <a:lnSpc>
+                          <a:spcPts val="1600"/>
+                        </a:lnSpc>
+                        <a:spcAft>
+                          <a:spcPts val="0"/>
+                        </a:spcAft>
+                        <a:defRPr sz="1200" b="0">
+                          <a:solidFill>
+                            <a:srgbClr val="21243A"/>
+                          </a:solidFill>
+                          <a:latin typeface="Arial"/>
+                        </a:defRPr>
+                      </a:pPr>
+                      <a:r>
+                        <a:t>Embedded credentials: none found. Origin remains unresolved by this check.</a:t>
+                      </a:r>
+                    </a:p>
+                  </a:txBody>
+                  <a:tcPr marL="82296" marR="82296" marT="64008" marB="64008">
+                    <a:solidFill>
+                      <a:srgbClr val="F1F7F7"/>
+                    </a:solidFill>
+                  </a:tcPr>
+                </a:tc>
+              </a:tr>
+            </a:tbl>
+          </a:graphicData>
+        </a:graphic>
+      </p:graphicFrame>
+    </p:spTree>
+  </p:cSld>
+  <p:clrMapOvr>
+    <a:masterClrMapping/>
+  </p:clrMapOvr>
+</p:sld>
+</file>
+
+<file path=ppt/slides/slide16.xml><?xml version="1.0" encoding="utf-8"?>
+<p:sld xmlns:a="http://schemas.openxmlformats.org/drawingml/2006/main" xmlns:p="http://schemas.openxmlformats.org/presentationml/2006/main" xmlns:r="http://schemas.openxmlformats.org/officeDocument/2006/relationships">
+  <p:cSld>
+    <p:spTree>
+      <p:nvGrpSpPr>
+        <p:cNvPr id="1" name=""/>
+        <p:cNvGrpSpPr/>
+        <p:nvPr/>
+      </p:nvGrpSpPr>
+      <p:grpSpPr/>
+      <p:sp>
+        <p:nvSpPr>
+          <p:cNvPr id="2" name="TextBox 1"/>
+          <p:cNvSpPr txBox="1"/>
+          <p:nvPr/>
+        </p:nvSpPr>
+        <p:spPr>
+          <a:xfrm>
+            <a:off x="365760" y="219456"/>
+            <a:ext cx="8412480" cy="228600"/>
+          </a:xfrm>
+          <a:prstGeom prst="rect">
+            <a:avLst/>
+          </a:prstGeom>
+          <a:noFill/>
+        </p:spPr>
+        <p:txBody>
+          <a:bodyPr wrap="square" lIns="0" rIns="0" tIns="0" bIns="0">
+            <a:spAutoFit/>
+          </a:bodyPr>
+          <a:lstStyle/>
+          <a:p>
+            <a:pPr>
+              <a:lnSpc>
+                <a:spcPct val="115000"/>
+              </a:lnSpc>
+              <a:spcAft>
+                <a:spcPts val="0"/>
+              </a:spcAft>
+              <a:defRPr sz="1100" b="1">
+                <a:solidFill>
+                  <a:srgbClr val="C5006A"/>
+                </a:solidFill>
+                <a:latin typeface="Arial"/>
+              </a:defRPr>
+            </a:pPr>
+            <a:r>
+              <a:t>SDA VISION / RESEARCH REPORT</a:t>
+            </a:r>
+          </a:p>
+        </p:txBody>
+      </p:sp>
+      <p:sp>
+        <p:nvSpPr>
+          <p:cNvPr id="3" name="TextBox 2"/>
+          <p:cNvSpPr txBox="1"/>
+          <p:nvPr/>
+        </p:nvSpPr>
+        <p:spPr>
+          <a:xfrm>
+            <a:off x="365760" y="658368"/>
+            <a:ext cx="8412480" cy="612648"/>
+          </a:xfrm>
+          <a:prstGeom prst="rect">
+            <a:avLst/>
+          </a:prstGeom>
+          <a:noFill/>
+        </p:spPr>
+        <p:txBody>
+          <a:bodyPr wrap="square" lIns="0" rIns="0" tIns="0" bIns="0">
+            <a:spAutoFit/>
+          </a:bodyPr>
+          <a:lstStyle/>
+          <a:p>
+            <a:pPr>
+              <a:lnSpc>
+                <a:spcPct val="115000"/>
+              </a:lnSpc>
+              <a:spcAft>
+                <a:spcPts val="0"/>
+              </a:spcAft>
+              <a:defRPr sz="2200" b="1">
+                <a:solidFill>
+                  <a:srgbClr val="21243A"/>
+                </a:solidFill>
+                <a:latin typeface="Arial"/>
+              </a:defRPr>
+            </a:pPr>
+            <a:r>
+              <a:t>Visible text</a:t>
+            </a:r>
+          </a:p>
+        </p:txBody>
+      </p:sp>
+      <p:sp>
+        <p:nvSpPr>
+          <p:cNvPr id="4" name="TextBox 3"/>
+          <p:cNvSpPr txBox="1"/>
+          <p:nvPr/>
+        </p:nvSpPr>
+        <p:spPr>
+          <a:xfrm>
+            <a:off x="365760" y="6291072"/>
+            <a:ext cx="8001000" cy="365760"/>
+          </a:xfrm>
+          <a:prstGeom prst="rect">
+            <a:avLst/>
+          </a:prstGeom>
+          <a:noFill/>
+        </p:spPr>
+        <p:txBody>
+          <a:bodyPr wrap="square" lIns="0" rIns="0" tIns="0" bIns="0">
+            <a:spAutoFit/>
+          </a:bodyPr>
+          <a:lstStyle/>
+          <a:p>
+            <a:pPr>
+              <a:lnSpc>
+                <a:spcPct val="115000"/>
+              </a:lnSpc>
+              <a:spcAft>
+                <a:spcPts val="0"/>
+              </a:spcAft>
+              <a:defRPr sz="800" b="0">
+                <a:solidFill>
+                  <a:srgbClr val="545B6D"/>
+                </a:solidFill>
+                <a:latin typeface="Arial"/>
+              </a:defRPr>
+            </a:pPr>
+            <a:r>
+              <a:t>Research assessment. Ratings are not calibrated probabilities.</a:t>
+            </a:r>
+          </a:p>
+        </p:txBody>
+      </p:sp>
+      <p:sp>
+        <p:nvSpPr>
+          <p:cNvPr id="5" name="TextBox 4"/>
+          <p:cNvSpPr txBox="1"/>
+          <p:nvPr/>
+        </p:nvSpPr>
+        <p:spPr>
+          <a:xfrm>
+            <a:off x="8394192" y="6318504"/>
+            <a:ext cx="365760" cy="228600"/>
+          </a:xfrm>
+          <a:prstGeom prst="rect">
+            <a:avLst/>
+          </a:prstGeom>
+          <a:noFill/>
+        </p:spPr>
+        <p:txBody>
+          <a:bodyPr wrap="square" lIns="0" rIns="0" tIns="0" bIns="0">
+            <a:spAutoFit/>
+          </a:bodyPr>
+          <a:lstStyle/>
+          <a:p>
+            <a:pPr>
+              <a:lnSpc>
+                <a:spcPct val="115000"/>
+              </a:lnSpc>
+              <a:spcAft>
+                <a:spcPts val="0"/>
+              </a:spcAft>
+              <a:defRPr sz="900" b="0">
+                <a:solidFill>
+                  <a:srgbClr val="545B6D"/>
+                </a:solidFill>
+                <a:latin typeface="Arial"/>
+              </a:defRPr>
+            </a:pPr>
+            <a:r>
+              <a:t>16</a:t>
+            </a:r>
+          </a:p>
+        </p:txBody>
+      </p:sp>
+      <p:graphicFrame>
+        <p:nvGraphicFramePr>
+          <p:cNvPr id="6" name="Table 5"/>
+          <p:cNvGraphicFramePr>
+            <a:graphicFrameLocks noGrp="1"/>
+          </p:cNvGraphicFramePr>
+          <p:nvPr/>
+        </p:nvGraphicFramePr>
+        <p:xfrm>
+          <a:off x="365760" y="1353312"/>
+          <a:ext cx="8412479" cy="347472"/>
+        </p:xfrm>
+        <a:graphic>
+          <a:graphicData uri="http://schemas.openxmlformats.org/drawingml/2006/table">
+            <a:tbl>
+              <a:tblPr firstRow="1" bandRow="1">
+                <a:tableStyleId>{5C22544A-7EE6-4342-B048-85BDC9FD1C3A}</a:tableStyleId>
+              </a:tblPr>
+              <a:tblGrid>
+                <a:gridCol w="2271369"/>
+                <a:gridCol w="6141110"/>
+              </a:tblGrid>
+              <a:tr h="347472">
+                <a:tc>
+                  <a:txBody>
+                    <a:bodyPr wrap="none"/>
+                    <a:lstStyle/>
+                    <a:p>
+                      <a:pPr>
+                        <a:lnSpc>
+                          <a:spcPts val="1600"/>
+                        </a:lnSpc>
+                        <a:spcAft>
+                          <a:spcPts val="0"/>
+                        </a:spcAft>
+                        <a:defRPr sz="1200" b="1">
+                          <a:solidFill>
+                            <a:srgbClr val="FFFFFF"/>
+                          </a:solidFill>
+                          <a:latin typeface="Arial"/>
+                        </a:defRPr>
+                      </a:pPr>
+                      <a:r>
+                        <a:t>Field</a:t>
+                      </a:r>
+                    </a:p>
+                  </a:txBody>
+                  <a:tcPr marL="82296" marR="82296" marT="64008" marB="64008">
+                    <a:solidFill>
+                      <a:srgbClr val="16787C"/>
+                    </a:solidFill>
+                  </a:tcPr>
+                </a:tc>
+                <a:tc>
+                  <a:txBody>
+                    <a:bodyPr wrap="none"/>
+                    <a:lstStyle/>
+                    <a:p>
+                      <a:pPr>
+                        <a:lnSpc>
+                          <a:spcPts val="1600"/>
+                        </a:lnSpc>
+                        <a:spcAft>
+                          <a:spcPts val="0"/>
+                        </a:spcAft>
+                        <a:defRPr sz="1200" b="1">
+                          <a:solidFill>
+                            <a:srgbClr val="FFFFFF"/>
+                          </a:solidFill>
+                          <a:latin typeface="Arial"/>
+                        </a:defRPr>
+                      </a:pPr>
+                      <a:r>
+                        <a:t>Recorded detail</a:t>
+                      </a:r>
+                    </a:p>
+                  </a:txBody>
+                  <a:tcPr marL="82296" marR="82296" marT="64008" marB="64008">
+                    <a:solidFill>
+                      <a:srgbClr val="16787C"/>
+                    </a:solidFill>
+                  </a:tcPr>
+                </a:tc>
+              </a:tr>
+            </a:tbl>
+          </a:graphicData>
+        </a:graphic>
+      </p:graphicFrame>
+      <p:graphicFrame>
+        <p:nvGraphicFramePr>
+          <p:cNvPr id="7" name="Table 6"/>
+          <p:cNvGraphicFramePr>
+            <a:graphicFrameLocks noGrp="1"/>
+          </p:cNvGraphicFramePr>
+          <p:nvPr/>
+        </p:nvGraphicFramePr>
+        <p:xfrm>
+          <a:off x="365760" y="1700784"/>
+          <a:ext cx="8412479" cy="959103"/>
+        </p:xfrm>
+        <a:graphic>
+          <a:graphicData uri="http://schemas.openxmlformats.org/drawingml/2006/table">
+            <a:tbl>
+              <a:tblPr firstRow="1" bandRow="1">
+                <a:tableStyleId>{5C22544A-7EE6-4342-B048-85BDC9FD1C3A}</a:tableStyleId>
+              </a:tblPr>
+              <a:tblGrid>
+                <a:gridCol w="2271369"/>
+                <a:gridCol w="6141110"/>
+              </a:tblGrid>
+              <a:tr h="959103">
+                <a:tc>
+                  <a:txBody>
+                    <a:bodyPr wrap="none"/>
+                    <a:lstStyle/>
+                    <a:p>
+                      <a:pPr>
+                        <a:lnSpc>
+                          <a:spcPts val="1600"/>
+                        </a:lnSpc>
+                        <a:spcAft>
+                          <a:spcPts val="0"/>
+                        </a:spcAft>
+                        <a:defRPr sz="1200" b="0">
+                          <a:solidFill>
+                            <a:srgbClr val="21243A"/>
+                          </a:solidFill>
+                          <a:latin typeface="Arial"/>
+                        </a:defRPr>
+                      </a:pPr>
+                      <a:r>
+                        <a:t>Recorded text</a:t>
+                      </a:r>
+                    </a:p>
+                  </a:txBody>
+                  <a:tcPr marL="82296" marR="82296" marT="64008" marB="64008">
+                    <a:solidFill>
+                      <a:srgbClr val="F1F7F7"/>
+                    </a:solidFill>
+                  </a:tcPr>
+                </a:tc>
+                <a:tc>
+                  <a:txBody>
+                    <a:bodyPr wrap="none"/>
+                    <a:lstStyle/>
+                    <a:p>
+                      <a:pPr>
+                        <a:lnSpc>
+                          <a:spcPts val="1600"/>
+                        </a:lnSpc>
+                        <a:spcAft>
+                          <a:spcPts val="0"/>
+                        </a:spcAft>
+                        <a:defRPr sz="1200" b="0">
+                          <a:solidFill>
+                            <a:srgbClr val="21243A"/>
+                          </a:solidFill>
+                          <a:latin typeface="Arial"/>
+                        </a:defRPr>
+                      </a:pPr>
+                      <a:r>
+                        <a:t>Biomedical Signals • Research Commentary • 2025 | mRNA Vaccination and the</a:t>
+                      </a:r>
+                    </a:p>
+                    <a:p>
+                      <a:pPr>
+                        <a:lnSpc>
+                          <a:spcPts val="1600"/>
+                        </a:lnSpc>
+                        <a:spcAft>
+                          <a:spcPts val="0"/>
+                        </a:spcAft>
+                        <a:defRPr sz="1200" b="0">
+                          <a:solidFill>
+                            <a:srgbClr val="21243A"/>
+                          </a:solidFill>
+                          <a:latin typeface="Arial"/>
+                        </a:defRPr>
+                      </a:pPr>
+                      <a:r>
+                        <a:t>Brain: A Proposed Pathway | CAN PARTICLES CROSS THE BLOOD–BRAIN BARRIER?</a:t>
+                      </a:r>
+                    </a:p>
+                    <a:p>
+                      <a:pPr>
+                        <a:lnSpc>
+                          <a:spcPts val="1600"/>
+                        </a:lnSpc>
+                        <a:spcAft>
+                          <a:spcPts val="0"/>
+                        </a:spcAft>
+                        <a:defRPr sz="1200" b="0">
+                          <a:solidFill>
+                            <a:srgbClr val="21243A"/>
+                          </a:solidFill>
+                          <a:latin typeface="Arial"/>
+                        </a:defRPr>
+                      </a:pPr>
+                      <a:r>
+                        <a:t>| Brain | Bloodstream | Suggested outcomes | Inflammation | Brain fog |</a:t>
+                      </a:r>
+                    </a:p>
+                    <a:p>
+                      <a:pPr>
+                        <a:lnSpc>
+                          <a:spcPts val="1600"/>
+                        </a:lnSpc>
+                        <a:spcAft>
+                          <a:spcPts val="0"/>
+                        </a:spcAft>
+                        <a:defRPr sz="1200" b="0">
+                          <a:solidFill>
+                            <a:srgbClr val="21243A"/>
+                          </a:solidFill>
+                          <a:latin typeface="Arial"/>
+                        </a:defRPr>
+                      </a:pPr>
+                      <a:r>
+                        <a:t>Memory changes | Figure 1. Hypothetical pathway illustrated for discussion.</a:t>
+                      </a:r>
+                    </a:p>
+                  </a:txBody>
+                  <a:tcPr marL="82296" marR="82296" marT="64008" marB="64008">
+                    <a:solidFill>
+                      <a:srgbClr val="F1F7F7"/>
+                    </a:solidFill>
+                  </a:tcPr>
+                </a:tc>
+              </a:tr>
+            </a:tbl>
+          </a:graphicData>
+        </a:graphic>
+      </p:graphicFrame>
+    </p:spTree>
+  </p:cSld>
+  <p:clrMapOvr>
+    <a:masterClrMapping/>
+  </p:clrMapOvr>
+</p:sld>
+</file>
+
+<file path=ppt/slides/slide17.xml><?xml version="1.0" encoding="utf-8"?>
+<p:sld xmlns:a="http://schemas.openxmlformats.org/drawingml/2006/main" xmlns:p="http://schemas.openxmlformats.org/presentationml/2006/main" xmlns:r="http://schemas.openxmlformats.org/officeDocument/2006/relationships">
+  <p:cSld>
+    <p:spTree>
+      <p:nvGrpSpPr>
+        <p:cNvPr id="1" name=""/>
+        <p:cNvGrpSpPr/>
+        <p:nvPr/>
+      </p:nvGrpSpPr>
+      <p:grpSpPr/>
+      <p:sp>
+        <p:nvSpPr>
+          <p:cNvPr id="2" name="TextBox 1"/>
+          <p:cNvSpPr txBox="1"/>
+          <p:nvPr/>
+        </p:nvSpPr>
+        <p:spPr>
+          <a:xfrm>
+            <a:off x="365760" y="219456"/>
+            <a:ext cx="8412480" cy="228600"/>
+          </a:xfrm>
+          <a:prstGeom prst="rect">
+            <a:avLst/>
+          </a:prstGeom>
+          <a:noFill/>
+        </p:spPr>
+        <p:txBody>
+          <a:bodyPr wrap="square" lIns="0" rIns="0" tIns="0" bIns="0">
+            <a:spAutoFit/>
+          </a:bodyPr>
+          <a:lstStyle/>
+          <a:p>
+            <a:pPr>
+              <a:lnSpc>
+                <a:spcPct val="115000"/>
+              </a:lnSpc>
+              <a:spcAft>
+                <a:spcPts val="0"/>
+              </a:spcAft>
+              <a:defRPr sz="1100" b="1">
+                <a:solidFill>
+                  <a:srgbClr val="C5006A"/>
+                </a:solidFill>
+                <a:latin typeface="Arial"/>
+              </a:defRPr>
+            </a:pPr>
+            <a:r>
+              <a:t>SDA VISION / RESEARCH REPORT</a:t>
+            </a:r>
+          </a:p>
+        </p:txBody>
+      </p:sp>
+      <p:sp>
+        <p:nvSpPr>
+          <p:cNvPr id="3" name="TextBox 2"/>
+          <p:cNvSpPr txBox="1"/>
+          <p:nvPr/>
+        </p:nvSpPr>
+        <p:spPr>
+          <a:xfrm>
+            <a:off x="365760" y="658368"/>
+            <a:ext cx="8412480" cy="612648"/>
+          </a:xfrm>
+          <a:prstGeom prst="rect">
+            <a:avLst/>
+          </a:prstGeom>
+          <a:noFill/>
+        </p:spPr>
+        <p:txBody>
+          <a:bodyPr wrap="square" lIns="0" rIns="0" tIns="0" bIns="0">
+            <a:spAutoFit/>
+          </a:bodyPr>
+          <a:lstStyle/>
+          <a:p>
+            <a:pPr>
+              <a:lnSpc>
+                <a:spcPct val="115000"/>
+              </a:lnSpc>
+              <a:spcAft>
+                <a:spcPts val="0"/>
+              </a:spcAft>
+              <a:defRPr sz="2200" b="1">
+                <a:solidFill>
+                  <a:srgbClr val="21243A"/>
+                </a:solidFill>
+                <a:latin typeface="Arial"/>
+              </a:defRPr>
+            </a:pPr>
+            <a:r>
+              <a:t>How this assessment was reached</a:t>
+            </a:r>
+          </a:p>
+        </p:txBody>
+      </p:sp>
+      <p:sp>
+        <p:nvSpPr>
+          <p:cNvPr id="4" name="TextBox 3"/>
+          <p:cNvSpPr txBox="1"/>
+          <p:nvPr/>
+        </p:nvSpPr>
+        <p:spPr>
+          <a:xfrm>
+            <a:off x="365760" y="6291072"/>
+            <a:ext cx="8001000" cy="365760"/>
+          </a:xfrm>
+          <a:prstGeom prst="rect">
+            <a:avLst/>
+          </a:prstGeom>
+          <a:noFill/>
+        </p:spPr>
+        <p:txBody>
+          <a:bodyPr wrap="square" lIns="0" rIns="0" tIns="0" bIns="0">
+            <a:spAutoFit/>
+          </a:bodyPr>
+          <a:lstStyle/>
+          <a:p>
+            <a:pPr>
+              <a:lnSpc>
+                <a:spcPct val="115000"/>
+              </a:lnSpc>
+              <a:spcAft>
+                <a:spcPts val="0"/>
+              </a:spcAft>
+              <a:defRPr sz="800" b="0">
+                <a:solidFill>
+                  <a:srgbClr val="545B6D"/>
+                </a:solidFill>
+                <a:latin typeface="Arial"/>
+              </a:defRPr>
+            </a:pPr>
+            <a:r>
+              <a:t>Research assessment. Ratings are not calibrated probabilities.</a:t>
+            </a:r>
+          </a:p>
+        </p:txBody>
+      </p:sp>
+      <p:sp>
+        <p:nvSpPr>
+          <p:cNvPr id="5" name="TextBox 4"/>
+          <p:cNvSpPr txBox="1"/>
+          <p:nvPr/>
+        </p:nvSpPr>
+        <p:spPr>
+          <a:xfrm>
+            <a:off x="8394192" y="6318504"/>
+            <a:ext cx="365760" cy="228600"/>
+          </a:xfrm>
+          <a:prstGeom prst="rect">
+            <a:avLst/>
+          </a:prstGeom>
+          <a:noFill/>
+        </p:spPr>
+        <p:txBody>
+          <a:bodyPr wrap="square" lIns="0" rIns="0" tIns="0" bIns="0">
+            <a:spAutoFit/>
+          </a:bodyPr>
+          <a:lstStyle/>
+          <a:p>
+            <a:pPr>
+              <a:lnSpc>
+                <a:spcPct val="115000"/>
+              </a:lnSpc>
+              <a:spcAft>
+                <a:spcPts val="0"/>
+              </a:spcAft>
+              <a:defRPr sz="900" b="0">
+                <a:solidFill>
+                  <a:srgbClr val="545B6D"/>
+                </a:solidFill>
+                <a:latin typeface="Arial"/>
+              </a:defRPr>
+            </a:pPr>
+            <a:r>
+              <a:t>17</a:t>
+            </a:r>
+          </a:p>
+        </p:txBody>
+      </p:sp>
+      <p:graphicFrame>
+        <p:nvGraphicFramePr>
+          <p:cNvPr id="6" name="Table 5"/>
+          <p:cNvGraphicFramePr>
+            <a:graphicFrameLocks noGrp="1"/>
+          </p:cNvGraphicFramePr>
+          <p:nvPr/>
+        </p:nvGraphicFramePr>
+        <p:xfrm>
+          <a:off x="365760" y="1353312"/>
+          <a:ext cx="8412479" cy="347472"/>
+        </p:xfrm>
+        <a:graphic>
+          <a:graphicData uri="http://schemas.openxmlformats.org/drawingml/2006/table">
+            <a:tbl>
+              <a:tblPr firstRow="1" bandRow="1">
+                <a:tableStyleId>{5C22544A-7EE6-4342-B048-85BDC9FD1C3A}</a:tableStyleId>
+              </a:tblPr>
+              <a:tblGrid>
+                <a:gridCol w="2271369"/>
+                <a:gridCol w="6141110"/>
+              </a:tblGrid>
+              <a:tr h="347472">
+                <a:tc>
+                  <a:txBody>
+                    <a:bodyPr wrap="none"/>
+                    <a:lstStyle/>
+                    <a:p>
+                      <a:pPr>
+                        <a:lnSpc>
+                          <a:spcPts val="1600"/>
+                        </a:lnSpc>
+                        <a:spcAft>
+                          <a:spcPts val="0"/>
+                        </a:spcAft>
+                        <a:defRPr sz="1200" b="1">
+                          <a:solidFill>
+                            <a:srgbClr val="FFFFFF"/>
+                          </a:solidFill>
+                          <a:latin typeface="Arial"/>
+                        </a:defRPr>
+                      </a:pPr>
+                      <a:r>
+                        <a:t>Field</a:t>
+                      </a:r>
+                    </a:p>
+                  </a:txBody>
+                  <a:tcPr marL="82296" marR="82296" marT="64008" marB="64008">
+                    <a:solidFill>
+                      <a:srgbClr val="16787C"/>
+                    </a:solidFill>
+                  </a:tcPr>
+                </a:tc>
+                <a:tc>
+                  <a:txBody>
+                    <a:bodyPr wrap="none"/>
+                    <a:lstStyle/>
+                    <a:p>
+                      <a:pPr>
+                        <a:lnSpc>
+                          <a:spcPts val="1600"/>
+                        </a:lnSpc>
+                        <a:spcAft>
+                          <a:spcPts val="0"/>
+                        </a:spcAft>
+                        <a:defRPr sz="1200" b="1">
+                          <a:solidFill>
+                            <a:srgbClr val="FFFFFF"/>
+                          </a:solidFill>
+                          <a:latin typeface="Arial"/>
+                        </a:defRPr>
+                      </a:pPr>
+                      <a:r>
+                        <a:t>Recorded detail</a:t>
+                      </a:r>
+                    </a:p>
+                  </a:txBody>
+                  <a:tcPr marL="82296" marR="82296" marT="64008" marB="64008">
+                    <a:solidFill>
+                      <a:srgbClr val="16787C"/>
+                    </a:solidFill>
+                  </a:tcPr>
+                </a:tc>
+              </a:tr>
+            </a:tbl>
+          </a:graphicData>
+        </a:graphic>
+      </p:graphicFrame>
+      <p:graphicFrame>
+        <p:nvGraphicFramePr>
+          <p:cNvPr id="7" name="Table 6"/>
+          <p:cNvGraphicFramePr>
+            <a:graphicFrameLocks noGrp="1"/>
+          </p:cNvGraphicFramePr>
+          <p:nvPr/>
+        </p:nvGraphicFramePr>
+        <p:xfrm>
+          <a:off x="365760" y="1700784"/>
+          <a:ext cx="8412479" cy="552704"/>
+        </p:xfrm>
+        <a:graphic>
+          <a:graphicData uri="http://schemas.openxmlformats.org/drawingml/2006/table">
+            <a:tbl>
+              <a:tblPr firstRow="1" bandRow="1">
+                <a:tableStyleId>{5C22544A-7EE6-4342-B048-85BDC9FD1C3A}</a:tableStyleId>
+              </a:tblPr>
+              <a:tblGrid>
+                <a:gridCol w="2271369"/>
+                <a:gridCol w="6141110"/>
+              </a:tblGrid>
+              <a:tr h="552704">
+                <a:tc>
+                  <a:txBody>
+                    <a:bodyPr wrap="none"/>
+                    <a:lstStyle/>
+                    <a:p>
+                      <a:pPr>
+                        <a:lnSpc>
+                          <a:spcPts val="1600"/>
+                        </a:lnSpc>
+                        <a:spcAft>
+                          <a:spcPts val="0"/>
+                        </a:spcAft>
+                        <a:defRPr sz="1200" b="0">
+                          <a:solidFill>
+                            <a:srgbClr val="21243A"/>
+                          </a:solidFill>
+                          <a:latin typeface="Arial"/>
+                        </a:defRPr>
+                      </a:pPr>
+                      <a:r>
+                        <a:t>1. override</a:t>
+                      </a:r>
+                    </a:p>
+                  </a:txBody>
+                  <a:tcPr marL="82296" marR="82296" marT="64008" marB="64008">
+                    <a:solidFill>
+                      <a:srgbClr val="F1F7F7"/>
+                    </a:solidFill>
+                  </a:tcPr>
+                </a:tc>
+                <a:tc>
+                  <a:txBody>
+                    <a:bodyPr wrap="none"/>
+                    <a:lstStyle/>
+                    <a:p>
+                      <a:pPr>
+                        <a:lnSpc>
+                          <a:spcPts val="1600"/>
+                        </a:lnSpc>
+                        <a:spcAft>
+                          <a:spcPts val="0"/>
+                        </a:spcAft>
+                        <a:defRPr sz="1200" b="0">
+                          <a:solidFill>
+                            <a:srgbClr val="21243A"/>
+                          </a:solidFill>
+                          <a:latin typeface="Arial"/>
+                        </a:defRPr>
+                      </a:pPr>
+                      <a:r>
+                        <a:t>outcome=none; detail=No confirmed C2PA AI assertion or SynthID watermark.</a:t>
+                      </a:r>
+                    </a:p>
+                    <a:p>
+                      <a:pPr>
+                        <a:lnSpc>
+                          <a:spcPts val="1600"/>
+                        </a:lnSpc>
+                        <a:spcAft>
+                          <a:spcPts val="0"/>
+                        </a:spcAft>
+                        <a:defRPr sz="1200" b="0">
+                          <a:solidFill>
+                            <a:srgbClr val="21243A"/>
+                          </a:solidFill>
+                          <a:latin typeface="Arial"/>
+                        </a:defRPr>
+                      </a:pPr>
+                      <a:r>
+                        <a:t>Origin remains unresolved by these checks.</a:t>
+                      </a:r>
+                    </a:p>
+                  </a:txBody>
+                  <a:tcPr marL="82296" marR="82296" marT="64008" marB="64008">
+                    <a:solidFill>
+                      <a:srgbClr val="F1F7F7"/>
+                    </a:solidFill>
+                  </a:tcPr>
+                </a:tc>
+              </a:tr>
+            </a:tbl>
+          </a:graphicData>
+        </a:graphic>
+      </p:graphicFrame>
+      <p:graphicFrame>
+        <p:nvGraphicFramePr>
+          <p:cNvPr id="8" name="Table 7"/>
+          <p:cNvGraphicFramePr>
+            <a:graphicFrameLocks noGrp="1"/>
+          </p:cNvGraphicFramePr>
+          <p:nvPr/>
+        </p:nvGraphicFramePr>
+        <p:xfrm>
+          <a:off x="365760" y="2253488"/>
+          <a:ext cx="8412479" cy="552704"/>
+        </p:xfrm>
+        <a:graphic>
+          <a:graphicData uri="http://schemas.openxmlformats.org/drawingml/2006/table">
+            <a:tbl>
+              <a:tblPr firstRow="1" bandRow="1">
+                <a:tableStyleId>{5C22544A-7EE6-4342-B048-85BDC9FD1C3A}</a:tableStyleId>
+              </a:tblPr>
+              <a:tblGrid>
+                <a:gridCol w="2271369"/>
+                <a:gridCol w="6141110"/>
+              </a:tblGrid>
+              <a:tr h="552704">
+                <a:tc>
+                  <a:txBody>
+                    <a:bodyPr wrap="none"/>
+                    <a:lstStyle/>
+                    <a:p>
+                      <a:pPr>
+                        <a:lnSpc>
+                          <a:spcPts val="1600"/>
+                        </a:lnSpc>
+                        <a:spcAft>
+                          <a:spcPts val="0"/>
+                        </a:spcAft>
+                        <a:defRPr sz="1200" b="0">
+                          <a:solidFill>
+                            <a:srgbClr val="21243A"/>
+                          </a:solidFill>
+                          <a:latin typeface="Arial"/>
+                        </a:defRPr>
+                      </a:pPr>
+                      <a:r>
+                        <a:t>2. model_agreement</a:t>
+                      </a:r>
+                    </a:p>
+                  </a:txBody>
+                  <a:tcPr marL="82296" marR="82296" marT="64008" marB="64008">
+                    <a:solidFill>
+                      <a:srgbClr val="FFFFFF"/>
+                    </a:solidFill>
+                  </a:tcPr>
+                </a:tc>
+                <a:tc>
+                  <a:txBody>
+                    <a:bodyPr wrap="none"/>
+                    <a:lstStyle/>
+                    <a:p>
+                      <a:pPr>
+                        <a:lnSpc>
+                          <a:spcPts val="1600"/>
+                        </a:lnSpc>
+                        <a:spcAft>
+                          <a:spcPts val="0"/>
+                        </a:spcAft>
+                        <a:defRPr sz="1200" b="0">
+                          <a:solidFill>
+                            <a:srgbClr val="21243A"/>
+                          </a:solidFill>
+                          <a:latin typeface="Arial"/>
+                        </a:defRPr>
+                      </a:pPr>
+                      <a:r>
+                        <a:t>synthetic=['Claude Vision', 'Gemini Vision']; authentic=[]; uncertain=['OpenAI</a:t>
+                      </a:r>
+                    </a:p>
+                    <a:p>
+                      <a:pPr>
+                        <a:lnSpc>
+                          <a:spcPts val="1600"/>
+                        </a:lnSpc>
+                        <a:spcAft>
+                          <a:spcPts val="0"/>
+                        </a:spcAft>
+                        <a:defRPr sz="1200" b="0">
+                          <a:solidFill>
+                            <a:srgbClr val="21243A"/>
+                          </a:solidFill>
+                          <a:latin typeface="Arial"/>
+                        </a:defRPr>
+                      </a:pPr>
+                      <a:r>
+                        <a:t>Vision']; forensic_supports_synthetic=False</a:t>
+                      </a:r>
+                    </a:p>
+                  </a:txBody>
+                  <a:tcPr marL="82296" marR="82296" marT="64008" marB="64008">
+                    <a:solidFill>
+                      <a:srgbClr val="FFFFFF"/>
+                    </a:solidFill>
+                  </a:tcPr>
+                </a:tc>
+              </a:tr>
+            </a:tbl>
+          </a:graphicData>
+        </a:graphic>
+      </p:graphicFrame>
+      <p:graphicFrame>
+        <p:nvGraphicFramePr>
+          <p:cNvPr id="9" name="Table 8"/>
+          <p:cNvGraphicFramePr>
+            <a:graphicFrameLocks noGrp="1"/>
+          </p:cNvGraphicFramePr>
+          <p:nvPr/>
+        </p:nvGraphicFramePr>
+        <p:xfrm>
+          <a:off x="365760" y="2806192"/>
+          <a:ext cx="8412479" cy="552704"/>
+        </p:xfrm>
+        <a:graphic>
+          <a:graphicData uri="http://schemas.openxmlformats.org/drawingml/2006/table">
+            <a:tbl>
+              <a:tblPr firstRow="1" bandRow="1">
+                <a:tableStyleId>{5C22544A-7EE6-4342-B048-85BDC9FD1C3A}</a:tableStyleId>
+              </a:tblPr>
+              <a:tblGrid>
+                <a:gridCol w="2271369"/>
+                <a:gridCol w="6141110"/>
+              </a:tblGrid>
+              <a:tr h="552704">
+                <a:tc>
+                  <a:txBody>
+                    <a:bodyPr wrap="none"/>
+                    <a:lstStyle/>
+                    <a:p>
+                      <a:pPr>
+                        <a:lnSpc>
+                          <a:spcPts val="1600"/>
+                        </a:lnSpc>
+                        <a:spcAft>
+                          <a:spcPts val="0"/>
+                        </a:spcAft>
+                        <a:defRPr sz="1200" b="0">
+                          <a:solidFill>
+                            <a:srgbClr val="21243A"/>
+                          </a:solidFill>
+                          <a:latin typeface="Arial"/>
+                        </a:defRPr>
+                      </a:pPr>
+                      <a:r>
+                        <a:t>3. verdict</a:t>
+                      </a:r>
+                    </a:p>
+                  </a:txBody>
+                  <a:tcPr marL="82296" marR="82296" marT="64008" marB="64008">
+                    <a:solidFill>
+                      <a:srgbClr val="F1F7F7"/>
+                    </a:solidFill>
+                  </a:tcPr>
+                </a:tc>
+                <a:tc>
+                  <a:txBody>
+                    <a:bodyPr wrap="none"/>
+                    <a:lstStyle/>
+                    <a:p>
+                      <a:pPr>
+                        <a:lnSpc>
+                          <a:spcPts val="1600"/>
+                        </a:lnSpc>
+                        <a:spcAft>
+                          <a:spcPts val="0"/>
+                        </a:spcAft>
+                        <a:defRPr sz="1200" b="0">
+                          <a:solidFill>
+                            <a:srgbClr val="21243A"/>
+                          </a:solidFill>
+                          <a:latin typeface="Arial"/>
+                        </a:defRPr>
+                      </a:pPr>
+                      <a:r>
+                        <a:t>value=synthetic_likely; confidence=medium; reason=2 models agree this is likely</a:t>
+                      </a:r>
+                    </a:p>
+                    <a:p>
+                      <a:pPr>
+                        <a:lnSpc>
+                          <a:spcPts val="1600"/>
+                        </a:lnSpc>
+                        <a:spcAft>
+                          <a:spcPts val="0"/>
+                        </a:spcAft>
+                        <a:defRPr sz="1200" b="0">
+                          <a:solidFill>
+                            <a:srgbClr val="21243A"/>
+                          </a:solidFill>
+                          <a:latin typeface="Arial"/>
+                        </a:defRPr>
+                      </a:pPr>
+                      <a:r>
+                        <a:t>synthetic.</a:t>
+                      </a:r>
+                    </a:p>
+                  </a:txBody>
+                  <a:tcPr marL="82296" marR="82296" marT="64008" marB="64008">
+                    <a:solidFill>
+                      <a:srgbClr val="F1F7F7"/>
+                    </a:solidFill>
+                  </a:tcPr>
+                </a:tc>
+              </a:tr>
+            </a:tbl>
+          </a:graphicData>
+        </a:graphic>
+      </p:graphicFrame>
+    </p:spTree>
+  </p:cSld>
+  <p:clrMapOvr>
+    <a:masterClrMapping/>
+  </p:clrMapOvr>
+</p:sld>
+</file>
+
+<file path=ppt/slides/slide18.xml><?xml version="1.0" encoding="utf-8"?>
+<p:sld xmlns:a="http://schemas.openxmlformats.org/drawingml/2006/main" xmlns:p="http://schemas.openxmlformats.org/presentationml/2006/main" xmlns:r="http://schemas.openxmlformats.org/officeDocument/2006/relationships">
+  <p:cSld>
+    <p:spTree>
+      <p:nvGrpSpPr>
+        <p:cNvPr id="1" name=""/>
+        <p:cNvGrpSpPr/>
+        <p:nvPr/>
+      </p:nvGrpSpPr>
+      <p:grpSpPr/>
+      <p:sp>
+        <p:nvSpPr>
+          <p:cNvPr id="2" name="TextBox 1"/>
+          <p:cNvSpPr txBox="1"/>
+          <p:nvPr/>
+        </p:nvSpPr>
+        <p:spPr>
+          <a:xfrm>
+            <a:off x="365760" y="219456"/>
+            <a:ext cx="8412480" cy="228600"/>
+          </a:xfrm>
+          <a:prstGeom prst="rect">
+            <a:avLst/>
+          </a:prstGeom>
+          <a:noFill/>
+        </p:spPr>
+        <p:txBody>
+          <a:bodyPr wrap="square" lIns="0" rIns="0" tIns="0" bIns="0">
+            <a:spAutoFit/>
+          </a:bodyPr>
+          <a:lstStyle/>
+          <a:p>
+            <a:pPr>
+              <a:lnSpc>
+                <a:spcPct val="115000"/>
+              </a:lnSpc>
+              <a:spcAft>
+                <a:spcPts val="0"/>
+              </a:spcAft>
+              <a:defRPr sz="1100" b="1">
+                <a:solidFill>
+                  <a:srgbClr val="C5006A"/>
+                </a:solidFill>
+                <a:latin typeface="Arial"/>
+              </a:defRPr>
+            </a:pPr>
+            <a:r>
+              <a:t>SDA VISION / RESEARCH REPORT</a:t>
+            </a:r>
+          </a:p>
+        </p:txBody>
+      </p:sp>
+      <p:sp>
+        <p:nvSpPr>
+          <p:cNvPr id="3" name="TextBox 2"/>
+          <p:cNvSpPr txBox="1"/>
+          <p:nvPr/>
+        </p:nvSpPr>
+        <p:spPr>
+          <a:xfrm>
+            <a:off x="365760" y="658368"/>
+            <a:ext cx="8412480" cy="612648"/>
+          </a:xfrm>
+          <a:prstGeom prst="rect">
+            <a:avLst/>
+          </a:prstGeom>
+          <a:noFill/>
+        </p:spPr>
+        <p:txBody>
+          <a:bodyPr wrap="square" lIns="0" rIns="0" tIns="0" bIns="0">
+            <a:spAutoFit/>
+          </a:bodyPr>
+          <a:lstStyle/>
+          <a:p>
+            <a:pPr>
+              <a:lnSpc>
+                <a:spcPct val="115000"/>
+              </a:lnSpc>
+              <a:spcAft>
+                <a:spcPts val="0"/>
+              </a:spcAft>
+              <a:defRPr sz="2200" b="1">
+                <a:solidFill>
+                  <a:srgbClr val="21243A"/>
+                </a:solidFill>
+                <a:latin typeface="Arial"/>
+              </a:defRPr>
+            </a:pPr>
+            <a:r>
+              <a:t>File and analysis record</a:t>
+            </a:r>
+          </a:p>
+        </p:txBody>
+      </p:sp>
+      <p:sp>
+        <p:nvSpPr>
+          <p:cNvPr id="4" name="TextBox 3"/>
+          <p:cNvSpPr txBox="1"/>
+          <p:nvPr/>
+        </p:nvSpPr>
+        <p:spPr>
+          <a:xfrm>
+            <a:off x="365760" y="6291072"/>
+            <a:ext cx="8001000" cy="365760"/>
+          </a:xfrm>
+          <a:prstGeom prst="rect">
+            <a:avLst/>
+          </a:prstGeom>
+          <a:noFill/>
+        </p:spPr>
+        <p:txBody>
+          <a:bodyPr wrap="square" lIns="0" rIns="0" tIns="0" bIns="0">
+            <a:spAutoFit/>
+          </a:bodyPr>
+          <a:lstStyle/>
+          <a:p>
+            <a:pPr>
+              <a:lnSpc>
+                <a:spcPct val="115000"/>
+              </a:lnSpc>
+              <a:spcAft>
+                <a:spcPts val="0"/>
+              </a:spcAft>
+              <a:defRPr sz="800" b="0">
+                <a:solidFill>
+                  <a:srgbClr val="545B6D"/>
+                </a:solidFill>
+                <a:latin typeface="Arial"/>
+              </a:defRPr>
+            </a:pPr>
+            <a:r>
+              <a:t>Research assessment. Ratings are not calibrated probabilities.</a:t>
+            </a:r>
+          </a:p>
+        </p:txBody>
+      </p:sp>
+      <p:sp>
+        <p:nvSpPr>
+          <p:cNvPr id="5" name="TextBox 4"/>
+          <p:cNvSpPr txBox="1"/>
+          <p:nvPr/>
+        </p:nvSpPr>
+        <p:spPr>
+          <a:xfrm>
+            <a:off x="8394192" y="6318504"/>
+            <a:ext cx="365760" cy="228600"/>
+          </a:xfrm>
+          <a:prstGeom prst="rect">
+            <a:avLst/>
+          </a:prstGeom>
+          <a:noFill/>
+        </p:spPr>
+        <p:txBody>
+          <a:bodyPr wrap="square" lIns="0" rIns="0" tIns="0" bIns="0">
+            <a:spAutoFit/>
+          </a:bodyPr>
+          <a:lstStyle/>
+          <a:p>
+            <a:pPr>
+              <a:lnSpc>
+                <a:spcPct val="115000"/>
+              </a:lnSpc>
+              <a:spcAft>
+                <a:spcPts val="0"/>
+              </a:spcAft>
+              <a:defRPr sz="900" b="0">
+                <a:solidFill>
+                  <a:srgbClr val="545B6D"/>
+                </a:solidFill>
+                <a:latin typeface="Arial"/>
+              </a:defRPr>
+            </a:pPr>
+            <a:r>
+              <a:t>18</a:t>
             </a:r>
           </a:p>
         </p:txBody>
@@ -8150,7 +11830,95 @@
                         </a:defRPr>
                       </a:pPr>
                       <a:r>
-                        <a:t>Continued</a:t>
+                        <a:t>File</a:t>
+                      </a:r>
+                    </a:p>
+                  </a:txBody>
+                  <a:tcPr marL="82296" marR="82296" marT="64008" marB="64008">
+                    <a:solidFill>
+                      <a:srgbClr val="F1F7F7"/>
+                    </a:solidFill>
+                  </a:tcPr>
+                </a:tc>
+                <a:tc>
+                  <a:txBody>
+                    <a:bodyPr wrap="none"/>
+                    <a:lstStyle/>
+                    <a:p>
+                      <a:pPr>
+                        <a:lnSpc>
+                          <a:spcPts val="1600"/>
+                        </a:lnSpc>
+                        <a:spcAft>
+                          <a:spcPts val="0"/>
+                        </a:spcAft>
+                        <a:defRPr sz="1200" b="0">
+                          <a:solidFill>
+                            <a:srgbClr val="21243A"/>
+                          </a:solidFill>
+                          <a:latin typeface="Arial"/>
+                        </a:defRPr>
+                      </a:pPr>
+                      <a:r>
+                        <a:t>journal-diagram.png</a:t>
+                      </a:r>
+                    </a:p>
+                  </a:txBody>
+                  <a:tcPr marL="82296" marR="82296" marT="64008" marB="64008">
+                    <a:solidFill>
+                      <a:srgbClr val="F1F7F7"/>
+                    </a:solidFill>
+                  </a:tcPr>
+                </a:tc>
+              </a:tr>
+            </a:tbl>
+          </a:graphicData>
+        </a:graphic>
+      </p:graphicFrame>
+      <p:graphicFrame>
+        <p:nvGraphicFramePr>
+          <p:cNvPr id="8" name="Table 7"/>
+          <p:cNvGraphicFramePr>
+            <a:graphicFrameLocks noGrp="1"/>
+          </p:cNvGraphicFramePr>
+          <p:nvPr/>
+        </p:nvGraphicFramePr>
+        <p:xfrm>
+          <a:off x="365760" y="2050288"/>
+          <a:ext cx="8412479" cy="349504"/>
+        </p:xfrm>
+        <a:graphic>
+          <a:graphicData uri="http://schemas.openxmlformats.org/drawingml/2006/table">
+            <a:tbl>
+              <a:tblPr firstRow="1" bandRow="1">
+                <a:tableStyleId>{5C22544A-7EE6-4342-B048-85BDC9FD1C3A}</a:tableStyleId>
+              </a:tblPr>
+              <a:tblGrid>
+                <a:gridCol w="2271369"/>
+                <a:gridCol w="6141110"/>
+              </a:tblGrid>
+              <a:tr h="349504">
+                <a:tc>
+                  <a:txBody>
+                    <a:bodyPr wrap="none"/>
+                    <a:lstStyle/>
+                    <a:p>
+                      <a:pPr>
+                        <a:lnSpc>
+                          <a:spcPts val="1600"/>
+                        </a:lnSpc>
+                        <a:spcAft>
+                          <a:spcPts val="0"/>
+                        </a:spcAft>
+                        <a:defRPr sz="1200" b="0">
+                          <a:solidFill>
+                            <a:srgbClr val="21243A"/>
+                          </a:solidFill>
+                          <a:latin typeface="Arial"/>
+                        </a:defRPr>
+                      </a:pPr>
+                      <a:r>
+                        <a:t>Analysis ID</a:t>
                       </a:r>
                     </a:p>
                   </a:txBody>
@@ -8180,7 +11948,768 @@
                         </a:defRPr>
                       </a:pPr>
                       <a:r>
-                        <a:t>new model analysis.</a:t>
+                        <a:t>8faa3dd9-dfff-476f-a33e-cd661e1e6f35</a:t>
+                      </a:r>
+                    </a:p>
+                  </a:txBody>
+                  <a:tcPr marL="82296" marR="82296" marT="64008" marB="64008">
+                    <a:solidFill>
+                      <a:srgbClr val="FFFFFF"/>
+                    </a:solidFill>
+                  </a:tcPr>
+                </a:tc>
+              </a:tr>
+            </a:tbl>
+          </a:graphicData>
+        </a:graphic>
+      </p:graphicFrame>
+      <p:graphicFrame>
+        <p:nvGraphicFramePr>
+          <p:cNvPr id="9" name="Table 8"/>
+          <p:cNvGraphicFramePr>
+            <a:graphicFrameLocks noGrp="1"/>
+          </p:cNvGraphicFramePr>
+          <p:nvPr/>
+        </p:nvGraphicFramePr>
+        <p:xfrm>
+          <a:off x="365760" y="2399792"/>
+          <a:ext cx="8412479" cy="349504"/>
+        </p:xfrm>
+        <a:graphic>
+          <a:graphicData uri="http://schemas.openxmlformats.org/drawingml/2006/table">
+            <a:tbl>
+              <a:tblPr firstRow="1" bandRow="1">
+                <a:tableStyleId>{5C22544A-7EE6-4342-B048-85BDC9FD1C3A}</a:tableStyleId>
+              </a:tblPr>
+              <a:tblGrid>
+                <a:gridCol w="2271369"/>
+                <a:gridCol w="6141110"/>
+              </a:tblGrid>
+              <a:tr h="349504">
+                <a:tc>
+                  <a:txBody>
+                    <a:bodyPr wrap="none"/>
+                    <a:lstStyle/>
+                    <a:p>
+                      <a:pPr>
+                        <a:lnSpc>
+                          <a:spcPts val="1600"/>
+                        </a:lnSpc>
+                        <a:spcAft>
+                          <a:spcPts val="0"/>
+                        </a:spcAft>
+                        <a:defRPr sz="1200" b="0">
+                          <a:solidFill>
+                            <a:srgbClr val="21243A"/>
+                          </a:solidFill>
+                          <a:latin typeface="Arial"/>
+                        </a:defRPr>
+                      </a:pPr>
+                      <a:r>
+                        <a:t>Generated</a:t>
+                      </a:r>
+                    </a:p>
+                  </a:txBody>
+                  <a:tcPr marL="82296" marR="82296" marT="64008" marB="64008">
+                    <a:solidFill>
+                      <a:srgbClr val="F1F7F7"/>
+                    </a:solidFill>
+                  </a:tcPr>
+                </a:tc>
+                <a:tc>
+                  <a:txBody>
+                    <a:bodyPr wrap="none"/>
+                    <a:lstStyle/>
+                    <a:p>
+                      <a:pPr>
+                        <a:lnSpc>
+                          <a:spcPts val="1600"/>
+                        </a:lnSpc>
+                        <a:spcAft>
+                          <a:spcPts val="0"/>
+                        </a:spcAft>
+                        <a:defRPr sz="1200" b="0">
+                          <a:solidFill>
+                            <a:srgbClr val="21243A"/>
+                          </a:solidFill>
+                          <a:latin typeface="Arial"/>
+                        </a:defRPr>
+                      </a:pPr>
+                      <a:r>
+                        <a:t>2026-09-26T22:31:05+00:00</a:t>
+                      </a:r>
+                    </a:p>
+                  </a:txBody>
+                  <a:tcPr marL="82296" marR="82296" marT="64008" marB="64008">
+                    <a:solidFill>
+                      <a:srgbClr val="F1F7F7"/>
+                    </a:solidFill>
+                  </a:tcPr>
+                </a:tc>
+              </a:tr>
+            </a:tbl>
+          </a:graphicData>
+        </a:graphic>
+      </p:graphicFrame>
+      <p:graphicFrame>
+        <p:nvGraphicFramePr>
+          <p:cNvPr id="10" name="Table 9"/>
+          <p:cNvGraphicFramePr>
+            <a:graphicFrameLocks noGrp="1"/>
+          </p:cNvGraphicFramePr>
+          <p:nvPr/>
+        </p:nvGraphicFramePr>
+        <p:xfrm>
+          <a:off x="365760" y="2749296"/>
+          <a:ext cx="8412479" cy="349504"/>
+        </p:xfrm>
+        <a:graphic>
+          <a:graphicData uri="http://schemas.openxmlformats.org/drawingml/2006/table">
+            <a:tbl>
+              <a:tblPr firstRow="1" bandRow="1">
+                <a:tableStyleId>{5C22544A-7EE6-4342-B048-85BDC9FD1C3A}</a:tableStyleId>
+              </a:tblPr>
+              <a:tblGrid>
+                <a:gridCol w="2271369"/>
+                <a:gridCol w="6141110"/>
+              </a:tblGrid>
+              <a:tr h="349504">
+                <a:tc>
+                  <a:txBody>
+                    <a:bodyPr wrap="none"/>
+                    <a:lstStyle/>
+                    <a:p>
+                      <a:pPr>
+                        <a:lnSpc>
+                          <a:spcPts val="1600"/>
+                        </a:lnSpc>
+                        <a:spcAft>
+                          <a:spcPts val="0"/>
+                        </a:spcAft>
+                        <a:defRPr sz="1200" b="0">
+                          <a:solidFill>
+                            <a:srgbClr val="21243A"/>
+                          </a:solidFill>
+                          <a:latin typeface="Arial"/>
+                        </a:defRPr>
+                      </a:pPr>
+                      <a:r>
+                        <a:t>Tool</a:t>
+                      </a:r>
+                    </a:p>
+                  </a:txBody>
+                  <a:tcPr marL="82296" marR="82296" marT="64008" marB="64008">
+                    <a:solidFill>
+                      <a:srgbClr val="FFFFFF"/>
+                    </a:solidFill>
+                  </a:tcPr>
+                </a:tc>
+                <a:tc>
+                  <a:txBody>
+                    <a:bodyPr wrap="none"/>
+                    <a:lstStyle/>
+                    <a:p>
+                      <a:pPr>
+                        <a:lnSpc>
+                          <a:spcPts val="1600"/>
+                        </a:lnSpc>
+                        <a:spcAft>
+                          <a:spcPts val="0"/>
+                        </a:spcAft>
+                        <a:defRPr sz="1200" b="0">
+                          <a:solidFill>
+                            <a:srgbClr val="21243A"/>
+                          </a:solidFill>
+                          <a:latin typeface="Arial"/>
+                        </a:defRPr>
+                      </a:pPr>
+                      <a:r>
+                        <a:t>SDA Vision 0.1.0</a:t>
+                      </a:r>
+                    </a:p>
+                  </a:txBody>
+                  <a:tcPr marL="82296" marR="82296" marT="64008" marB="64008">
+                    <a:solidFill>
+                      <a:srgbClr val="FFFFFF"/>
+                    </a:solidFill>
+                  </a:tcPr>
+                </a:tc>
+              </a:tr>
+            </a:tbl>
+          </a:graphicData>
+        </a:graphic>
+      </p:graphicFrame>
+      <p:graphicFrame>
+        <p:nvGraphicFramePr>
+          <p:cNvPr id="11" name="Table 10"/>
+          <p:cNvGraphicFramePr>
+            <a:graphicFrameLocks noGrp="1"/>
+          </p:cNvGraphicFramePr>
+          <p:nvPr/>
+        </p:nvGraphicFramePr>
+        <p:xfrm>
+          <a:off x="365760" y="3098800"/>
+          <a:ext cx="8412479" cy="349504"/>
+        </p:xfrm>
+        <a:graphic>
+          <a:graphicData uri="http://schemas.openxmlformats.org/drawingml/2006/table">
+            <a:tbl>
+              <a:tblPr firstRow="1" bandRow="1">
+                <a:tableStyleId>{5C22544A-7EE6-4342-B048-85BDC9FD1C3A}</a:tableStyleId>
+              </a:tblPr>
+              <a:tblGrid>
+                <a:gridCol w="2271369"/>
+                <a:gridCol w="6141110"/>
+              </a:tblGrid>
+              <a:tr h="349504">
+                <a:tc>
+                  <a:txBody>
+                    <a:bodyPr wrap="none"/>
+                    <a:lstStyle/>
+                    <a:p>
+                      <a:pPr>
+                        <a:lnSpc>
+                          <a:spcPts val="1600"/>
+                        </a:lnSpc>
+                        <a:spcAft>
+                          <a:spcPts val="0"/>
+                        </a:spcAft>
+                        <a:defRPr sz="1200" b="0">
+                          <a:solidFill>
+                            <a:srgbClr val="21243A"/>
+                          </a:solidFill>
+                          <a:latin typeface="Arial"/>
+                        </a:defRPr>
+                      </a:pPr>
+                      <a:r>
+                        <a:t>Models</a:t>
+                      </a:r>
+                    </a:p>
+                  </a:txBody>
+                  <a:tcPr marL="82296" marR="82296" marT="64008" marB="64008">
+                    <a:solidFill>
+                      <a:srgbClr val="F1F7F7"/>
+                    </a:solidFill>
+                  </a:tcPr>
+                </a:tc>
+                <a:tc>
+                  <a:txBody>
+                    <a:bodyPr wrap="none"/>
+                    <a:lstStyle/>
+                    <a:p>
+                      <a:pPr>
+                        <a:lnSpc>
+                          <a:spcPts val="1600"/>
+                        </a:lnSpc>
+                        <a:spcAft>
+                          <a:spcPts val="0"/>
+                        </a:spcAft>
+                        <a:defRPr sz="1200" b="0">
+                          <a:solidFill>
+                            <a:srgbClr val="21243A"/>
+                          </a:solidFill>
+                          <a:latin typeface="Arial"/>
+                        </a:defRPr>
+                      </a:pPr>
+                      <a:r>
+                        <a:t>claude-opus-5-5, gemini-3.8-flash, gpt-6-astra</a:t>
+                      </a:r>
+                    </a:p>
+                  </a:txBody>
+                  <a:tcPr marL="82296" marR="82296" marT="64008" marB="64008">
+                    <a:solidFill>
+                      <a:srgbClr val="F1F7F7"/>
+                    </a:solidFill>
+                  </a:tcPr>
+                </a:tc>
+              </a:tr>
+            </a:tbl>
+          </a:graphicData>
+        </a:graphic>
+      </p:graphicFrame>
+      <p:graphicFrame>
+        <p:nvGraphicFramePr>
+          <p:cNvPr id="12" name="Table 11"/>
+          <p:cNvGraphicFramePr>
+            <a:graphicFrameLocks noGrp="1"/>
+          </p:cNvGraphicFramePr>
+          <p:nvPr/>
+        </p:nvGraphicFramePr>
+        <p:xfrm>
+          <a:off x="365760" y="3448304"/>
+          <a:ext cx="8412479" cy="349504"/>
+        </p:xfrm>
+        <a:graphic>
+          <a:graphicData uri="http://schemas.openxmlformats.org/drawingml/2006/table">
+            <a:tbl>
+              <a:tblPr firstRow="1" bandRow="1">
+                <a:tableStyleId>{5C22544A-7EE6-4342-B048-85BDC9FD1C3A}</a:tableStyleId>
+              </a:tblPr>
+              <a:tblGrid>
+                <a:gridCol w="2271369"/>
+                <a:gridCol w="6141110"/>
+              </a:tblGrid>
+              <a:tr h="349504">
+                <a:tc>
+                  <a:txBody>
+                    <a:bodyPr wrap="none"/>
+                    <a:lstStyle/>
+                    <a:p>
+                      <a:pPr>
+                        <a:lnSpc>
+                          <a:spcPts val="1600"/>
+                        </a:lnSpc>
+                        <a:spcAft>
+                          <a:spcPts val="0"/>
+                        </a:spcAft>
+                        <a:defRPr sz="1200" b="0">
+                          <a:solidFill>
+                            <a:srgbClr val="21243A"/>
+                          </a:solidFill>
+                          <a:latin typeface="Arial"/>
+                        </a:defRPr>
+                      </a:pPr>
+                      <a:r>
+                        <a:t>Method version</a:t>
+                      </a:r>
+                    </a:p>
+                  </a:txBody>
+                  <a:tcPr marL="82296" marR="82296" marT="64008" marB="64008">
+                    <a:solidFill>
+                      <a:srgbClr val="FFFFFF"/>
+                    </a:solidFill>
+                  </a:tcPr>
+                </a:tc>
+                <a:tc>
+                  <a:txBody>
+                    <a:bodyPr wrap="none"/>
+                    <a:lstStyle/>
+                    <a:p>
+                      <a:pPr>
+                        <a:lnSpc>
+                          <a:spcPts val="1600"/>
+                        </a:lnSpc>
+                        <a:spcAft>
+                          <a:spcPts val="0"/>
+                        </a:spcAft>
+                        <a:defRPr sz="1200" b="0">
+                          <a:solidFill>
+                            <a:srgbClr val="21243A"/>
+                          </a:solidFill>
+                          <a:latin typeface="Arial"/>
+                        </a:defRPr>
+                      </a:pPr>
+                      <a:r>
+                        <a:t>pdf-preparation-2026-09-26.1</a:t>
+                      </a:r>
+                    </a:p>
+                  </a:txBody>
+                  <a:tcPr marL="82296" marR="82296" marT="64008" marB="64008">
+                    <a:solidFill>
+                      <a:srgbClr val="FFFFFF"/>
+                    </a:solidFill>
+                  </a:tcPr>
+                </a:tc>
+              </a:tr>
+            </a:tbl>
+          </a:graphicData>
+        </a:graphic>
+      </p:graphicFrame>
+      <p:graphicFrame>
+        <p:nvGraphicFramePr>
+          <p:cNvPr id="13" name="Table 12"/>
+          <p:cNvGraphicFramePr>
+            <a:graphicFrameLocks noGrp="1"/>
+          </p:cNvGraphicFramePr>
+          <p:nvPr/>
+        </p:nvGraphicFramePr>
+        <p:xfrm>
+          <a:off x="365760" y="3797808"/>
+          <a:ext cx="8412479" cy="349504"/>
+        </p:xfrm>
+        <a:graphic>
+          <a:graphicData uri="http://schemas.openxmlformats.org/drawingml/2006/table">
+            <a:tbl>
+              <a:tblPr firstRow="1" bandRow="1">
+                <a:tableStyleId>{5C22544A-7EE6-4342-B048-85BDC9FD1C3A}</a:tableStyleId>
+              </a:tblPr>
+              <a:tblGrid>
+                <a:gridCol w="2271369"/>
+                <a:gridCol w="6141110"/>
+              </a:tblGrid>
+              <a:tr h="349504">
+                <a:tc>
+                  <a:txBody>
+                    <a:bodyPr wrap="none"/>
+                    <a:lstStyle/>
+                    <a:p>
+                      <a:pPr>
+                        <a:lnSpc>
+                          <a:spcPts val="1600"/>
+                        </a:lnSpc>
+                        <a:spcAft>
+                          <a:spcPts val="0"/>
+                        </a:spcAft>
+                        <a:defRPr sz="1200" b="0">
+                          <a:solidFill>
+                            <a:srgbClr val="21243A"/>
+                          </a:solidFill>
+                          <a:latin typeface="Arial"/>
+                        </a:defRPr>
+                      </a:pPr>
+                      <a:r>
+                        <a:t>Analysis lens</a:t>
+                      </a:r>
+                    </a:p>
+                  </a:txBody>
+                  <a:tcPr marL="82296" marR="82296" marT="64008" marB="64008">
+                    <a:solidFill>
+                      <a:srgbClr val="F1F7F7"/>
+                    </a:solidFill>
+                  </a:tcPr>
+                </a:tc>
+                <a:tc>
+                  <a:txBody>
+                    <a:bodyPr wrap="none"/>
+                    <a:lstStyle/>
+                    <a:p>
+                      <a:pPr>
+                        <a:lnSpc>
+                          <a:spcPts val="1600"/>
+                        </a:lnSpc>
+                        <a:spcAft>
+                          <a:spcPts val="0"/>
+                        </a:spcAft>
+                        <a:defRPr sz="1200" b="0">
+                          <a:solidFill>
+                            <a:srgbClr val="21243A"/>
+                          </a:solidFill>
+                          <a:latin typeface="Arial"/>
+                        </a:defRPr>
+                      </a:pPr>
+                      <a:r>
+                        <a:t>general</a:t>
+                      </a:r>
+                    </a:p>
+                  </a:txBody>
+                  <a:tcPr marL="82296" marR="82296" marT="64008" marB="64008">
+                    <a:solidFill>
+                      <a:srgbClr val="F1F7F7"/>
+                    </a:solidFill>
+                  </a:tcPr>
+                </a:tc>
+              </a:tr>
+            </a:tbl>
+          </a:graphicData>
+        </a:graphic>
+      </p:graphicFrame>
+      <p:graphicFrame>
+        <p:nvGraphicFramePr>
+          <p:cNvPr id="14" name="Table 13"/>
+          <p:cNvGraphicFramePr>
+            <a:graphicFrameLocks noGrp="1"/>
+          </p:cNvGraphicFramePr>
+          <p:nvPr/>
+        </p:nvGraphicFramePr>
+        <p:xfrm>
+          <a:off x="365760" y="4147312"/>
+          <a:ext cx="8412479" cy="349504"/>
+        </p:xfrm>
+        <a:graphic>
+          <a:graphicData uri="http://schemas.openxmlformats.org/drawingml/2006/table">
+            <a:tbl>
+              <a:tblPr firstRow="1" bandRow="1">
+                <a:tableStyleId>{5C22544A-7EE6-4342-B048-85BDC9FD1C3A}</a:tableStyleId>
+              </a:tblPr>
+              <a:tblGrid>
+                <a:gridCol w="2271369"/>
+                <a:gridCol w="6141110"/>
+              </a:tblGrid>
+              <a:tr h="349504">
+                <a:tc>
+                  <a:txBody>
+                    <a:bodyPr wrap="none"/>
+                    <a:lstStyle/>
+                    <a:p>
+                      <a:pPr>
+                        <a:lnSpc>
+                          <a:spcPts val="1600"/>
+                        </a:lnSpc>
+                        <a:spcAft>
+                          <a:spcPts val="0"/>
+                        </a:spcAft>
+                        <a:defRPr sz="1200" b="0">
+                          <a:solidFill>
+                            <a:srgbClr val="21243A"/>
+                          </a:solidFill>
+                          <a:latin typeface="Arial"/>
+                        </a:defRPr>
+                      </a:pPr>
+                      <a:r>
+                        <a:t>Original SHA-256</a:t>
+                      </a:r>
+                    </a:p>
+                  </a:txBody>
+                  <a:tcPr marL="82296" marR="82296" marT="64008" marB="64008">
+                    <a:solidFill>
+                      <a:srgbClr val="FFFFFF"/>
+                    </a:solidFill>
+                  </a:tcPr>
+                </a:tc>
+                <a:tc>
+                  <a:txBody>
+                    <a:bodyPr wrap="none"/>
+                    <a:lstStyle/>
+                    <a:p>
+                      <a:pPr>
+                        <a:lnSpc>
+                          <a:spcPts val="1600"/>
+                        </a:lnSpc>
+                        <a:spcAft>
+                          <a:spcPts val="0"/>
+                        </a:spcAft>
+                        <a:defRPr sz="1200" b="0">
+                          <a:solidFill>
+                            <a:srgbClr val="21243A"/>
+                          </a:solidFill>
+                          <a:latin typeface="Arial"/>
+                        </a:defRPr>
+                      </a:pPr>
+                      <a:r>
+                        <a:t>c9a680547869618d7c63648d317b1f27c03ede59d5113a7cd6818f5ce2bd654e</a:t>
+                      </a:r>
+                    </a:p>
+                  </a:txBody>
+                  <a:tcPr marL="82296" marR="82296" marT="64008" marB="64008">
+                    <a:solidFill>
+                      <a:srgbClr val="FFFFFF"/>
+                    </a:solidFill>
+                  </a:tcPr>
+                </a:tc>
+              </a:tr>
+            </a:tbl>
+          </a:graphicData>
+        </a:graphic>
+      </p:graphicFrame>
+      <p:graphicFrame>
+        <p:nvGraphicFramePr>
+          <p:cNvPr id="15" name="Table 14"/>
+          <p:cNvGraphicFramePr>
+            <a:graphicFrameLocks noGrp="1"/>
+          </p:cNvGraphicFramePr>
+          <p:nvPr/>
+        </p:nvGraphicFramePr>
+        <p:xfrm>
+          <a:off x="365760" y="4496816"/>
+          <a:ext cx="8412479" cy="552704"/>
+        </p:xfrm>
+        <a:graphic>
+          <a:graphicData uri="http://schemas.openxmlformats.org/drawingml/2006/table">
+            <a:tbl>
+              <a:tblPr firstRow="1" bandRow="1">
+                <a:tableStyleId>{5C22544A-7EE6-4342-B048-85BDC9FD1C3A}</a:tableStyleId>
+              </a:tblPr>
+              <a:tblGrid>
+                <a:gridCol w="2271369"/>
+                <a:gridCol w="6141110"/>
+              </a:tblGrid>
+              <a:tr h="552704">
+                <a:tc>
+                  <a:txBody>
+                    <a:bodyPr wrap="none"/>
+                    <a:lstStyle/>
+                    <a:p>
+                      <a:pPr>
+                        <a:lnSpc>
+                          <a:spcPts val="1600"/>
+                        </a:lnSpc>
+                        <a:spcAft>
+                          <a:spcPts val="0"/>
+                        </a:spcAft>
+                        <a:defRPr sz="1200" b="0">
+                          <a:solidFill>
+                            <a:srgbClr val="21243A"/>
+                          </a:solidFill>
+                          <a:latin typeface="Arial"/>
+                        </a:defRPr>
+                      </a:pPr>
+                      <a:r>
+                        <a:t>Ingestion note 1</a:t>
+                      </a:r>
+                    </a:p>
+                  </a:txBody>
+                  <a:tcPr marL="82296" marR="82296" marT="64008" marB="64008">
+                    <a:solidFill>
+                      <a:srgbClr val="F1F7F7"/>
+                    </a:solidFill>
+                  </a:tcPr>
+                </a:tc>
+                <a:tc>
+                  <a:txBody>
+                    <a:bodyPr wrap="none"/>
+                    <a:lstStyle/>
+                    <a:p>
+                      <a:pPr>
+                        <a:lnSpc>
+                          <a:spcPts val="1600"/>
+                        </a:lnSpc>
+                        <a:spcAft>
+                          <a:spcPts val="0"/>
+                        </a:spcAft>
+                        <a:defRPr sz="1200" b="0">
+                          <a:solidFill>
+                            <a:srgbClr val="21243A"/>
+                          </a:solidFill>
+                          <a:latin typeface="Arial"/>
+                        </a:defRPr>
+                      </a:pPr>
+                      <a:r>
+                        <a:t>Fresh provider replies acquired for eleven-examples-refresh-20260926-r1; report</a:t>
+                      </a:r>
+                    </a:p>
+                    <a:p>
+                      <a:pPr>
+                        <a:lnSpc>
+                          <a:spcPts val="1600"/>
+                        </a:lnSpc>
+                        <a:spcAft>
+                          <a:spcPts val="0"/>
+                        </a:spcAft>
+                        <a:defRPr sz="1200" b="0">
+                          <a:solidFill>
+                            <a:srgbClr val="21243A"/>
+                          </a:solidFill>
+                          <a:latin typeface="Arial"/>
+                        </a:defRPr>
+                      </a:pPr>
+                      <a:r>
+                        <a:t>assembled locally from the saved responses without further API calls.</a:t>
+                      </a:r>
+                    </a:p>
+                  </a:txBody>
+                  <a:tcPr marL="82296" marR="82296" marT="64008" marB="64008">
+                    <a:solidFill>
+                      <a:srgbClr val="F1F7F7"/>
+                    </a:solidFill>
+                  </a:tcPr>
+                </a:tc>
+              </a:tr>
+            </a:tbl>
+          </a:graphicData>
+        </a:graphic>
+      </p:graphicFrame>
+      <p:graphicFrame>
+        <p:nvGraphicFramePr>
+          <p:cNvPr id="16" name="Table 15"/>
+          <p:cNvGraphicFramePr>
+            <a:graphicFrameLocks noGrp="1"/>
+          </p:cNvGraphicFramePr>
+          <p:nvPr/>
+        </p:nvGraphicFramePr>
+        <p:xfrm>
+          <a:off x="365760" y="5049520"/>
+          <a:ext cx="8412479" cy="755904"/>
+        </p:xfrm>
+        <a:graphic>
+          <a:graphicData uri="http://schemas.openxmlformats.org/drawingml/2006/table">
+            <a:tbl>
+              <a:tblPr firstRow="1" bandRow="1">
+                <a:tableStyleId>{5C22544A-7EE6-4342-B048-85BDC9FD1C3A}</a:tableStyleId>
+              </a:tblPr>
+              <a:tblGrid>
+                <a:gridCol w="2271369"/>
+                <a:gridCol w="6141110"/>
+              </a:tblGrid>
+              <a:tr h="755904">
+                <a:tc>
+                  <a:txBody>
+                    <a:bodyPr wrap="none"/>
+                    <a:lstStyle/>
+                    <a:p>
+                      <a:pPr>
+                        <a:lnSpc>
+                          <a:spcPts val="1600"/>
+                        </a:lnSpc>
+                        <a:spcAft>
+                          <a:spcPts val="0"/>
+                        </a:spcAft>
+                        <a:defRPr sz="1200" b="0">
+                          <a:solidFill>
+                            <a:srgbClr val="21243A"/>
+                          </a:solidFill>
+                          <a:latin typeface="Arial"/>
+                        </a:defRPr>
+                      </a:pPr>
+                      <a:r>
+                        <a:t>Ingestion note 2</a:t>
+                      </a:r>
+                    </a:p>
+                  </a:txBody>
+                  <a:tcPr marL="82296" marR="82296" marT="64008" marB="64008">
+                    <a:solidFill>
+                      <a:srgbClr val="FFFFFF"/>
+                    </a:solidFill>
+                  </a:tcPr>
+                </a:tc>
+                <a:tc>
+                  <a:txBody>
+                    <a:bodyPr wrap="none"/>
+                    <a:lstStyle/>
+                    <a:p>
+                      <a:pPr>
+                        <a:lnSpc>
+                          <a:spcPts val="1600"/>
+                        </a:lnSpc>
+                        <a:spcAft>
+                          <a:spcPts val="0"/>
+                        </a:spcAft>
+                        <a:defRPr sz="1200" b="0">
+                          <a:solidFill>
+                            <a:srgbClr val="21243A"/>
+                          </a:solidFill>
+                          <a:latin typeface="Arial"/>
+                        </a:defRPr>
+                      </a:pPr>
+                      <a:r>
+                        <a:t>Provider latency values are restored from the acquisition receipts (maximum</a:t>
+                      </a:r>
+                    </a:p>
+                    <a:p>
+                      <a:pPr>
+                        <a:lnSpc>
+                          <a:spcPts val="1600"/>
+                        </a:lnSpc>
+                        <a:spcAft>
+                          <a:spcPts val="0"/>
+                        </a:spcAft>
+                        <a:defRPr sz="1200" b="0">
+                          <a:solidFill>
+                            <a:srgbClr val="21243A"/>
+                          </a:solidFill>
+                          <a:latin typeface="Arial"/>
+                        </a:defRPr>
+                      </a:pPr>
+                      <a:r>
+                        <a:t>sampled-frame latency per provider); raw replies and assessment results are</a:t>
+                      </a:r>
+                    </a:p>
+                    <a:p>
+                      <a:pPr>
+                        <a:lnSpc>
+                          <a:spcPts val="1600"/>
+                        </a:lnSpc>
+                        <a:spcAft>
+                          <a:spcPts val="0"/>
+                        </a:spcAft>
+                        <a:defRPr sz="1200" b="0">
+                          <a:solidFill>
+                            <a:srgbClr val="21243A"/>
+                          </a:solidFill>
+                          <a:latin typeface="Arial"/>
+                        </a:defRPr>
+                      </a:pPr>
+                      <a:r>
+                        <a:t>unchanged by this bookkeeping step.</a:t>
                       </a:r>
                     </a:p>
                   </a:txBody>
@@ -8542,7 +13071,7 @@
                         </a:defRPr>
                       </a:pPr>
                       <a:r>
-                        <a:t>Inconclusive</a:t>
+                        <a:t>Leaning synthetic</a:t>
                       </a:r>
                     </a:p>
                   </a:txBody>
@@ -8630,7 +13159,7 @@
                         </a:defRPr>
                       </a:pPr>
                       <a:r>
-                        <a:t>inconclusive</a:t>
+                        <a:t>synthetic likely</a:t>
                       </a:r>
                     </a:p>
                   </a:txBody>
@@ -8718,7 +13247,7 @@
                         </a:defRPr>
                       </a:pPr>
                       <a:r>
-                        <a:t>low</a:t>
+                        <a:t>medium</a:t>
                       </a:r>
                     </a:p>
                   </a:txBody>
@@ -8806,7 +13335,7 @@
                         </a:defRPr>
                       </a:pPr>
                       <a:r>
-                        <a:t>n/a</a:t>
+                        <a:t>68/100</a:t>
                       </a:r>
                     </a:p>
                   </a:txBody>
@@ -8894,7 +13423,7 @@
                         </a:defRPr>
                       </a:pPr>
                       <a:r>
-                        <a:t>no numeric score</a:t>
+                        <a:t>median of available model ratings; not a calibrated probability</a:t>
                       </a:r>
                     </a:p>
                   </a:txBody>
@@ -8982,7 +13511,7 @@
                         </a:defRPr>
                       </a:pPr>
                       <a:r>
-                        <a:t>No vision model returned a usable result. Check provider status in the table.</a:t>
+                        <a:t>2 models agree this is likely synthetic.</a:t>
                       </a:r>
                     </a:p>
                   </a:txBody>
@@ -9622,7 +14151,7 @@
                         </a:defRPr>
                       </a:pPr>
                       <a:r>
-                        <a:t>vision / disabled</a:t>
+                        <a:t>vision / ok</a:t>
                       </a:r>
                     </a:p>
                   </a:txBody>
@@ -9652,7 +14181,7 @@
                         </a:defRPr>
                       </a:pPr>
                       <a:r>
-                        <a:t>inconclusive</a:t>
+                        <a:t>synthetic likely</a:t>
                       </a:r>
                     </a:p>
                   </a:txBody>
@@ -9682,7 +14211,7 @@
                         </a:defRPr>
                       </a:pPr>
                       <a:r>
-                        <a:t>n/a</a:t>
+                        <a:t>80/100</a:t>
                       </a:r>
                     </a:p>
                   </a:txBody>
@@ -9772,7 +14301,7 @@
                         </a:defRPr>
                       </a:pPr>
                       <a:r>
-                        <a:t>vision / disabled</a:t>
+                        <a:t>vision / ok</a:t>
                       </a:r>
                     </a:p>
                   </a:txBody>
@@ -9832,7 +14361,7 @@
                         </a:defRPr>
                       </a:pPr>
                       <a:r>
-                        <a:t>n/a</a:t>
+                        <a:t>45/100</a:t>
                       </a:r>
                     </a:p>
                   </a:txBody>
@@ -9922,7 +14451,7 @@
                         </a:defRPr>
                       </a:pPr>
                       <a:r>
-                        <a:t>vision / disabled</a:t>
+                        <a:t>vision / ok</a:t>
                       </a:r>
                     </a:p>
                   </a:txBody>
@@ -9952,7 +14481,7 @@
                         </a:defRPr>
                       </a:pPr>
                       <a:r>
-                        <a:t>inconclusive</a:t>
+                        <a:t>synthetic likely</a:t>
                       </a:r>
                     </a:p>
                   </a:txBody>
@@ -9982,7 +14511,7 @@
                         </a:defRPr>
                       </a:pPr>
                       <a:r>
-                        <a:t>n/a</a:t>
+                        <a:t>68/100</a:t>
                       </a:r>
                     </a:p>
                   </a:txBody>
@@ -10732,7 +15261,7 @@
                         </a:defRPr>
                       </a:pPr>
                       <a:r>
-                        <a:t>Not recorded</a:t>
+                        <a:t>claude-opus-5-5</a:t>
                       </a:r>
                     </a:p>
                   </a:txBody>
@@ -10820,7 +15349,7 @@
                         </a:defRPr>
                       </a:pPr>
                       <a:r>
-                        <a:t>disabled</a:t>
+                        <a:t>ok</a:t>
                       </a:r>
                     </a:p>
                   </a:txBody>
@@ -10908,7 +15437,7 @@
                         </a:defRPr>
                       </a:pPr>
                       <a:r>
-                        <a:t>inconclusive</a:t>
+                        <a:t>synthetic likely</a:t>
                       </a:r>
                     </a:p>
                   </a:txBody>
@@ -10996,7 +15525,7 @@
                         </a:defRPr>
                       </a:pPr>
                       <a:r>
-                        <a:t>Not recorded</a:t>
+                        <a:t>medium</a:t>
                       </a:r>
                     </a:p>
                   </a:txBody>
@@ -11084,7 +15613,7 @@
                         </a:defRPr>
                       </a:pPr>
                       <a:r>
-                        <a:t>Not listed</a:t>
+                        <a:t>Supporting</a:t>
                       </a:r>
                     </a:p>
                   </a:txBody>
@@ -11109,7 +15638,7 @@
         </p:nvGraphicFramePr>
         <p:xfrm>
           <a:off x="365760" y="3797808"/>
-          <a:ext cx="8412479" cy="552704"/>
+          <a:ext cx="8412479" cy="1568704"/>
         </p:xfrm>
         <a:graphic>
           <a:graphicData uri="http://schemas.openxmlformats.org/drawingml/2006/table">
@@ -11121,7 +15650,7 @@
                 <a:gridCol w="2271369"/>
                 <a:gridCol w="6141110"/>
               </a:tblGrid>
-              <a:tr h="552704">
+              <a:tr h="1568704">
                 <a:tc>
                   <a:txBody>
                     <a:bodyPr wrap="none"/>
@@ -11172,26 +15701,121 @@
                         </a:defRPr>
                       </a:pPr>
                       <a:r>
-                        <a:t>LLM visual check not run for this example. This testing record contains local file</a:t>
-                      </a:r>
-                    </a:p>
-                    <a:p>
-                      <a:pPr>
-                        <a:lnSpc>
-                          <a:spcPts val="1600"/>
-                        </a:lnSpc>
-                        <a:spcAft>
-                          <a:spcPts val="0"/>
-                        </a:spcAft>
-                        <a:defRPr sz="1200" b="0">
-                          <a:solidFill>
-                            <a:srgbClr val="21243A"/>
-                          </a:solidFill>
-                          <a:latin typeface="Arial"/>
-                        </a:defRPr>
-                      </a:pPr>
-                      <a:r>
-                        <a:t>checks only.</a:t>
+                        <a:t>synthetic likelihood 80/100; tells: uniform soft airbrushed painterly shading across</a:t>
+                      </a:r>
+                    </a:p>
+                    <a:p>
+                      <a:pPr>
+                        <a:lnSpc>
+                          <a:spcPts val="1600"/>
+                        </a:lnSpc>
+                        <a:spcAft>
+                          <a:spcPts val="0"/>
+                        </a:spcAft>
+                        <a:defRPr sz="1200" b="0">
+                          <a:solidFill>
+                            <a:srgbClr val="21243A"/>
+                          </a:solidFill>
+                          <a:latin typeface="Arial"/>
+                        </a:defRPr>
+                      </a:pPr>
+                      <a:r>
+                        <a:t>all elements, typical of current image-generation models, whole composite</a:t>
+                      </a:r>
+                    </a:p>
+                    <a:p>
+                      <a:pPr>
+                        <a:lnSpc>
+                          <a:spcPts val="1600"/>
+                        </a:lnSpc>
+                        <a:spcAft>
+                          <a:spcPts val="0"/>
+                        </a:spcAft>
+                        <a:defRPr sz="1200" b="0">
+                          <a:solidFill>
+                            <a:srgbClr val="21243A"/>
+                          </a:solidFill>
+                          <a:latin typeface="Arial"/>
+                        </a:defRPr>
+                      </a:pPr>
+                      <a:r>
+                        <a:t>(portrait, anatomy, inset, icons, typography) rendered in one seamless style rather</a:t>
+                      </a:r>
+                    </a:p>
+                    <a:p>
+                      <a:pPr>
+                        <a:lnSpc>
+                          <a:spcPts val="1600"/>
+                        </a:lnSpc>
+                        <a:spcAft>
+                          <a:spcPts val="0"/>
+                        </a:spcAft>
+                        <a:defRPr sz="1200" b="0">
+                          <a:solidFill>
+                            <a:srgbClr val="21243A"/>
+                          </a:solidFill>
+                          <a:latin typeface="Arial"/>
+                        </a:defRPr>
+                      </a:pPr>
+                      <a:r>
+                        <a:t>than assembled from separate assets, anatomically loose vasculature: arteries</a:t>
+                      </a:r>
+                    </a:p>
+                    <a:p>
+                      <a:pPr>
+                        <a:lnSpc>
+                          <a:spcPts val="1600"/>
+                        </a:lnSpc>
+                        <a:spcAft>
+                          <a:spcPts val="0"/>
+                        </a:spcAft>
+                        <a:defRPr sz="1200" b="0">
+                          <a:solidFill>
+                            <a:srgbClr val="21243A"/>
+                          </a:solidFill>
+                          <a:latin typeface="Arial"/>
+                        </a:defRPr>
+                      </a:pPr>
+                      <a:r>
+                        <a:t>drawn over the brain surface and an idealized carotid path from neck to cortex,</a:t>
+                      </a:r>
+                    </a:p>
+                    <a:p>
+                      <a:pPr>
+                        <a:lnSpc>
+                          <a:spcPts val="1600"/>
+                        </a:lnSpc>
+                        <a:spcAft>
+                          <a:spcPts val="0"/>
+                        </a:spcAft>
+                        <a:defRPr sz="1200" b="0">
+                          <a:solidFill>
+                            <a:srgbClr val="21243A"/>
+                          </a:solidFill>
+                          <a:latin typeface="Arial"/>
+                        </a:defRPr>
+                      </a:pPr>
+                      <a:r>
+                        <a:t>generic glowing highlights (red cortical hotspot, yellow injection-site glow) used as</a:t>
+                      </a:r>
+                    </a:p>
+                    <a:p>
+                      <a:pPr>
+                        <a:lnSpc>
+                          <a:spcPts val="1600"/>
+                        </a:lnSpc>
+                        <a:spcAft>
+                          <a:spcPts val="0"/>
+                        </a:spcAft>
+                        <a:defRPr sz="1200" b="0">
+                          <a:solidFill>
+                            <a:srgbClr val="21243A"/>
+                          </a:solidFill>
+                          <a:latin typeface="Arial"/>
+                        </a:defRPr>
+                      </a:pPr>
+                      <a:r>
+                        <a:t>stylized emphasis</a:t>
                       </a:r>
                     </a:p>
                   </a:txBody>
@@ -11215,8 +15839,8 @@
           <p:nvPr/>
         </p:nvGraphicFramePr>
         <p:xfrm>
-          <a:off x="365760" y="4350512"/>
-          <a:ext cx="8412479" cy="349504"/>
+          <a:off x="365760" y="5366512"/>
+          <a:ext cx="8412479" cy="552704"/>
         </p:xfrm>
         <a:graphic>
           <a:graphicData uri="http://schemas.openxmlformats.org/drawingml/2006/table">
@@ -11228,7 +15852,7 @@
                 <a:gridCol w="2271369"/>
                 <a:gridCol w="6141110"/>
               </a:tblGrid>
-              <a:tr h="349504">
+              <a:tr h="552704">
                 <a:tc>
                   <a:txBody>
                     <a:bodyPr wrap="none"/>
@@ -11279,7 +15903,26 @@
                         </a:defRPr>
                       </a:pPr>
                       <a:r>
-                        <a:t>No request or image was sent to this provider for this record.</a:t>
+                        <a:t>Uniform soft airbrushed painterly shading across all elements, typical of current</a:t>
+                      </a:r>
+                    </a:p>
+                    <a:p>
+                      <a:pPr>
+                        <a:lnSpc>
+                          <a:spcPts val="1600"/>
+                        </a:lnSpc>
+                        <a:spcAft>
+                          <a:spcPts val="0"/>
+                        </a:spcAft>
+                        <a:defRPr sz="1200" b="0">
+                          <a:solidFill>
+                            <a:srgbClr val="21243A"/>
+                          </a:solidFill>
+                          <a:latin typeface="Arial"/>
+                        </a:defRPr>
+                      </a:pPr>
+                      <a:r>
+                        <a:t>image-generation models</a:t>
                       </a:r>
                     </a:p>
                   </a:txBody>
@@ -11391,7 +16034,7 @@
               </a:defRPr>
             </a:pPr>
             <a:r>
-              <a:t>Provider evidence / 2</a:t>
+              <a:t>Provider evidence / 1 (continued)</a:t>
             </a:r>
           </a:p>
         </p:txBody>
@@ -11578,7 +16221,7 @@
         </p:nvGraphicFramePr>
         <p:xfrm>
           <a:off x="365760" y="1700784"/>
-          <a:ext cx="8412479" cy="349504"/>
+          <a:ext cx="8412479" cy="552704"/>
         </p:xfrm>
         <a:graphic>
           <a:graphicData uri="http://schemas.openxmlformats.org/drawingml/2006/table">
@@ -11590,28 +16233,28 @@
                 <a:gridCol w="2271369"/>
                 <a:gridCol w="6141110"/>
               </a:tblGrid>
-              <a:tr h="349504">
-                <a:tc>
-                  <a:txBody>
-                    <a:bodyPr wrap="none"/>
-                    <a:lstStyle/>
-                    <a:p>
-                      <a:pPr>
-                        <a:lnSpc>
-                          <a:spcPts val="1600"/>
-                        </a:lnSpc>
-                        <a:spcAft>
-                          <a:spcPts val="0"/>
-                        </a:spcAft>
-                        <a:defRPr sz="1200" b="0">
-                          <a:solidFill>
-                            <a:srgbClr val="21243A"/>
-                          </a:solidFill>
-                          <a:latin typeface="Arial"/>
-                        </a:defRPr>
-                      </a:pPr>
-                      <a:r>
-                        <a:t>Provider</a:t>
+              <a:tr h="552704">
+                <a:tc>
+                  <a:txBody>
+                    <a:bodyPr wrap="none"/>
+                    <a:lstStyle/>
+                    <a:p>
+                      <a:pPr>
+                        <a:lnSpc>
+                          <a:spcPts val="1600"/>
+                        </a:lnSpc>
+                        <a:spcAft>
+                          <a:spcPts val="0"/>
+                        </a:spcAft>
+                        <a:defRPr sz="1200" b="0">
+                          <a:solidFill>
+                            <a:srgbClr val="21243A"/>
+                          </a:solidFill>
+                          <a:latin typeface="Arial"/>
+                        </a:defRPr>
+                      </a:pPr>
+                      <a:r>
+                        <a:t>Evidence 2</a:t>
                       </a:r>
                     </a:p>
                   </a:txBody>
@@ -11641,7 +16284,26 @@
                         </a:defRPr>
                       </a:pPr>
                       <a:r>
-                        <a:t>OpenAI Vision</a:t>
+                        <a:t>Whole composite (portrait, anatomy, inset, icons, typography) rendered in one</a:t>
+                      </a:r>
+                    </a:p>
+                    <a:p>
+                      <a:pPr>
+                        <a:lnSpc>
+                          <a:spcPts val="1600"/>
+                        </a:lnSpc>
+                        <a:spcAft>
+                          <a:spcPts val="0"/>
+                        </a:spcAft>
+                        <a:defRPr sz="1200" b="0">
+                          <a:solidFill>
+                            <a:srgbClr val="21243A"/>
+                          </a:solidFill>
+                          <a:latin typeface="Arial"/>
+                        </a:defRPr>
+                      </a:pPr>
+                      <a:r>
+                        <a:t>seamless style rather than assembled from separate assets</a:t>
                       </a:r>
                     </a:p>
                   </a:txBody>
@@ -11665,8 +16327,8 @@
           <p:nvPr/>
         </p:nvGraphicFramePr>
         <p:xfrm>
-          <a:off x="365760" y="2050288"/>
-          <a:ext cx="8412479" cy="349504"/>
+          <a:off x="365760" y="2253488"/>
+          <a:ext cx="8412479" cy="552704"/>
         </p:xfrm>
         <a:graphic>
           <a:graphicData uri="http://schemas.openxmlformats.org/drawingml/2006/table">
@@ -11678,28 +16340,28 @@
                 <a:gridCol w="2271369"/>
                 <a:gridCol w="6141110"/>
               </a:tblGrid>
-              <a:tr h="349504">
-                <a:tc>
-                  <a:txBody>
-                    <a:bodyPr wrap="none"/>
-                    <a:lstStyle/>
-                    <a:p>
-                      <a:pPr>
-                        <a:lnSpc>
-                          <a:spcPts val="1600"/>
-                        </a:lnSpc>
-                        <a:spcAft>
-                          <a:spcPts val="0"/>
-                        </a:spcAft>
-                        <a:defRPr sz="1200" b="0">
-                          <a:solidFill>
-                            <a:srgbClr val="21243A"/>
-                          </a:solidFill>
-                          <a:latin typeface="Arial"/>
-                        </a:defRPr>
-                      </a:pPr>
-                      <a:r>
-                        <a:t>Model</a:t>
+              <a:tr h="552704">
+                <a:tc>
+                  <a:txBody>
+                    <a:bodyPr wrap="none"/>
+                    <a:lstStyle/>
+                    <a:p>
+                      <a:pPr>
+                        <a:lnSpc>
+                          <a:spcPts val="1600"/>
+                        </a:lnSpc>
+                        <a:spcAft>
+                          <a:spcPts val="0"/>
+                        </a:spcAft>
+                        <a:defRPr sz="1200" b="0">
+                          <a:solidFill>
+                            <a:srgbClr val="21243A"/>
+                          </a:solidFill>
+                          <a:latin typeface="Arial"/>
+                        </a:defRPr>
+                      </a:pPr>
+                      <a:r>
+                        <a:t>Evidence 3</a:t>
                       </a:r>
                     </a:p>
                   </a:txBody>
@@ -11729,7 +16391,26 @@
                         </a:defRPr>
                       </a:pPr>
                       <a:r>
-                        <a:t>Not recorded</a:t>
+                        <a:t>Anatomically loose vasculature: arteries drawn over the brain surface and an</a:t>
+                      </a:r>
+                    </a:p>
+                    <a:p>
+                      <a:pPr>
+                        <a:lnSpc>
+                          <a:spcPts val="1600"/>
+                        </a:lnSpc>
+                        <a:spcAft>
+                          <a:spcPts val="0"/>
+                        </a:spcAft>
+                        <a:defRPr sz="1200" b="0">
+                          <a:solidFill>
+                            <a:srgbClr val="21243A"/>
+                          </a:solidFill>
+                          <a:latin typeface="Arial"/>
+                        </a:defRPr>
+                      </a:pPr>
+                      <a:r>
+                        <a:t>idealized carotid path from neck to cortex</a:t>
                       </a:r>
                     </a:p>
                   </a:txBody>
@@ -11753,8 +16434,8 @@
           <p:nvPr/>
         </p:nvGraphicFramePr>
         <p:xfrm>
-          <a:off x="365760" y="2399792"/>
-          <a:ext cx="8412479" cy="349504"/>
+          <a:off x="365760" y="2806192"/>
+          <a:ext cx="8412479" cy="552704"/>
         </p:xfrm>
         <a:graphic>
           <a:graphicData uri="http://schemas.openxmlformats.org/drawingml/2006/table">
@@ -11766,28 +16447,28 @@
                 <a:gridCol w="2271369"/>
                 <a:gridCol w="6141110"/>
               </a:tblGrid>
-              <a:tr h="349504">
-                <a:tc>
-                  <a:txBody>
-                    <a:bodyPr wrap="none"/>
-                    <a:lstStyle/>
-                    <a:p>
-                      <a:pPr>
-                        <a:lnSpc>
-                          <a:spcPts val="1600"/>
-                        </a:lnSpc>
-                        <a:spcAft>
-                          <a:spcPts val="0"/>
-                        </a:spcAft>
-                        <a:defRPr sz="1200" b="0">
-                          <a:solidFill>
-                            <a:srgbClr val="21243A"/>
-                          </a:solidFill>
-                          <a:latin typeface="Arial"/>
-                        </a:defRPr>
-                      </a:pPr>
-                      <a:r>
-                        <a:t>Status</a:t>
+              <a:tr h="552704">
+                <a:tc>
+                  <a:txBody>
+                    <a:bodyPr wrap="none"/>
+                    <a:lstStyle/>
+                    <a:p>
+                      <a:pPr>
+                        <a:lnSpc>
+                          <a:spcPts val="1600"/>
+                        </a:lnSpc>
+                        <a:spcAft>
+                          <a:spcPts val="0"/>
+                        </a:spcAft>
+                        <a:defRPr sz="1200" b="0">
+                          <a:solidFill>
+                            <a:srgbClr val="21243A"/>
+                          </a:solidFill>
+                          <a:latin typeface="Arial"/>
+                        </a:defRPr>
+                      </a:pPr>
+                      <a:r>
+                        <a:t>Evidence 4</a:t>
                       </a:r>
                     </a:p>
                   </a:txBody>
@@ -11817,7 +16498,26 @@
                         </a:defRPr>
                       </a:pPr>
                       <a:r>
-                        <a:t>disabled</a:t>
+                        <a:t>Generic glowing highlights (red cortical hotspot, yellow injection-site glow) used</a:t>
+                      </a:r>
+                    </a:p>
+                    <a:p>
+                      <a:pPr>
+                        <a:lnSpc>
+                          <a:spcPts val="1600"/>
+                        </a:lnSpc>
+                        <a:spcAft>
+                          <a:spcPts val="0"/>
+                        </a:spcAft>
+                        <a:defRPr sz="1200" b="0">
+                          <a:solidFill>
+                            <a:srgbClr val="21243A"/>
+                          </a:solidFill>
+                          <a:latin typeface="Arial"/>
+                        </a:defRPr>
+                      </a:pPr>
+                      <a:r>
+                        <a:t>as stylized emphasis</a:t>
                       </a:r>
                     </a:p>
                   </a:txBody>
@@ -11841,8 +16541,8 @@
           <p:nvPr/>
         </p:nvGraphicFramePr>
         <p:xfrm>
-          <a:off x="365760" y="2749296"/>
-          <a:ext cx="8412479" cy="349504"/>
+          <a:off x="365760" y="3358896"/>
+          <a:ext cx="8412479" cy="552704"/>
         </p:xfrm>
         <a:graphic>
           <a:graphicData uri="http://schemas.openxmlformats.org/drawingml/2006/table">
@@ -11854,28 +16554,28 @@
                 <a:gridCol w="2271369"/>
                 <a:gridCol w="6141110"/>
               </a:tblGrid>
-              <a:tr h="349504">
-                <a:tc>
-                  <a:txBody>
-                    <a:bodyPr wrap="none"/>
-                    <a:lstStyle/>
-                    <a:p>
-                      <a:pPr>
-                        <a:lnSpc>
-                          <a:spcPts val="1600"/>
-                        </a:lnSpc>
-                        <a:spcAft>
-                          <a:spcPts val="0"/>
-                        </a:spcAft>
-                        <a:defRPr sz="1200" b="0">
-                          <a:solidFill>
-                            <a:srgbClr val="21243A"/>
-                          </a:solidFill>
-                          <a:latin typeface="Arial"/>
-                        </a:defRPr>
-                      </a:pPr>
-                      <a:r>
-                        <a:t>Assessment</a:t>
+              <a:tr h="552704">
+                <a:tc>
+                  <a:txBody>
+                    <a:bodyPr wrap="none"/>
+                    <a:lstStyle/>
+                    <a:p>
+                      <a:pPr>
+                        <a:lnSpc>
+                          <a:spcPts val="1600"/>
+                        </a:lnSpc>
+                        <a:spcAft>
+                          <a:spcPts val="0"/>
+                        </a:spcAft>
+                        <a:defRPr sz="1200" b="0">
+                          <a:solidFill>
+                            <a:srgbClr val="21243A"/>
+                          </a:solidFill>
+                          <a:latin typeface="Arial"/>
+                        </a:defRPr>
+                      </a:pPr>
+                      <a:r>
+                        <a:t>Evidence 5</a:t>
                       </a:r>
                     </a:p>
                   </a:txBody>
@@ -11905,7 +16605,26 @@
                         </a:defRPr>
                       </a:pPr>
                       <a:r>
-                        <a:t>inconclusive</a:t>
+                        <a:t>Repetitive near-identical lipid-nanoparticle and red blood cell motifs with slight</a:t>
+                      </a:r>
+                    </a:p>
+                    <a:p>
+                      <a:pPr>
+                        <a:lnSpc>
+                          <a:spcPts val="1600"/>
+                        </a:lnSpc>
+                        <a:spcAft>
+                          <a:spcPts val="0"/>
+                        </a:spcAft>
+                        <a:defRPr sz="1200" b="0">
+                          <a:solidFill>
+                            <a:srgbClr val="21243A"/>
+                          </a:solidFill>
+                          <a:latin typeface="Arial"/>
+                        </a:defRPr>
+                      </a:pPr>
+                      <a:r>
+                        <a:t>random variation</a:t>
                       </a:r>
                     </a:p>
                   </a:txBody>
@@ -11929,8 +16648,8 @@
           <p:nvPr/>
         </p:nvGraphicFramePr>
         <p:xfrm>
-          <a:off x="365760" y="3098800"/>
-          <a:ext cx="8412479" cy="349504"/>
+          <a:off x="365760" y="3911600"/>
+          <a:ext cx="8412479" cy="552704"/>
         </p:xfrm>
         <a:graphic>
           <a:graphicData uri="http://schemas.openxmlformats.org/drawingml/2006/table">
@@ -11942,28 +16661,28 @@
                 <a:gridCol w="2271369"/>
                 <a:gridCol w="6141110"/>
               </a:tblGrid>
-              <a:tr h="349504">
-                <a:tc>
-                  <a:txBody>
-                    <a:bodyPr wrap="none"/>
-                    <a:lstStyle/>
-                    <a:p>
-                      <a:pPr>
-                        <a:lnSpc>
-                          <a:spcPts val="1600"/>
-                        </a:lnSpc>
-                        <a:spcAft>
-                          <a:spcPts val="0"/>
-                        </a:spcAft>
-                        <a:defRPr sz="1200" b="0">
-                          <a:solidFill>
-                            <a:srgbClr val="21243A"/>
-                          </a:solidFill>
-                          <a:latin typeface="Arial"/>
-                        </a:defRPr>
-                      </a:pPr>
-                      <a:r>
-                        <a:t>Confidence</a:t>
+              <a:tr h="552704">
+                <a:tc>
+                  <a:txBody>
+                    <a:bodyPr wrap="none"/>
+                    <a:lstStyle/>
+                    <a:p>
+                      <a:pPr>
+                        <a:lnSpc>
+                          <a:spcPts val="1600"/>
+                        </a:lnSpc>
+                        <a:spcAft>
+                          <a:spcPts val="0"/>
+                        </a:spcAft>
+                        <a:defRPr sz="1200" b="0">
+                          <a:solidFill>
+                            <a:srgbClr val="21243A"/>
+                          </a:solidFill>
+                          <a:latin typeface="Arial"/>
+                        </a:defRPr>
+                      </a:pPr>
+                      <a:r>
+                        <a:t>Evidence 6</a:t>
                       </a:r>
                     </a:p>
                   </a:txBody>
@@ -11993,7 +16712,26 @@
                         </a:defRPr>
                       </a:pPr>
                       <a:r>
-                        <a:t>Not recorded</a:t>
+                        <a:t>Clean but slightly generic serif typography and masthead ('Biomedical Signals'),</a:t>
+                      </a:r>
+                    </a:p>
+                    <a:p>
+                      <a:pPr>
+                        <a:lnSpc>
+                          <a:spcPts val="1600"/>
+                        </a:lnSpc>
+                        <a:spcAft>
+                          <a:spcPts val="0"/>
+                        </a:spcAft>
+                        <a:defRPr sz="1200" b="0">
+                          <a:solidFill>
+                            <a:srgbClr val="21243A"/>
+                          </a:solidFill>
+                          <a:latin typeface="Arial"/>
+                        </a:defRPr>
+                      </a:pPr>
+                      <a:r>
+                        <a:t>consistent with high-fidelity text rendering in recent generators</a:t>
                       </a:r>
                     </a:p>
                   </a:txBody>
@@ -12017,8 +16755,8 @@
           <p:nvPr/>
         </p:nvGraphicFramePr>
         <p:xfrm>
-          <a:off x="365760" y="3448304"/>
-          <a:ext cx="8412479" cy="349504"/>
+          <a:off x="365760" y="4464304"/>
+          <a:ext cx="8412479" cy="552704"/>
         </p:xfrm>
         <a:graphic>
           <a:graphicData uri="http://schemas.openxmlformats.org/drawingml/2006/table">
@@ -12030,28 +16768,28 @@
                 <a:gridCol w="2271369"/>
                 <a:gridCol w="6141110"/>
               </a:tblGrid>
-              <a:tr h="349504">
-                <a:tc>
-                  <a:txBody>
-                    <a:bodyPr wrap="none"/>
-                    <a:lstStyle/>
-                    <a:p>
-                      <a:pPr>
-                        <a:lnSpc>
-                          <a:spcPts val="1600"/>
-                        </a:lnSpc>
-                        <a:spcAft>
-                          <a:spcPts val="0"/>
-                        </a:spcAft>
-                        <a:defRPr sz="1200" b="0">
-                          <a:solidFill>
-                            <a:srgbClr val="21243A"/>
-                          </a:solidFill>
-                          <a:latin typeface="Arial"/>
-                        </a:defRPr>
-                      </a:pPr>
-                      <a:r>
-                        <a:t>Role in assessment</a:t>
+              <a:tr h="552704">
+                <a:tc>
+                  <a:txBody>
+                    <a:bodyPr wrap="none"/>
+                    <a:lstStyle/>
+                    <a:p>
+                      <a:pPr>
+                        <a:lnSpc>
+                          <a:spcPts val="1600"/>
+                        </a:lnSpc>
+                        <a:spcAft>
+                          <a:spcPts val="0"/>
+                        </a:spcAft>
+                        <a:defRPr sz="1200" b="0">
+                          <a:solidFill>
+                            <a:srgbClr val="21243A"/>
+                          </a:solidFill>
+                          <a:latin typeface="Arial"/>
+                        </a:defRPr>
+                      </a:pPr>
+                      <a:r>
+                        <a:t>Evidence 7</a:t>
                       </a:r>
                     </a:p>
                   </a:txBody>
@@ -12081,7 +16819,26 @@
                         </a:defRPr>
                       </a:pPr>
                       <a:r>
-                        <a:t>Not listed</a:t>
+                        <a:t>No camera-origin signals (no sensor noise, lens blur, or optical depth of field);</a:t>
+                      </a:r>
+                    </a:p>
+                    <a:p>
+                      <a:pPr>
+                        <a:lnSpc>
+                          <a:spcPts val="1600"/>
+                        </a:lnSpc>
+                        <a:spcAft>
+                          <a:spcPts val="0"/>
+                        </a:spcAft>
+                        <a:defRPr sz="1200" b="0">
+                          <a:solidFill>
+                            <a:srgbClr val="21243A"/>
+                          </a:solidFill>
+                          <a:latin typeface="Arial"/>
+                        </a:defRPr>
+                      </a:pPr>
+                      <a:r>
+                        <a:t>content is digital illustration throughout</a:t>
                       </a:r>
                     </a:p>
                   </a:txBody>
@@ -12105,7 +16862,7 @@
           <p:nvPr/>
         </p:nvGraphicFramePr>
         <p:xfrm>
-          <a:off x="365760" y="3797808"/>
+          <a:off x="365760" y="5017008"/>
           <a:ext cx="8412479" cy="552704"/>
         </p:xfrm>
         <a:graphic>
@@ -12139,7 +16896,7 @@
                         </a:defRPr>
                       </a:pPr>
                       <a:r>
-                        <a:t>Provider summary</a:t>
+                        <a:t>Evidence 8</a:t>
                       </a:r>
                     </a:p>
                   </a:txBody>
@@ -12169,120 +16926,32 @@
                         </a:defRPr>
                       </a:pPr>
                       <a:r>
-                        <a:t>LLM visual check not run for this example. This testing record contains local file</a:t>
-                      </a:r>
-                    </a:p>
-                    <a:p>
-                      <a:pPr>
-                        <a:lnSpc>
-                          <a:spcPts val="1600"/>
-                        </a:lnSpc>
-                        <a:spcAft>
-                          <a:spcPts val="0"/>
-                        </a:spcAft>
-                        <a:defRPr sz="1200" b="0">
-                          <a:solidFill>
-                            <a:srgbClr val="21243A"/>
-                          </a:solidFill>
-                          <a:latin typeface="Arial"/>
-                        </a:defRPr>
-                      </a:pPr>
-                      <a:r>
-                        <a:t>checks only.</a:t>
+                        <a:t>Gloved hand and syringe are plausible but smoothly idealized, with simplified</a:t>
+                      </a:r>
+                    </a:p>
+                    <a:p>
+                      <a:pPr>
+                        <a:lnSpc>
+                          <a:spcPts val="1600"/>
+                        </a:lnSpc>
+                        <a:spcAft>
+                          <a:spcPts val="0"/>
+                        </a:spcAft>
+                        <a:defRPr sz="1200" b="0">
+                          <a:solidFill>
+                            <a:srgbClr val="21243A"/>
+                          </a:solidFill>
+                          <a:latin typeface="Arial"/>
+                        </a:defRPr>
+                      </a:pPr>
+                      <a:r>
+                        <a:t>plunger and needle detail</a:t>
                       </a:r>
                     </a:p>
                   </a:txBody>
                   <a:tcPr marL="82296" marR="82296" marT="64008" marB="64008">
                     <a:solidFill>
                       <a:srgbClr val="F1F7F7"/>
-                    </a:solidFill>
-                  </a:tcPr>
-                </a:tc>
-              </a:tr>
-            </a:tbl>
-          </a:graphicData>
-        </a:graphic>
-      </p:graphicFrame>
-      <p:graphicFrame>
-        <p:nvGraphicFramePr>
-          <p:cNvPr id="14" name="Table 13"/>
-          <p:cNvGraphicFramePr>
-            <a:graphicFrameLocks noGrp="1"/>
-          </p:cNvGraphicFramePr>
-          <p:nvPr/>
-        </p:nvGraphicFramePr>
-        <p:xfrm>
-          <a:off x="365760" y="4350512"/>
-          <a:ext cx="8412479" cy="349504"/>
-        </p:xfrm>
-        <a:graphic>
-          <a:graphicData uri="http://schemas.openxmlformats.org/drawingml/2006/table">
-            <a:tbl>
-              <a:tblPr firstRow="1" bandRow="1">
-                <a:tableStyleId>{5C22544A-7EE6-4342-B048-85BDC9FD1C3A}</a:tableStyleId>
-              </a:tblPr>
-              <a:tblGrid>
-                <a:gridCol w="2271369"/>
-                <a:gridCol w="6141110"/>
-              </a:tblGrid>
-              <a:tr h="349504">
-                <a:tc>
-                  <a:txBody>
-                    <a:bodyPr wrap="none"/>
-                    <a:lstStyle/>
-                    <a:p>
-                      <a:pPr>
-                        <a:lnSpc>
-                          <a:spcPts val="1600"/>
-                        </a:lnSpc>
-                        <a:spcAft>
-                          <a:spcPts val="0"/>
-                        </a:spcAft>
-                        <a:defRPr sz="1200" b="0">
-                          <a:solidFill>
-                            <a:srgbClr val="21243A"/>
-                          </a:solidFill>
-                          <a:latin typeface="Arial"/>
-                        </a:defRPr>
-                      </a:pPr>
-                      <a:r>
-                        <a:t>Evidence 1</a:t>
-                      </a:r>
-                    </a:p>
-                  </a:txBody>
-                  <a:tcPr marL="82296" marR="82296" marT="64008" marB="64008">
-                    <a:solidFill>
-                      <a:srgbClr val="FFFFFF"/>
-                    </a:solidFill>
-                  </a:tcPr>
-                </a:tc>
-                <a:tc>
-                  <a:txBody>
-                    <a:bodyPr wrap="none"/>
-                    <a:lstStyle/>
-                    <a:p>
-                      <a:pPr>
-                        <a:lnSpc>
-                          <a:spcPts val="1600"/>
-                        </a:lnSpc>
-                        <a:spcAft>
-                          <a:spcPts val="0"/>
-                        </a:spcAft>
-                        <a:defRPr sz="1200" b="0">
-                          <a:solidFill>
-                            <a:srgbClr val="21243A"/>
-                          </a:solidFill>
-                          <a:latin typeface="Arial"/>
-                        </a:defRPr>
-                      </a:pPr>
-                      <a:r>
-                        <a:t>No request or image was sent to this provider for this record.</a:t>
-                      </a:r>
-                    </a:p>
-                  </a:txBody>
-                  <a:tcPr marL="82296" marR="82296" marT="64008" marB="64008">
-                    <a:solidFill>
-                      <a:srgbClr val="FFFFFF"/>
                     </a:solidFill>
                   </a:tcPr>
                 </a:tc>
@@ -12388,7 +17057,7 @@
               </a:defRPr>
             </a:pPr>
             <a:r>
-              <a:t>Provider evidence / 3</a:t>
+              <a:t>Provider evidence / 1 (continued)</a:t>
             </a:r>
           </a:p>
         </p:txBody>
@@ -12575,7 +17244,7 @@
         </p:nvGraphicFramePr>
         <p:xfrm>
           <a:off x="365760" y="1700784"/>
-          <a:ext cx="8412479" cy="349504"/>
+          <a:ext cx="8412479" cy="959103"/>
         </p:xfrm>
         <a:graphic>
           <a:graphicData uri="http://schemas.openxmlformats.org/drawingml/2006/table">
@@ -12587,116 +17256,28 @@
                 <a:gridCol w="2271369"/>
                 <a:gridCol w="6141110"/>
               </a:tblGrid>
-              <a:tr h="349504">
-                <a:tc>
-                  <a:txBody>
-                    <a:bodyPr wrap="none"/>
-                    <a:lstStyle/>
-                    <a:p>
-                      <a:pPr>
-                        <a:lnSpc>
-                          <a:spcPts val="1600"/>
-                        </a:lnSpc>
-                        <a:spcAft>
-                          <a:spcPts val="0"/>
-                        </a:spcAft>
-                        <a:defRPr sz="1200" b="0">
-                          <a:solidFill>
-                            <a:srgbClr val="21243A"/>
-                          </a:solidFill>
-                          <a:latin typeface="Arial"/>
-                        </a:defRPr>
-                      </a:pPr>
-                      <a:r>
-                        <a:t>Provider</a:t>
-                      </a:r>
-                    </a:p>
-                  </a:txBody>
-                  <a:tcPr marL="82296" marR="82296" marT="64008" marB="64008">
-                    <a:solidFill>
-                      <a:srgbClr val="F1F7F7"/>
-                    </a:solidFill>
-                  </a:tcPr>
-                </a:tc>
-                <a:tc>
-                  <a:txBody>
-                    <a:bodyPr wrap="none"/>
-                    <a:lstStyle/>
-                    <a:p>
-                      <a:pPr>
-                        <a:lnSpc>
-                          <a:spcPts val="1600"/>
-                        </a:lnSpc>
-                        <a:spcAft>
-                          <a:spcPts val="0"/>
-                        </a:spcAft>
-                        <a:defRPr sz="1200" b="0">
-                          <a:solidFill>
-                            <a:srgbClr val="21243A"/>
-                          </a:solidFill>
-                          <a:latin typeface="Arial"/>
-                        </a:defRPr>
-                      </a:pPr>
-                      <a:r>
-                        <a:t>Gemini Vision</a:t>
-                      </a:r>
-                    </a:p>
-                  </a:txBody>
-                  <a:tcPr marL="82296" marR="82296" marT="64008" marB="64008">
-                    <a:solidFill>
-                      <a:srgbClr val="F1F7F7"/>
-                    </a:solidFill>
-                  </a:tcPr>
-                </a:tc>
-              </a:tr>
-            </a:tbl>
-          </a:graphicData>
-        </a:graphic>
-      </p:graphicFrame>
-      <p:graphicFrame>
-        <p:nvGraphicFramePr>
-          <p:cNvPr id="8" name="Table 7"/>
-          <p:cNvGraphicFramePr>
-            <a:graphicFrameLocks noGrp="1"/>
-          </p:cNvGraphicFramePr>
-          <p:nvPr/>
-        </p:nvGraphicFramePr>
-        <p:xfrm>
-          <a:off x="365760" y="2050288"/>
-          <a:ext cx="8412479" cy="349504"/>
-        </p:xfrm>
-        <a:graphic>
-          <a:graphicData uri="http://schemas.openxmlformats.org/drawingml/2006/table">
-            <a:tbl>
-              <a:tblPr firstRow="1" bandRow="1">
-                <a:tableStyleId>{5C22544A-7EE6-4342-B048-85BDC9FD1C3A}</a:tableStyleId>
-              </a:tblPr>
-              <a:tblGrid>
-                <a:gridCol w="2271369"/>
-                <a:gridCol w="6141110"/>
-              </a:tblGrid>
-              <a:tr h="349504">
-                <a:tc>
-                  <a:txBody>
-                    <a:bodyPr wrap="none"/>
-                    <a:lstStyle/>
-                    <a:p>
-                      <a:pPr>
-                        <a:lnSpc>
-                          <a:spcPts val="1600"/>
-                        </a:lnSpc>
-                        <a:spcAft>
-                          <a:spcPts val="0"/>
-                        </a:spcAft>
-                        <a:defRPr sz="1200" b="0">
-                          <a:solidFill>
-                            <a:srgbClr val="21243A"/>
-                          </a:solidFill>
-                          <a:latin typeface="Arial"/>
-                        </a:defRPr>
-                      </a:pPr>
-                      <a:r>
-                        <a:t>Model</a:t>
+              <a:tr h="959103">
+                <a:tc>
+                  <a:txBody>
+                    <a:bodyPr wrap="none"/>
+                    <a:lstStyle/>
+                    <a:p>
+                      <a:pPr>
+                        <a:lnSpc>
+                          <a:spcPts val="1600"/>
+                        </a:lnSpc>
+                        <a:spcAft>
+                          <a:spcPts val="0"/>
+                        </a:spcAft>
+                        <a:defRPr sz="1200" b="0">
+                          <a:solidFill>
+                            <a:srgbClr val="21243A"/>
+                          </a:solidFill>
+                          <a:latin typeface="Arial"/>
+                        </a:defRPr>
+                      </a:pPr>
+                      <a:r>
+                        <a:t>Evidence 9</a:t>
                       </a:r>
                     </a:p>
                   </a:txBody>
@@ -12726,554 +17307,64 @@
                         </a:defRPr>
                       </a:pPr>
                       <a:r>
-                        <a:t>Not recorded</a:t>
-                      </a:r>
-                    </a:p>
-                  </a:txBody>
-                  <a:tcPr marL="82296" marR="82296" marT="64008" marB="64008">
-                    <a:solidFill>
-                      <a:srgbClr val="FFFFFF"/>
-                    </a:solidFill>
-                  </a:tcPr>
-                </a:tc>
-              </a:tr>
-            </a:tbl>
-          </a:graphicData>
-        </a:graphic>
-      </p:graphicFrame>
-      <p:graphicFrame>
-        <p:nvGraphicFramePr>
-          <p:cNvPr id="9" name="Table 8"/>
-          <p:cNvGraphicFramePr>
-            <a:graphicFrameLocks noGrp="1"/>
-          </p:cNvGraphicFramePr>
-          <p:nvPr/>
-        </p:nvGraphicFramePr>
-        <p:xfrm>
-          <a:off x="365760" y="2399792"/>
-          <a:ext cx="8412479" cy="349504"/>
-        </p:xfrm>
-        <a:graphic>
-          <a:graphicData uri="http://schemas.openxmlformats.org/drawingml/2006/table">
-            <a:tbl>
-              <a:tblPr firstRow="1" bandRow="1">
-                <a:tableStyleId>{5C22544A-7EE6-4342-B048-85BDC9FD1C3A}</a:tableStyleId>
-              </a:tblPr>
-              <a:tblGrid>
-                <a:gridCol w="2271369"/>
-                <a:gridCol w="6141110"/>
-              </a:tblGrid>
-              <a:tr h="349504">
-                <a:tc>
-                  <a:txBody>
-                    <a:bodyPr wrap="none"/>
-                    <a:lstStyle/>
-                    <a:p>
-                      <a:pPr>
-                        <a:lnSpc>
-                          <a:spcPts val="1600"/>
-                        </a:lnSpc>
-                        <a:spcAft>
-                          <a:spcPts val="0"/>
-                        </a:spcAft>
-                        <a:defRPr sz="1200" b="0">
-                          <a:solidFill>
-                            <a:srgbClr val="21243A"/>
-                          </a:solidFill>
-                          <a:latin typeface="Arial"/>
-                        </a:defRPr>
-                      </a:pPr>
-                      <a:r>
-                        <a:t>Status</a:t>
-                      </a:r>
-                    </a:p>
-                  </a:txBody>
-                  <a:tcPr marL="82296" marR="82296" marT="64008" marB="64008">
-                    <a:solidFill>
-                      <a:srgbClr val="F1F7F7"/>
-                    </a:solidFill>
-                  </a:tcPr>
-                </a:tc>
-                <a:tc>
-                  <a:txBody>
-                    <a:bodyPr wrap="none"/>
-                    <a:lstStyle/>
-                    <a:p>
-                      <a:pPr>
-                        <a:lnSpc>
-                          <a:spcPts val="1600"/>
-                        </a:lnSpc>
-                        <a:spcAft>
-                          <a:spcPts val="0"/>
-                        </a:spcAft>
-                        <a:defRPr sz="1200" b="0">
-                          <a:solidFill>
-                            <a:srgbClr val="21243A"/>
-                          </a:solidFill>
-                          <a:latin typeface="Arial"/>
-                        </a:defRPr>
-                      </a:pPr>
-                      <a:r>
-                        <a:t>disabled</a:t>
-                      </a:r>
-                    </a:p>
-                  </a:txBody>
-                  <a:tcPr marL="82296" marR="82296" marT="64008" marB="64008">
-                    <a:solidFill>
-                      <a:srgbClr val="F1F7F7"/>
-                    </a:solidFill>
-                  </a:tcPr>
-                </a:tc>
-              </a:tr>
-            </a:tbl>
-          </a:graphicData>
-        </a:graphic>
-      </p:graphicFrame>
-      <p:graphicFrame>
-        <p:nvGraphicFramePr>
-          <p:cNvPr id="10" name="Table 9"/>
-          <p:cNvGraphicFramePr>
-            <a:graphicFrameLocks noGrp="1"/>
-          </p:cNvGraphicFramePr>
-          <p:nvPr/>
-        </p:nvGraphicFramePr>
-        <p:xfrm>
-          <a:off x="365760" y="2749296"/>
-          <a:ext cx="8412479" cy="349504"/>
-        </p:xfrm>
-        <a:graphic>
-          <a:graphicData uri="http://schemas.openxmlformats.org/drawingml/2006/table">
-            <a:tbl>
-              <a:tblPr firstRow="1" bandRow="1">
-                <a:tableStyleId>{5C22544A-7EE6-4342-B048-85BDC9FD1C3A}</a:tableStyleId>
-              </a:tblPr>
-              <a:tblGrid>
-                <a:gridCol w="2271369"/>
-                <a:gridCol w="6141110"/>
-              </a:tblGrid>
-              <a:tr h="349504">
-                <a:tc>
-                  <a:txBody>
-                    <a:bodyPr wrap="none"/>
-                    <a:lstStyle/>
-                    <a:p>
-                      <a:pPr>
-                        <a:lnSpc>
-                          <a:spcPts val="1600"/>
-                        </a:lnSpc>
-                        <a:spcAft>
-                          <a:spcPts val="0"/>
-                        </a:spcAft>
-                        <a:defRPr sz="1200" b="0">
-                          <a:solidFill>
-                            <a:srgbClr val="21243A"/>
-                          </a:solidFill>
-                          <a:latin typeface="Arial"/>
-                        </a:defRPr>
-                      </a:pPr>
-                      <a:r>
-                        <a:t>Assessment</a:t>
-                      </a:r>
-                    </a:p>
-                  </a:txBody>
-                  <a:tcPr marL="82296" marR="82296" marT="64008" marB="64008">
-                    <a:solidFill>
-                      <a:srgbClr val="FFFFFF"/>
-                    </a:solidFill>
-                  </a:tcPr>
-                </a:tc>
-                <a:tc>
-                  <a:txBody>
-                    <a:bodyPr wrap="none"/>
-                    <a:lstStyle/>
-                    <a:p>
-                      <a:pPr>
-                        <a:lnSpc>
-                          <a:spcPts val="1600"/>
-                        </a:lnSpc>
-                        <a:spcAft>
-                          <a:spcPts val="0"/>
-                        </a:spcAft>
-                        <a:defRPr sz="1200" b="0">
-                          <a:solidFill>
-                            <a:srgbClr val="21243A"/>
-                          </a:solidFill>
-                          <a:latin typeface="Arial"/>
-                        </a:defRPr>
-                      </a:pPr>
-                      <a:r>
-                        <a:t>inconclusive</a:t>
-                      </a:r>
-                    </a:p>
-                  </a:txBody>
-                  <a:tcPr marL="82296" marR="82296" marT="64008" marB="64008">
-                    <a:solidFill>
-                      <a:srgbClr val="FFFFFF"/>
-                    </a:solidFill>
-                  </a:tcPr>
-                </a:tc>
-              </a:tr>
-            </a:tbl>
-          </a:graphicData>
-        </a:graphic>
-      </p:graphicFrame>
-      <p:graphicFrame>
-        <p:nvGraphicFramePr>
-          <p:cNvPr id="11" name="Table 10"/>
-          <p:cNvGraphicFramePr>
-            <a:graphicFrameLocks noGrp="1"/>
-          </p:cNvGraphicFramePr>
-          <p:nvPr/>
-        </p:nvGraphicFramePr>
-        <p:xfrm>
-          <a:off x="365760" y="3098800"/>
-          <a:ext cx="8412479" cy="349504"/>
-        </p:xfrm>
-        <a:graphic>
-          <a:graphicData uri="http://schemas.openxmlformats.org/drawingml/2006/table">
-            <a:tbl>
-              <a:tblPr firstRow="1" bandRow="1">
-                <a:tableStyleId>{5C22544A-7EE6-4342-B048-85BDC9FD1C3A}</a:tableStyleId>
-              </a:tblPr>
-              <a:tblGrid>
-                <a:gridCol w="2271369"/>
-                <a:gridCol w="6141110"/>
-              </a:tblGrid>
-              <a:tr h="349504">
-                <a:tc>
-                  <a:txBody>
-                    <a:bodyPr wrap="none"/>
-                    <a:lstStyle/>
-                    <a:p>
-                      <a:pPr>
-                        <a:lnSpc>
-                          <a:spcPts val="1600"/>
-                        </a:lnSpc>
-                        <a:spcAft>
-                          <a:spcPts val="0"/>
-                        </a:spcAft>
-                        <a:defRPr sz="1200" b="0">
-                          <a:solidFill>
-                            <a:srgbClr val="21243A"/>
-                          </a:solidFill>
-                          <a:latin typeface="Arial"/>
-                        </a:defRPr>
-                      </a:pPr>
-                      <a:r>
-                        <a:t>Confidence</a:t>
-                      </a:r>
-                    </a:p>
-                  </a:txBody>
-                  <a:tcPr marL="82296" marR="82296" marT="64008" marB="64008">
-                    <a:solidFill>
-                      <a:srgbClr val="F1F7F7"/>
-                    </a:solidFill>
-                  </a:tcPr>
-                </a:tc>
-                <a:tc>
-                  <a:txBody>
-                    <a:bodyPr wrap="none"/>
-                    <a:lstStyle/>
-                    <a:p>
-                      <a:pPr>
-                        <a:lnSpc>
-                          <a:spcPts val="1600"/>
-                        </a:lnSpc>
-                        <a:spcAft>
-                          <a:spcPts val="0"/>
-                        </a:spcAft>
-                        <a:defRPr sz="1200" b="0">
-                          <a:solidFill>
-                            <a:srgbClr val="21243A"/>
-                          </a:solidFill>
-                          <a:latin typeface="Arial"/>
-                        </a:defRPr>
-                      </a:pPr>
-                      <a:r>
-                        <a:t>Not recorded</a:t>
-                      </a:r>
-                    </a:p>
-                  </a:txBody>
-                  <a:tcPr marL="82296" marR="82296" marT="64008" marB="64008">
-                    <a:solidFill>
-                      <a:srgbClr val="F1F7F7"/>
-                    </a:solidFill>
-                  </a:tcPr>
-                </a:tc>
-              </a:tr>
-            </a:tbl>
-          </a:graphicData>
-        </a:graphic>
-      </p:graphicFrame>
-      <p:graphicFrame>
-        <p:nvGraphicFramePr>
-          <p:cNvPr id="12" name="Table 11"/>
-          <p:cNvGraphicFramePr>
-            <a:graphicFrameLocks noGrp="1"/>
-          </p:cNvGraphicFramePr>
-          <p:nvPr/>
-        </p:nvGraphicFramePr>
-        <p:xfrm>
-          <a:off x="365760" y="3448304"/>
-          <a:ext cx="8412479" cy="349504"/>
-        </p:xfrm>
-        <a:graphic>
-          <a:graphicData uri="http://schemas.openxmlformats.org/drawingml/2006/table">
-            <a:tbl>
-              <a:tblPr firstRow="1" bandRow="1">
-                <a:tableStyleId>{5C22544A-7EE6-4342-B048-85BDC9FD1C3A}</a:tableStyleId>
-              </a:tblPr>
-              <a:tblGrid>
-                <a:gridCol w="2271369"/>
-                <a:gridCol w="6141110"/>
-              </a:tblGrid>
-              <a:tr h="349504">
-                <a:tc>
-                  <a:txBody>
-                    <a:bodyPr wrap="none"/>
-                    <a:lstStyle/>
-                    <a:p>
-                      <a:pPr>
-                        <a:lnSpc>
-                          <a:spcPts val="1600"/>
-                        </a:lnSpc>
-                        <a:spcAft>
-                          <a:spcPts val="0"/>
-                        </a:spcAft>
-                        <a:defRPr sz="1200" b="0">
-                          <a:solidFill>
-                            <a:srgbClr val="21243A"/>
-                          </a:solidFill>
-                          <a:latin typeface="Arial"/>
-                        </a:defRPr>
-                      </a:pPr>
-                      <a:r>
-                        <a:t>Role in assessment</a:t>
-                      </a:r>
-                    </a:p>
-                  </a:txBody>
-                  <a:tcPr marL="82296" marR="82296" marT="64008" marB="64008">
-                    <a:solidFill>
-                      <a:srgbClr val="FFFFFF"/>
-                    </a:solidFill>
-                  </a:tcPr>
-                </a:tc>
-                <a:tc>
-                  <a:txBody>
-                    <a:bodyPr wrap="none"/>
-                    <a:lstStyle/>
-                    <a:p>
-                      <a:pPr>
-                        <a:lnSpc>
-                          <a:spcPts val="1600"/>
-                        </a:lnSpc>
-                        <a:spcAft>
-                          <a:spcPts val="0"/>
-                        </a:spcAft>
-                        <a:defRPr sz="1200" b="0">
-                          <a:solidFill>
-                            <a:srgbClr val="21243A"/>
-                          </a:solidFill>
-                          <a:latin typeface="Arial"/>
-                        </a:defRPr>
-                      </a:pPr>
-                      <a:r>
-                        <a:t>Not listed</a:t>
-                      </a:r>
-                    </a:p>
-                  </a:txBody>
-                  <a:tcPr marL="82296" marR="82296" marT="64008" marB="64008">
-                    <a:solidFill>
-                      <a:srgbClr val="FFFFFF"/>
-                    </a:solidFill>
-                  </a:tcPr>
-                </a:tc>
-              </a:tr>
-            </a:tbl>
-          </a:graphicData>
-        </a:graphic>
-      </p:graphicFrame>
-      <p:graphicFrame>
-        <p:nvGraphicFramePr>
-          <p:cNvPr id="13" name="Table 12"/>
-          <p:cNvGraphicFramePr>
-            <a:graphicFrameLocks noGrp="1"/>
-          </p:cNvGraphicFramePr>
-          <p:nvPr/>
-        </p:nvGraphicFramePr>
-        <p:xfrm>
-          <a:off x="365760" y="3797808"/>
-          <a:ext cx="8412479" cy="552704"/>
-        </p:xfrm>
-        <a:graphic>
-          <a:graphicData uri="http://schemas.openxmlformats.org/drawingml/2006/table">
-            <a:tbl>
-              <a:tblPr firstRow="1" bandRow="1">
-                <a:tableStyleId>{5C22544A-7EE6-4342-B048-85BDC9FD1C3A}</a:tableStyleId>
-              </a:tblPr>
-              <a:tblGrid>
-                <a:gridCol w="2271369"/>
-                <a:gridCol w="6141110"/>
-              </a:tblGrid>
-              <a:tr h="552704">
-                <a:tc>
-                  <a:txBody>
-                    <a:bodyPr wrap="none"/>
-                    <a:lstStyle/>
-                    <a:p>
-                      <a:pPr>
-                        <a:lnSpc>
-                          <a:spcPts val="1600"/>
-                        </a:lnSpc>
-                        <a:spcAft>
-                          <a:spcPts val="0"/>
-                        </a:spcAft>
-                        <a:defRPr sz="1200" b="0">
-                          <a:solidFill>
-                            <a:srgbClr val="21243A"/>
-                          </a:solidFill>
-                          <a:latin typeface="Arial"/>
-                        </a:defRPr>
-                      </a:pPr>
-                      <a:r>
-                        <a:t>Provider summary</a:t>
-                      </a:r>
-                    </a:p>
-                  </a:txBody>
-                  <a:tcPr marL="82296" marR="82296" marT="64008" marB="64008">
-                    <a:solidFill>
-                      <a:srgbClr val="F1F7F7"/>
-                    </a:solidFill>
-                  </a:tcPr>
-                </a:tc>
-                <a:tc>
-                  <a:txBody>
-                    <a:bodyPr wrap="none"/>
-                    <a:lstStyle/>
-                    <a:p>
-                      <a:pPr>
-                        <a:lnSpc>
-                          <a:spcPts val="1600"/>
-                        </a:lnSpc>
-                        <a:spcAft>
-                          <a:spcPts val="0"/>
-                        </a:spcAft>
-                        <a:defRPr sz="1200" b="0">
-                          <a:solidFill>
-                            <a:srgbClr val="21243A"/>
-                          </a:solidFill>
-                          <a:latin typeface="Arial"/>
-                        </a:defRPr>
-                      </a:pPr>
-                      <a:r>
-                        <a:t>LLM visual check not run for this example. This testing record contains local file</a:t>
-                      </a:r>
-                    </a:p>
-                    <a:p>
-                      <a:pPr>
-                        <a:lnSpc>
-                          <a:spcPts val="1600"/>
-                        </a:lnSpc>
-                        <a:spcAft>
-                          <a:spcPts val="0"/>
-                        </a:spcAft>
-                        <a:defRPr sz="1200" b="0">
-                          <a:solidFill>
-                            <a:srgbClr val="21243A"/>
-                          </a:solidFill>
-                          <a:latin typeface="Arial"/>
-                        </a:defRPr>
-                      </a:pPr>
-                      <a:r>
-                        <a:t>checks only.</a:t>
-                      </a:r>
-                    </a:p>
-                  </a:txBody>
-                  <a:tcPr marL="82296" marR="82296" marT="64008" marB="64008">
-                    <a:solidFill>
-                      <a:srgbClr val="F1F7F7"/>
-                    </a:solidFill>
-                  </a:tcPr>
-                </a:tc>
-              </a:tr>
-            </a:tbl>
-          </a:graphicData>
-        </a:graphic>
-      </p:graphicFrame>
-      <p:graphicFrame>
-        <p:nvGraphicFramePr>
-          <p:cNvPr id="14" name="Table 13"/>
-          <p:cNvGraphicFramePr>
-            <a:graphicFrameLocks noGrp="1"/>
-          </p:cNvGraphicFramePr>
-          <p:nvPr/>
-        </p:nvGraphicFramePr>
-        <p:xfrm>
-          <a:off x="365760" y="4350512"/>
-          <a:ext cx="8412479" cy="349504"/>
-        </p:xfrm>
-        <a:graphic>
-          <a:graphicData uri="http://schemas.openxmlformats.org/drawingml/2006/table">
-            <a:tbl>
-              <a:tblPr firstRow="1" bandRow="1">
-                <a:tableStyleId>{5C22544A-7EE6-4342-B048-85BDC9FD1C3A}</a:tableStyleId>
-              </a:tblPr>
-              <a:tblGrid>
-                <a:gridCol w="2271369"/>
-                <a:gridCol w="6141110"/>
-              </a:tblGrid>
-              <a:tr h="349504">
-                <a:tc>
-                  <a:txBody>
-                    <a:bodyPr wrap="none"/>
-                    <a:lstStyle/>
-                    <a:p>
-                      <a:pPr>
-                        <a:lnSpc>
-                          <a:spcPts val="1600"/>
-                        </a:lnSpc>
-                        <a:spcAft>
-                          <a:spcPts val="0"/>
-                        </a:spcAft>
-                        <a:defRPr sz="1200" b="0">
-                          <a:solidFill>
-                            <a:srgbClr val="21243A"/>
-                          </a:solidFill>
-                          <a:latin typeface="Arial"/>
-                        </a:defRPr>
-                      </a:pPr>
-                      <a:r>
-                        <a:t>Evidence 1</a:t>
-                      </a:r>
-                    </a:p>
-                  </a:txBody>
-                  <a:tcPr marL="82296" marR="82296" marT="64008" marB="64008">
-                    <a:solidFill>
-                      <a:srgbClr val="FFFFFF"/>
-                    </a:solidFill>
-                  </a:tcPr>
-                </a:tc>
-                <a:tc>
-                  <a:txBody>
-                    <a:bodyPr wrap="none"/>
-                    <a:lstStyle/>
-                    <a:p>
-                      <a:pPr>
-                        <a:lnSpc>
-                          <a:spcPts val="1600"/>
-                        </a:lnSpc>
-                        <a:spcAft>
-                          <a:spcPts val="0"/>
-                        </a:spcAft>
-                        <a:defRPr sz="1200" b="0">
-                          <a:solidFill>
-                            <a:srgbClr val="21243A"/>
-                          </a:solidFill>
-                          <a:latin typeface="Arial"/>
-                        </a:defRPr>
-                      </a:pPr>
-                      <a:r>
-                        <a:t>No request or image was sent to this provider for this record.</a:t>
+                        <a:t>Caveat: This is an illustration, not a photo, so camera-forensic cues do not apply.</a:t>
+                      </a:r>
+                    </a:p>
+                    <a:p>
+                      <a:pPr>
+                        <a:lnSpc>
+                          <a:spcPts val="1600"/>
+                        </a:lnSpc>
+                        <a:spcAft>
+                          <a:spcPts val="0"/>
+                        </a:spcAft>
+                        <a:defRPr sz="1200" b="0">
+                          <a:solidFill>
+                            <a:srgbClr val="21243A"/>
+                          </a:solidFill>
+                          <a:latin typeface="Arial"/>
+                        </a:defRPr>
+                      </a:pPr>
+                      <a:r>
+                        <a:t>Skilled human illustrators using digital airbrush styles can produce similar output.</a:t>
+                      </a:r>
+                    </a:p>
+                    <a:p>
+                      <a:pPr>
+                        <a:lnSpc>
+                          <a:spcPts val="1600"/>
+                        </a:lnSpc>
+                        <a:spcAft>
+                          <a:spcPts val="0"/>
+                        </a:spcAft>
+                        <a:defRPr sz="1200" b="0">
+                          <a:solidFill>
+                            <a:srgbClr val="21243A"/>
+                          </a:solidFill>
+                          <a:latin typeface="Arial"/>
+                        </a:defRPr>
+                      </a:pPr>
+                      <a:r>
+                        <a:t>Check for C2PA/metadata, reverse-image search, and verify whether 'Biomedical</a:t>
+                      </a:r>
+                    </a:p>
+                    <a:p>
+                      <a:pPr>
+                        <a:lnSpc>
+                          <a:spcPts val="1600"/>
+                        </a:lnSpc>
+                        <a:spcAft>
+                          <a:spcPts val="0"/>
+                        </a:spcAft>
+                        <a:defRPr sz="1200" b="0">
+                          <a:solidFill>
+                            <a:srgbClr val="21243A"/>
+                          </a:solidFill>
+                          <a:latin typeface="Arial"/>
+                        </a:defRPr>
+                      </a:pPr>
+                      <a:r>
+                        <a:t>Signals' is a real publication.</a:t>
                       </a:r>
                     </a:p>
                   </a:txBody>
@@ -13385,7 +17476,7 @@
               </a:defRPr>
             </a:pPr>
             <a:r>
-              <a:t>Content Credentials / provenance</a:t>
+              <a:t>Provider evidence / 2</a:t>
             </a:r>
           </a:p>
         </p:txBody>
@@ -13635,7 +17726,7 @@
                         </a:defRPr>
                       </a:pPr>
                       <a:r>
-                        <a:t>C2PA Content Credentials</a:t>
+                        <a:t>OpenAI Vision</a:t>
                       </a:r>
                     </a:p>
                   </a:txBody>
@@ -13723,7 +17814,7 @@
                         </a:defRPr>
                       </a:pPr>
                       <a:r>
-                        <a:t>Not recorded</a:t>
+                        <a:t>gpt-6-astra</a:t>
                       </a:r>
                     </a:p>
                   </a:txBody>
@@ -13987,7 +18078,7 @@
                         </a:defRPr>
                       </a:pPr>
                       <a:r>
-                        <a:t>Not recorded</a:t>
+                        <a:t>low</a:t>
                       </a:r>
                     </a:p>
                   </a:txBody>
@@ -14100,7 +18191,7 @@
         </p:nvGraphicFramePr>
         <p:xfrm>
           <a:off x="365760" y="3797808"/>
-          <a:ext cx="8412479" cy="349504"/>
+          <a:ext cx="8412479" cy="1365503"/>
         </p:xfrm>
         <a:graphic>
           <a:graphicData uri="http://schemas.openxmlformats.org/drawingml/2006/table">
@@ -14112,7 +18203,7 @@
                 <a:gridCol w="2271369"/>
                 <a:gridCol w="6141110"/>
               </a:tblGrid>
-              <a:tr h="349504">
+              <a:tr h="1365503">
                 <a:tc>
                   <a:txBody>
                     <a:bodyPr wrap="none"/>
@@ -14163,7 +18254,102 @@
                         </a:defRPr>
                       </a:pPr>
                       <a:r>
-                        <a:t>Embedded credentials: none found. Origin remains unresolved by this check.</a:t>
+                        <a:t>synthetic likelihood 45/100; tells: Entire image is a medical illustration, with no</a:t>
+                      </a:r>
+                    </a:p>
+                    <a:p>
+                      <a:pPr>
+                        <a:lnSpc>
+                          <a:spcPts val="1600"/>
+                        </a:lnSpc>
+                        <a:spcAft>
+                          <a:spcPts val="0"/>
+                        </a:spcAft>
+                        <a:defRPr sz="1200" b="0">
+                          <a:solidFill>
+                            <a:srgbClr val="21243A"/>
+                          </a:solidFill>
+                          <a:latin typeface="Arial"/>
+                        </a:defRPr>
+                      </a:pPr>
+                      <a:r>
+                        <a:t>camera-photo base visible., Headings and labels are legible, with consistent serif</a:t>
+                      </a:r>
+                    </a:p>
+                    <a:p>
+                      <a:pPr>
+                        <a:lnSpc>
+                          <a:spcPts val="1600"/>
+                        </a:lnSpc>
+                        <a:spcAft>
+                          <a:spcPts val="0"/>
+                        </a:spcAft>
+                        <a:defRPr sz="1200" b="0">
+                          <a:solidFill>
+                            <a:srgbClr val="21243A"/>
+                          </a:solidFill>
+                          <a:latin typeface="Arial"/>
+                        </a:defRPr>
+                      </a:pPr>
+                      <a:r>
+                        <a:t>typography and aligned layout., Anatomy and cellular elements use smooth</a:t>
+                      </a:r>
+                    </a:p>
+                    <a:p>
+                      <a:pPr>
+                        <a:lnSpc>
+                          <a:spcPts val="1600"/>
+                        </a:lnSpc>
+                        <a:spcAft>
+                          <a:spcPts val="0"/>
+                        </a:spcAft>
+                        <a:defRPr sz="1200" b="0">
+                          <a:solidFill>
+                            <a:srgbClr val="21243A"/>
+                          </a:solidFill>
+                          <a:latin typeface="Arial"/>
+                        </a:defRPr>
+                      </a:pPr>
+                      <a:r>
+                        <a:t>shaded fills and clean outlines compatible with conventional digital illustration.,</a:t>
+                      </a:r>
+                    </a:p>
+                    <a:p>
+                      <a:pPr>
+                        <a:lnSpc>
+                          <a:spcPts val="1600"/>
+                        </a:lnSpc>
+                        <a:spcAft>
+                          <a:spcPts val="0"/>
+                        </a:spcAft>
+                        <a:defRPr sz="1200" b="0">
+                          <a:solidFill>
+                            <a:srgbClr val="21243A"/>
+                          </a:solidFill>
+                          <a:latin typeface="Arial"/>
+                        </a:defRPr>
+                      </a:pPr>
+                      <a:r>
+                        <a:t>Repeated particle motifs have variable internal squiggles, but no decisive</a:t>
+                      </a:r>
+                    </a:p>
+                    <a:p>
+                      <a:pPr>
+                        <a:lnSpc>
+                          <a:spcPts val="1600"/>
+                        </a:lnSpc>
+                        <a:spcAft>
+                          <a:spcPts val="0"/>
+                        </a:spcAft>
+                        <a:defRPr sz="1200" b="0">
+                          <a:solidFill>
+                            <a:srgbClr val="21243A"/>
+                          </a:solidFill>
+                          <a:latin typeface="Arial"/>
+                        </a:defRPr>
+                      </a:pPr>
+                      <a:r>
+                        <a:t>generation artifact is visible.</a:t>
                       </a:r>
                     </a:p>
                   </a:txBody>
@@ -14187,8 +18373,8 @@
           <p:nvPr/>
         </p:nvGraphicFramePr>
         <p:xfrm>
-          <a:off x="365760" y="4147312"/>
-          <a:ext cx="8412479" cy="552704"/>
+          <a:off x="365760" y="5163312"/>
+          <a:ext cx="8412479" cy="349504"/>
         </p:xfrm>
         <a:graphic>
           <a:graphicData uri="http://schemas.openxmlformats.org/drawingml/2006/table">
@@ -14200,7 +18386,7 @@
                 <a:gridCol w="2271369"/>
                 <a:gridCol w="6141110"/>
               </a:tblGrid>
-              <a:tr h="552704">
+              <a:tr h="349504">
                 <a:tc>
                   <a:txBody>
                     <a:bodyPr wrap="none"/>
@@ -14251,26 +18437,7 @@
                         </a:defRPr>
                       </a:pPr>
                       <a:r>
-                        <a:t>Coverage: credentials embedded in the submitted file. External credentials were</a:t>
-                      </a:r>
-                    </a:p>
-                    <a:p>
-                      <a:pPr>
-                        <a:lnSpc>
-                          <a:spcPts val="1600"/>
-                        </a:lnSpc>
-                        <a:spcAft>
-                          <a:spcPts val="0"/>
-                        </a:spcAft>
-                        <a:defRPr sz="1200" b="0">
-                          <a:solidFill>
-                            <a:srgbClr val="21243A"/>
-                          </a:solidFill>
-                          <a:latin typeface="Arial"/>
-                        </a:defRPr>
-                      </a:pPr>
-                      <a:r>
-                        <a:t>not retrieved.</a:t>
+                        <a:t>Entire image is a medical illustration, with no camera-photo base visible.</a:t>
                       </a:r>
                     </a:p>
                   </a:txBody>
@@ -14294,7 +18461,7 @@
           <p:nvPr/>
         </p:nvGraphicFramePr>
         <p:xfrm>
-          <a:off x="365760" y="4700016"/>
+          <a:off x="365760" y="5512816"/>
           <a:ext cx="8412479" cy="552704"/>
         </p:xfrm>
         <a:graphic>
@@ -14358,139 +18525,32 @@
                         </a:defRPr>
                       </a:pPr>
                       <a:r>
-                        <a:t>Verifier: c2pa-python 0.37.12; native SDK 0.91.0; specification target 2.4; policy</a:t>
-                      </a:r>
-                    </a:p>
-                    <a:p>
-                      <a:pPr>
-                        <a:lnSpc>
-                          <a:spcPts val="1600"/>
-                        </a:lnSpc>
-                        <a:spcAft>
-                          <a:spcPts val="0"/>
-                        </a:spcAft>
-                        <a:defRPr sz="1200" b="0">
-                          <a:solidFill>
-                            <a:srgbClr val="21243A"/>
-                          </a:solidFill>
-                          <a:latin typeface="Arial"/>
-                        </a:defRPr>
-                      </a:pPr>
-                      <a:r>
-                        <a:t>embedded-offline-reviewed-trust-v3.</a:t>
+                        <a:t>Headings and labels are legible, with consistent serif typography and aligned</a:t>
+                      </a:r>
+                    </a:p>
+                    <a:p>
+                      <a:pPr>
+                        <a:lnSpc>
+                          <a:spcPts val="1600"/>
+                        </a:lnSpc>
+                        <a:spcAft>
+                          <a:spcPts val="0"/>
+                        </a:spcAft>
+                        <a:defRPr sz="1200" b="0">
+                          <a:solidFill>
+                            <a:srgbClr val="21243A"/>
+                          </a:solidFill>
+                          <a:latin typeface="Arial"/>
+                        </a:defRPr>
+                      </a:pPr>
+                      <a:r>
+                        <a:t>layout.</a:t>
                       </a:r>
                     </a:p>
                   </a:txBody>
                   <a:tcPr marL="82296" marR="82296" marT="64008" marB="64008">
                     <a:solidFill>
                       <a:srgbClr val="F1F7F7"/>
-                    </a:solidFill>
-                  </a:tcPr>
-                </a:tc>
-              </a:tr>
-            </a:tbl>
-          </a:graphicData>
-        </a:graphic>
-      </p:graphicFrame>
-      <p:graphicFrame>
-        <p:nvGraphicFramePr>
-          <p:cNvPr id="16" name="Table 15"/>
-          <p:cNvGraphicFramePr>
-            <a:graphicFrameLocks noGrp="1"/>
-          </p:cNvGraphicFramePr>
-          <p:nvPr/>
-        </p:nvGraphicFramePr>
-        <p:xfrm>
-          <a:off x="365760" y="5252720"/>
-          <a:ext cx="8412479" cy="552704"/>
-        </p:xfrm>
-        <a:graphic>
-          <a:graphicData uri="http://schemas.openxmlformats.org/drawingml/2006/table">
-            <a:tbl>
-              <a:tblPr firstRow="1" bandRow="1">
-                <a:tableStyleId>{5C22544A-7EE6-4342-B048-85BDC9FD1C3A}</a:tableStyleId>
-              </a:tblPr>
-              <a:tblGrid>
-                <a:gridCol w="2271369"/>
-                <a:gridCol w="6141110"/>
-              </a:tblGrid>
-              <a:tr h="552704">
-                <a:tc>
-                  <a:txBody>
-                    <a:bodyPr wrap="none"/>
-                    <a:lstStyle/>
-                    <a:p>
-                      <a:pPr>
-                        <a:lnSpc>
-                          <a:spcPts val="1600"/>
-                        </a:lnSpc>
-                        <a:spcAft>
-                          <a:spcPts val="0"/>
-                        </a:spcAft>
-                        <a:defRPr sz="1200" b="0">
-                          <a:solidFill>
-                            <a:srgbClr val="21243A"/>
-                          </a:solidFill>
-                          <a:latin typeface="Arial"/>
-                        </a:defRPr>
-                      </a:pPr>
-                      <a:r>
-                        <a:t>Evidence 3</a:t>
-                      </a:r>
-                    </a:p>
-                  </a:txBody>
-                  <a:tcPr marL="82296" marR="82296" marT="64008" marB="64008">
-                    <a:solidFill>
-                      <a:srgbClr val="FFFFFF"/>
-                    </a:solidFill>
-                  </a:tcPr>
-                </a:tc>
-                <a:tc>
-                  <a:txBody>
-                    <a:bodyPr wrap="none"/>
-                    <a:lstStyle/>
-                    <a:p>
-                      <a:pPr>
-                        <a:lnSpc>
-                          <a:spcPts val="1600"/>
-                        </a:lnSpc>
-                        <a:spcAft>
-                          <a:spcPts val="0"/>
-                        </a:spcAft>
-                        <a:defRPr sz="1200" b="0">
-                          <a:solidFill>
-                            <a:srgbClr val="21243A"/>
-                          </a:solidFill>
-                          <a:latin typeface="Arial"/>
-                        </a:defRPr>
-                      </a:pPr>
-                      <a:r>
-                        <a:t>Offline embedded-manifest verification; no network trust-list, manifest or</a:t>
-                      </a:r>
-                    </a:p>
-                    <a:p>
-                      <a:pPr>
-                        <a:lnSpc>
-                          <a:spcPts val="1600"/>
-                        </a:lnSpc>
-                        <a:spcAft>
-                          <a:spcPts val="0"/>
-                        </a:spcAft>
-                        <a:defRPr sz="1200" b="0">
-                          <a:solidFill>
-                            <a:srgbClr val="21243A"/>
-                          </a:solidFill>
-                          <a:latin typeface="Arial"/>
-                        </a:defRPr>
-                      </a:pPr>
-                      <a:r>
-                        <a:t>revocation refresh.</a:t>
-                      </a:r>
-                    </a:p>
-                  </a:txBody>
-                  <a:tcPr marL="82296" marR="82296" marT="64008" marB="64008">
-                    <a:solidFill>
-                      <a:srgbClr val="FFFFFF"/>
                     </a:solidFill>
                   </a:tcPr>
                 </a:tc>
@@ -14596,7 +18656,7 @@
               </a:defRPr>
             </a:pPr>
             <a:r>
-              <a:t>Content Credentials / provenance (continued)</a:t>
+              <a:t>Provider evidence / 2 (continued)</a:t>
             </a:r>
           </a:p>
         </p:txBody>
@@ -14816,6 +18876,113 @@
                         </a:defRPr>
                       </a:pPr>
                       <a:r>
+                        <a:t>Evidence 3</a:t>
+                      </a:r>
+                    </a:p>
+                  </a:txBody>
+                  <a:tcPr marL="82296" marR="82296" marT="64008" marB="64008">
+                    <a:solidFill>
+                      <a:srgbClr val="FFFFFF"/>
+                    </a:solidFill>
+                  </a:tcPr>
+                </a:tc>
+                <a:tc>
+                  <a:txBody>
+                    <a:bodyPr wrap="none"/>
+                    <a:lstStyle/>
+                    <a:p>
+                      <a:pPr>
+                        <a:lnSpc>
+                          <a:spcPts val="1600"/>
+                        </a:lnSpc>
+                        <a:spcAft>
+                          <a:spcPts val="0"/>
+                        </a:spcAft>
+                        <a:defRPr sz="1200" b="0">
+                          <a:solidFill>
+                            <a:srgbClr val="21243A"/>
+                          </a:solidFill>
+                          <a:latin typeface="Arial"/>
+                        </a:defRPr>
+                      </a:pPr>
+                      <a:r>
+                        <a:t>Anatomy and cellular elements use smooth shaded fills and clean outlines</a:t>
+                      </a:r>
+                    </a:p>
+                    <a:p>
+                      <a:pPr>
+                        <a:lnSpc>
+                          <a:spcPts val="1600"/>
+                        </a:lnSpc>
+                        <a:spcAft>
+                          <a:spcPts val="0"/>
+                        </a:spcAft>
+                        <a:defRPr sz="1200" b="0">
+                          <a:solidFill>
+                            <a:srgbClr val="21243A"/>
+                          </a:solidFill>
+                          <a:latin typeface="Arial"/>
+                        </a:defRPr>
+                      </a:pPr>
+                      <a:r>
+                        <a:t>compatible with conventional digital illustration.</a:t>
+                      </a:r>
+                    </a:p>
+                  </a:txBody>
+                  <a:tcPr marL="82296" marR="82296" marT="64008" marB="64008">
+                    <a:solidFill>
+                      <a:srgbClr val="FFFFFF"/>
+                    </a:solidFill>
+                  </a:tcPr>
+                </a:tc>
+              </a:tr>
+            </a:tbl>
+          </a:graphicData>
+        </a:graphic>
+      </p:graphicFrame>
+      <p:graphicFrame>
+        <p:nvGraphicFramePr>
+          <p:cNvPr id="8" name="Table 7"/>
+          <p:cNvGraphicFramePr>
+            <a:graphicFrameLocks noGrp="1"/>
+          </p:cNvGraphicFramePr>
+          <p:nvPr/>
+        </p:nvGraphicFramePr>
+        <p:xfrm>
+          <a:off x="365760" y="2253488"/>
+          <a:ext cx="8412479" cy="552704"/>
+        </p:xfrm>
+        <a:graphic>
+          <a:graphicData uri="http://schemas.openxmlformats.org/drawingml/2006/table">
+            <a:tbl>
+              <a:tblPr firstRow="1" bandRow="1">
+                <a:tableStyleId>{5C22544A-7EE6-4342-B048-85BDC9FD1C3A}</a:tableStyleId>
+              </a:tblPr>
+              <a:tblGrid>
+                <a:gridCol w="2271369"/>
+                <a:gridCol w="6141110"/>
+              </a:tblGrid>
+              <a:tr h="552704">
+                <a:tc>
+                  <a:txBody>
+                    <a:bodyPr wrap="none"/>
+                    <a:lstStyle/>
+                    <a:p>
+                      <a:pPr>
+                        <a:lnSpc>
+                          <a:spcPts val="1600"/>
+                        </a:lnSpc>
+                        <a:spcAft>
+                          <a:spcPts val="0"/>
+                        </a:spcAft>
+                        <a:defRPr sz="1200" b="0">
+                          <a:solidFill>
+                            <a:srgbClr val="21243A"/>
+                          </a:solidFill>
+                          <a:latin typeface="Arial"/>
+                        </a:defRPr>
+                      </a:pPr>
+                      <a:r>
                         <a:t>Evidence 4</a:t>
                       </a:r>
                     </a:p>
@@ -14846,32 +19013,139 @@
                         </a:defRPr>
                       </a:pPr>
                       <a:r>
-                        <a:t>No reviewed local C2PA trust snapshot installed. Provenance overrides are</a:t>
-                      </a:r>
-                    </a:p>
-                    <a:p>
-                      <a:pPr>
-                        <a:lnSpc>
-                          <a:spcPts val="1600"/>
-                        </a:lnSpc>
-                        <a:spcAft>
-                          <a:spcPts val="0"/>
-                        </a:spcAft>
-                        <a:defRPr sz="1200" b="0">
-                          <a:solidFill>
-                            <a:srgbClr val="21243A"/>
-                          </a:solidFill>
-                          <a:latin typeface="Arial"/>
-                        </a:defRPr>
-                      </a:pPr>
-                      <a:r>
-                        <a:t>disabled.</a:t>
+                        <a:t>Repeated particle motifs have variable internal squiggles, but no decisive</a:t>
+                      </a:r>
+                    </a:p>
+                    <a:p>
+                      <a:pPr>
+                        <a:lnSpc>
+                          <a:spcPts val="1600"/>
+                        </a:lnSpc>
+                        <a:spcAft>
+                          <a:spcPts val="0"/>
+                        </a:spcAft>
+                        <a:defRPr sz="1200" b="0">
+                          <a:solidFill>
+                            <a:srgbClr val="21243A"/>
+                          </a:solidFill>
+                          <a:latin typeface="Arial"/>
+                        </a:defRPr>
+                      </a:pPr>
+                      <a:r>
+                        <a:t>generation artifact is visible.</a:t>
                       </a:r>
                     </a:p>
                   </a:txBody>
                   <a:tcPr marL="82296" marR="82296" marT="64008" marB="64008">
                     <a:solidFill>
                       <a:srgbClr val="F1F7F7"/>
+                    </a:solidFill>
+                  </a:tcPr>
+                </a:tc>
+              </a:tr>
+            </a:tbl>
+          </a:graphicData>
+        </a:graphic>
+      </p:graphicFrame>
+      <p:graphicFrame>
+        <p:nvGraphicFramePr>
+          <p:cNvPr id="9" name="Table 8"/>
+          <p:cNvGraphicFramePr>
+            <a:graphicFrameLocks noGrp="1"/>
+          </p:cNvGraphicFramePr>
+          <p:nvPr/>
+        </p:nvGraphicFramePr>
+        <p:xfrm>
+          <a:off x="365760" y="2806192"/>
+          <a:ext cx="8412479" cy="552704"/>
+        </p:xfrm>
+        <a:graphic>
+          <a:graphicData uri="http://schemas.openxmlformats.org/drawingml/2006/table">
+            <a:tbl>
+              <a:tblPr firstRow="1" bandRow="1">
+                <a:tableStyleId>{5C22544A-7EE6-4342-B048-85BDC9FD1C3A}</a:tableStyleId>
+              </a:tblPr>
+              <a:tblGrid>
+                <a:gridCol w="2271369"/>
+                <a:gridCol w="6141110"/>
+              </a:tblGrid>
+              <a:tr h="552704">
+                <a:tc>
+                  <a:txBody>
+                    <a:bodyPr wrap="none"/>
+                    <a:lstStyle/>
+                    <a:p>
+                      <a:pPr>
+                        <a:lnSpc>
+                          <a:spcPts val="1600"/>
+                        </a:lnSpc>
+                        <a:spcAft>
+                          <a:spcPts val="0"/>
+                        </a:spcAft>
+                        <a:defRPr sz="1200" b="0">
+                          <a:solidFill>
+                            <a:srgbClr val="21243A"/>
+                          </a:solidFill>
+                          <a:latin typeface="Arial"/>
+                        </a:defRPr>
+                      </a:pPr>
+                      <a:r>
+                        <a:t>Evidence 5</a:t>
+                      </a:r>
+                    </a:p>
+                  </a:txBody>
+                  <a:tcPr marL="82296" marR="82296" marT="64008" marB="64008">
+                    <a:solidFill>
+                      <a:srgbClr val="FFFFFF"/>
+                    </a:solidFill>
+                  </a:tcPr>
+                </a:tc>
+                <a:tc>
+                  <a:txBody>
+                    <a:bodyPr wrap="none"/>
+                    <a:lstStyle/>
+                    <a:p>
+                      <a:pPr>
+                        <a:lnSpc>
+                          <a:spcPts val="1600"/>
+                        </a:lnSpc>
+                        <a:spcAft>
+                          <a:spcPts val="0"/>
+                        </a:spcAft>
+                        <a:defRPr sz="1200" b="0">
+                          <a:solidFill>
+                            <a:srgbClr val="21243A"/>
+                          </a:solidFill>
+                          <a:latin typeface="Arial"/>
+                        </a:defRPr>
+                      </a:pPr>
+                      <a:r>
+                        <a:t>Caveat: Conventional digital artwork and AI-assisted illustration can look alike;</a:t>
+                      </a:r>
+                    </a:p>
+                    <a:p>
+                      <a:pPr>
+                        <a:lnSpc>
+                          <a:spcPts val="1600"/>
+                        </a:lnSpc>
+                        <a:spcAft>
+                          <a:spcPts val="0"/>
+                        </a:spcAft>
+                        <a:defRPr sz="1200" b="0">
+                          <a:solidFill>
+                            <a:srgbClr val="21243A"/>
+                          </a:solidFill>
+                          <a:latin typeface="Arial"/>
+                        </a:defRPr>
+                      </a:pPr>
+                      <a:r>
+                        <a:t>source files and provenance are needed to distinguish them.</a:t>
+                      </a:r>
+                    </a:p>
+                  </a:txBody>
+                  <a:tcPr marL="82296" marR="82296" marT="64008" marB="64008">
+                    <a:solidFill>
+                      <a:srgbClr val="FFFFFF"/>
                     </a:solidFill>
                   </a:tcPr>
                 </a:tc>
@@ -14977,7 +19251,7 @@
               </a:defRPr>
             </a:pPr>
             <a:r>
-              <a:t>Provider evidence / 5</a:t>
+              <a:t>Provider evidence / 3</a:t>
             </a:r>
           </a:p>
         </p:txBody>
@@ -15227,7 +19501,7 @@
                         </a:defRPr>
                       </a:pPr>
                       <a:r>
-                        <a:t>Local forensic cues</a:t>
+                        <a:t>Gemini Vision</a:t>
                       </a:r>
                     </a:p>
                   </a:txBody>
@@ -15315,7 +19589,7 @@
                         </a:defRPr>
                       </a:pPr>
                       <a:r>
-                        <a:t>Not recorded</a:t>
+                        <a:t>gemini-3.8-flash</a:t>
                       </a:r>
                     </a:p>
                   </a:txBody>
@@ -15491,7 +19765,7 @@
                         </a:defRPr>
                       </a:pPr>
                       <a:r>
-                        <a:t>partially synthetic</a:t>
+                        <a:t>synthetic likely</a:t>
                       </a:r>
                     </a:p>
                   </a:txBody>
@@ -15579,7 +19853,7 @@
                         </a:defRPr>
                       </a:pPr>
                       <a:r>
-                        <a:t>low</a:t>
+                        <a:t>medium</a:t>
                       </a:r>
                     </a:p>
                   </a:txBody>
@@ -15667,7 +19941,7 @@
                         </a:defRPr>
                       </a:pPr>
                       <a:r>
-                        <a:t>Additional finding</a:t>
+                        <a:t>Supporting</a:t>
                       </a:r>
                     </a:p>
                   </a:txBody>
@@ -15692,7 +19966,7 @@
         </p:nvGraphicFramePr>
         <p:xfrm>
           <a:off x="365760" y="3797808"/>
-          <a:ext cx="8412479" cy="349504"/>
+          <a:ext cx="8412479" cy="959103"/>
         </p:xfrm>
         <a:graphic>
           <a:graphicData uri="http://schemas.openxmlformats.org/drawingml/2006/table">
@@ -15704,7 +19978,7 @@
                 <a:gridCol w="2271369"/>
                 <a:gridCol w="6141110"/>
               </a:tblGrid>
-              <a:tr h="349504">
+              <a:tr h="959103">
                 <a:tc>
                   <a:txBody>
                     <a:bodyPr wrap="none"/>
@@ -15755,7 +20029,64 @@
                         </a:defRPr>
                       </a:pPr>
                       <a:r>
-                        <a:t>Heuristic synthetic likelihood 41/100 from metadata + pixel statistics.</a:t>
+                        <a:t>synthetic likelihood 68/100; tells: model read this as AI editing over a</a:t>
+                      </a:r>
+                    </a:p>
+                    <a:p>
+                      <a:pPr>
+                        <a:lnSpc>
+                          <a:spcPts val="1600"/>
+                        </a:lnSpc>
+                        <a:spcAft>
+                          <a:spcPts val="0"/>
+                        </a:spcAft>
+                        <a:defRPr sz="1200" b="0">
+                          <a:solidFill>
+                            <a:srgbClr val="21243A"/>
+                          </a:solidFill>
+                          <a:latin typeface="Arial"/>
+                        </a:defRPr>
+                      </a:pPr>
+                      <a:r>
+                        <a:t>photographic base image, sterile digital rendering style, slightly inconsistent</a:t>
+                      </a:r>
+                    </a:p>
+                    <a:p>
+                      <a:pPr>
+                        <a:lnSpc>
+                          <a:spcPts val="1600"/>
+                        </a:lnSpc>
+                        <a:spcAft>
+                          <a:spcPts val="0"/>
+                        </a:spcAft>
+                        <a:defRPr sz="1200" b="0">
+                          <a:solidFill>
+                            <a:srgbClr val="21243A"/>
+                          </a:solidFill>
+                          <a:latin typeface="Arial"/>
+                        </a:defRPr>
+                      </a:pPr>
+                      <a:r>
+                        <a:t>anatomical blending in syringe and hand, typical AI-generated vector/digital</a:t>
+                      </a:r>
+                    </a:p>
+                    <a:p>
+                      <a:pPr>
+                        <a:lnSpc>
+                          <a:spcPts val="1600"/>
+                        </a:lnSpc>
+                        <a:spcAft>
+                          <a:spcPts val="0"/>
+                        </a:spcAft>
+                        <a:defRPr sz="1200" b="0">
+                          <a:solidFill>
+                            <a:srgbClr val="21243A"/>
+                          </a:solidFill>
+                          <a:latin typeface="Arial"/>
+                        </a:defRPr>
+                      </a:pPr>
+                      <a:r>
+                        <a:t>medical illustration texture</a:t>
                       </a:r>
                     </a:p>
                   </a:txBody>
@@ -15779,7 +20110,7 @@
           <p:nvPr/>
         </p:nvGraphicFramePr>
         <p:xfrm>
-          <a:off x="365760" y="4147312"/>
+          <a:off x="365760" y="4756912"/>
           <a:ext cx="8412479" cy="349504"/>
         </p:xfrm>
         <a:graphic>
@@ -15843,7 +20174,7 @@
                         </a:defRPr>
                       </a:pPr>
                       <a:r>
-                        <a:t>No camera EXIF (common in AI exports, screenshots, and re-saves).</a:t>
+                        <a:t>Model read this as AI editing over a photographic base image</a:t>
                       </a:r>
                     </a:p>
                   </a:txBody>
@@ -15867,7 +20198,7 @@
           <p:nvPr/>
         </p:nvGraphicFramePr>
         <p:xfrm>
-          <a:off x="365760" y="4496816"/>
+          <a:off x="365760" y="5106416"/>
           <a:ext cx="8412479" cy="349504"/>
         </p:xfrm>
         <a:graphic>
@@ -15931,7 +20262,7 @@
                         </a:defRPr>
                       </a:pPr>
                       <a:r>
-                        <a:t>ELA mean 1.8, peak 62 (uniform high ELA can indicate generation/heavy edit).</a:t>
+                        <a:t>Sterile digital rendering style</a:t>
                       </a:r>
                     </a:p>
                   </a:txBody>
@@ -15955,7 +20286,7 @@
           <p:nvPr/>
         </p:nvGraphicFramePr>
         <p:xfrm>
-          <a:off x="365760" y="4846320"/>
+          <a:off x="365760" y="5455920"/>
           <a:ext cx="8412479" cy="349504"/>
         </p:xfrm>
         <a:graphic>
@@ -16019,101 +20350,13 @@
                         </a:defRPr>
                       </a:pPr>
                       <a:r>
-                        <a:t>High-frequency noise std 11.38 (very low/very uniform noise is a synthesis cue).</a:t>
+                        <a:t>Slightly inconsistent anatomical blending in syringe and hand</a:t>
                       </a:r>
                     </a:p>
                   </a:txBody>
                   <a:tcPr marL="82296" marR="82296" marT="64008" marB="64008">
                     <a:solidFill>
                       <a:srgbClr val="FFFFFF"/>
-                    </a:solidFill>
-                  </a:tcPr>
-                </a:tc>
-              </a:tr>
-            </a:tbl>
-          </a:graphicData>
-        </a:graphic>
-      </p:graphicFrame>
-      <p:graphicFrame>
-        <p:nvGraphicFramePr>
-          <p:cNvPr id="17" name="Table 16"/>
-          <p:cNvGraphicFramePr>
-            <a:graphicFrameLocks noGrp="1"/>
-          </p:cNvGraphicFramePr>
-          <p:nvPr/>
-        </p:nvGraphicFramePr>
-        <p:xfrm>
-          <a:off x="365760" y="5195824"/>
-          <a:ext cx="8412479" cy="349504"/>
-        </p:xfrm>
-        <a:graphic>
-          <a:graphicData uri="http://schemas.openxmlformats.org/drawingml/2006/table">
-            <a:tbl>
-              <a:tblPr firstRow="1" bandRow="1">
-                <a:tableStyleId>{5C22544A-7EE6-4342-B048-85BDC9FD1C3A}</a:tableStyleId>
-              </a:tblPr>
-              <a:tblGrid>
-                <a:gridCol w="2271369"/>
-                <a:gridCol w="6141110"/>
-              </a:tblGrid>
-              <a:tr h="349504">
-                <a:tc>
-                  <a:txBody>
-                    <a:bodyPr wrap="none"/>
-                    <a:lstStyle/>
-                    <a:p>
-                      <a:pPr>
-                        <a:lnSpc>
-                          <a:spcPts val="1600"/>
-                        </a:lnSpc>
-                        <a:spcAft>
-                          <a:spcPts val="0"/>
-                        </a:spcAft>
-                        <a:defRPr sz="1200" b="0">
-                          <a:solidFill>
-                            <a:srgbClr val="21243A"/>
-                          </a:solidFill>
-                          <a:latin typeface="Arial"/>
-                        </a:defRPr>
-                      </a:pPr>
-                      <a:r>
-                        <a:t>Evidence 4</a:t>
-                      </a:r>
-                    </a:p>
-                  </a:txBody>
-                  <a:tcPr marL="82296" marR="82296" marT="64008" marB="64008">
-                    <a:solidFill>
-                      <a:srgbClr val="F1F7F7"/>
-                    </a:solidFill>
-                  </a:tcPr>
-                </a:tc>
-                <a:tc>
-                  <a:txBody>
-                    <a:bodyPr wrap="none"/>
-                    <a:lstStyle/>
-                    <a:p>
-                      <a:pPr>
-                        <a:lnSpc>
-                          <a:spcPts val="1600"/>
-                        </a:lnSpc>
-                        <a:spcAft>
-                          <a:spcPts val="0"/>
-                        </a:spcAft>
-                        <a:defRPr sz="1200" b="0">
-                          <a:solidFill>
-                            <a:srgbClr val="21243A"/>
-                          </a:solidFill>
-                          <a:latin typeface="Arial"/>
-                        </a:defRPr>
-                      </a:pPr>
-                      <a:r>
-                        <a:t>Spectral peakiness 19.81 (periodic frequency peaks can mark generated textures).</a:t>
-                      </a:r>
-                    </a:p>
-                  </a:txBody>
-                  <a:tcPr marL="82296" marR="82296" marT="64008" marB="64008">
-                    <a:solidFill>
-                      <a:srgbClr val="F1F7F7"/>
                     </a:solidFill>
                   </a:tcPr>
                 </a:tc>

--- a/site/showcase/exports/journal_diagram.pptx
+++ b/site/showcase/exports/journal_diagram.pptx
@@ -23,6 +23,7 @@
     <p:sldId id="271" r:id="rId23"/>
     <p:sldId id="272" r:id="rId24"/>
     <p:sldId id="273" r:id="rId25"/>
+    <p:sldId id="274" r:id="rId26"/>
   </p:sldIdLst>
   <p:sldSz cx="9144000" cy="6858000" type="screen4x3"/>
   <p:notesSz cx="6858000" cy="9144000"/>
@@ -1425,6 +1426,101 @@
 </file>
 
 <file path=ppt/notesSlides/notesSlide18.xml><?xml version="1.0" encoding="utf-8"?>
+<p:notes xmlns:a="http://schemas.openxmlformats.org/drawingml/2006/main" xmlns:p="http://schemas.openxmlformats.org/presentationml/2006/main" xmlns:r="http://schemas.openxmlformats.org/officeDocument/2006/relationships">
+  <p:cSld>
+    <p:spTree>
+      <p:nvGrpSpPr>
+        <p:cNvPr id="1" name=""/>
+        <p:cNvGrpSpPr/>
+        <p:nvPr/>
+      </p:nvGrpSpPr>
+      <p:grpSpPr>
+        <a:xfrm>
+          <a:off x="0" y="0"/>
+          <a:ext cx="0" cy="0"/>
+          <a:chOff x="0" y="0"/>
+          <a:chExt cx="0" cy="0"/>
+        </a:xfrm>
+      </p:grpSpPr>
+      <p:sp>
+        <p:nvSpPr>
+          <p:cNvPr id="2" name="Slide Image Placeholder 1"/>
+          <p:cNvSpPr>
+            <a:spLocks noGrp="1"/>
+          </p:cNvSpPr>
+          <p:nvPr>
+            <p:ph type="sldImg" idx="2"/>
+          </p:nvPr>
+        </p:nvSpPr>
+        <p:spPr/>
+      </p:sp>
+      <p:sp>
+        <p:nvSpPr>
+          <p:cNvPr id="3" name="Notes Placeholder 2"/>
+          <p:cNvSpPr>
+            <a:spLocks noGrp="1"/>
+          </p:cNvSpPr>
+          <p:nvPr>
+            <p:ph type="body" idx="3" sz="quarter"/>
+          </p:nvPr>
+        </p:nvSpPr>
+        <p:spPr/>
+        <p:txBody>
+          <a:bodyPr/>
+          <a:lstStyle/>
+          <a:p>
+            <a:r>
+              <a:t>journal-diagram.png</a:t>
+            </a:r>
+          </a:p>
+          <a:p>
+            <a:r>
+              <a:t>Cite this analysis</a:t>
+            </a:r>
+          </a:p>
+          <a:p>
+            <a:r>
+              <a:t>Software (Harvard) | Martin, S. (2026) SDA Vision: Synthetic-media Discourse Analysis (version 0.1.0) [Computer software]. Manchester Metropolitan University. Available at: https://sdavision.io/</a:t>
+            </a:r>
+          </a:p>
+          <a:p>
+            <a:r>
+              <a:t>Software creator | Dr Sam Martin, Smart Data Research UK (UKRI) Fellow, Manchester Metropolitan University (MMU). ORCID: https://orcid.org/0000-0002-4466-8374.</a:t>
+            </a:r>
+          </a:p>
+          <a:p>
+            <a:r>
+              <a:t>Funding acknowledgement | This work was supported by Smart Data Research UK, a UKRI investment; Grant number UKRI4010.</a:t>
+            </a:r>
+          </a:p>
+          <a:p>
+            <a:r>
+              <a:t>Analysis record | File: journal-diagram.png; media type: image; recorded at: 2026-09-26T22:31:05+00:00; models: claude-opus-5-5, gemini-3.8-flash, gpt-6-astra.</a:t>
+            </a:r>
+          </a:p>
+        </p:txBody>
+      </p:sp>
+      <p:sp>
+        <p:nvSpPr>
+          <p:cNvPr id="4" name="Slide Number Placeholder 3"/>
+          <p:cNvSpPr>
+            <a:spLocks noGrp="1"/>
+          </p:cNvSpPr>
+          <p:nvPr>
+            <p:ph type="sldNum" idx="5" sz="quarter"/>
+          </p:nvPr>
+        </p:nvSpPr>
+        <p:spPr/>
+      </p:sp>
+    </p:spTree>
+  </p:cSld>
+  <p:clrMapOvr>
+    <a:masterClrMapping/>
+  </p:clrMapOvr>
+</p:notes>
+</file>
+
+<file path=ppt/notesSlides/notesSlide19.xml><?xml version="1.0" encoding="utf-8"?>
 <p:notes xmlns:a="http://schemas.openxmlformats.org/drawingml/2006/main" xmlns:p="http://schemas.openxmlformats.org/presentationml/2006/main" xmlns:r="http://schemas.openxmlformats.org/officeDocument/2006/relationships">
   <p:cSld>
     <p:spTree>
@@ -11610,7 +11706,7 @@
               </a:defRPr>
             </a:pPr>
             <a:r>
-              <a:t>File and analysis record</a:t>
+              <a:t>Cite this analysis</a:t>
             </a:r>
           </a:p>
         </p:txBody>
@@ -11695,6 +11791,746 @@
             </a:pPr>
             <a:r>
               <a:t>18</a:t>
+            </a:r>
+          </a:p>
+        </p:txBody>
+      </p:sp>
+      <p:graphicFrame>
+        <p:nvGraphicFramePr>
+          <p:cNvPr id="6" name="Table 5"/>
+          <p:cNvGraphicFramePr>
+            <a:graphicFrameLocks noGrp="1"/>
+          </p:cNvGraphicFramePr>
+          <p:nvPr/>
+        </p:nvGraphicFramePr>
+        <p:xfrm>
+          <a:off x="365760" y="1353312"/>
+          <a:ext cx="8412479" cy="347472"/>
+        </p:xfrm>
+        <a:graphic>
+          <a:graphicData uri="http://schemas.openxmlformats.org/drawingml/2006/table">
+            <a:tbl>
+              <a:tblPr firstRow="1" bandRow="1">
+                <a:tableStyleId>{5C22544A-7EE6-4342-B048-85BDC9FD1C3A}</a:tableStyleId>
+              </a:tblPr>
+              <a:tblGrid>
+                <a:gridCol w="2271369"/>
+                <a:gridCol w="6141110"/>
+              </a:tblGrid>
+              <a:tr h="347472">
+                <a:tc>
+                  <a:txBody>
+                    <a:bodyPr wrap="none"/>
+                    <a:lstStyle/>
+                    <a:p>
+                      <a:pPr>
+                        <a:lnSpc>
+                          <a:spcPts val="1600"/>
+                        </a:lnSpc>
+                        <a:spcAft>
+                          <a:spcPts val="0"/>
+                        </a:spcAft>
+                        <a:defRPr sz="1200" b="1">
+                          <a:solidFill>
+                            <a:srgbClr val="FFFFFF"/>
+                          </a:solidFill>
+                          <a:latin typeface="Arial"/>
+                        </a:defRPr>
+                      </a:pPr>
+                      <a:r>
+                        <a:t>Field</a:t>
+                      </a:r>
+                    </a:p>
+                  </a:txBody>
+                  <a:tcPr marL="82296" marR="82296" marT="64008" marB="64008">
+                    <a:solidFill>
+                      <a:srgbClr val="16787C"/>
+                    </a:solidFill>
+                  </a:tcPr>
+                </a:tc>
+                <a:tc>
+                  <a:txBody>
+                    <a:bodyPr wrap="none"/>
+                    <a:lstStyle/>
+                    <a:p>
+                      <a:pPr>
+                        <a:lnSpc>
+                          <a:spcPts val="1600"/>
+                        </a:lnSpc>
+                        <a:spcAft>
+                          <a:spcPts val="0"/>
+                        </a:spcAft>
+                        <a:defRPr sz="1200" b="1">
+                          <a:solidFill>
+                            <a:srgbClr val="FFFFFF"/>
+                          </a:solidFill>
+                          <a:latin typeface="Arial"/>
+                        </a:defRPr>
+                      </a:pPr>
+                      <a:r>
+                        <a:t>Recorded detail</a:t>
+                      </a:r>
+                    </a:p>
+                  </a:txBody>
+                  <a:tcPr marL="82296" marR="82296" marT="64008" marB="64008">
+                    <a:solidFill>
+                      <a:srgbClr val="16787C"/>
+                    </a:solidFill>
+                  </a:tcPr>
+                </a:tc>
+              </a:tr>
+            </a:tbl>
+          </a:graphicData>
+        </a:graphic>
+      </p:graphicFrame>
+      <p:graphicFrame>
+        <p:nvGraphicFramePr>
+          <p:cNvPr id="7" name="Table 6"/>
+          <p:cNvGraphicFramePr>
+            <a:graphicFrameLocks noGrp="1"/>
+          </p:cNvGraphicFramePr>
+          <p:nvPr/>
+        </p:nvGraphicFramePr>
+        <p:xfrm>
+          <a:off x="365760" y="1700784"/>
+          <a:ext cx="8412479" cy="755904"/>
+        </p:xfrm>
+        <a:graphic>
+          <a:graphicData uri="http://schemas.openxmlformats.org/drawingml/2006/table">
+            <a:tbl>
+              <a:tblPr firstRow="1" bandRow="1">
+                <a:tableStyleId>{5C22544A-7EE6-4342-B048-85BDC9FD1C3A}</a:tableStyleId>
+              </a:tblPr>
+              <a:tblGrid>
+                <a:gridCol w="2271369"/>
+                <a:gridCol w="6141110"/>
+              </a:tblGrid>
+              <a:tr h="755904">
+                <a:tc>
+                  <a:txBody>
+                    <a:bodyPr wrap="none"/>
+                    <a:lstStyle/>
+                    <a:p>
+                      <a:pPr>
+                        <a:lnSpc>
+                          <a:spcPts val="1600"/>
+                        </a:lnSpc>
+                        <a:spcAft>
+                          <a:spcPts val="0"/>
+                        </a:spcAft>
+                        <a:defRPr sz="1200" b="0">
+                          <a:solidFill>
+                            <a:srgbClr val="21243A"/>
+                          </a:solidFill>
+                          <a:latin typeface="Arial"/>
+                        </a:defRPr>
+                      </a:pPr>
+                      <a:r>
+                        <a:t>Software (Harvard)</a:t>
+                      </a:r>
+                    </a:p>
+                  </a:txBody>
+                  <a:tcPr marL="82296" marR="82296" marT="64008" marB="64008">
+                    <a:solidFill>
+                      <a:srgbClr val="F1F7F7"/>
+                    </a:solidFill>
+                  </a:tcPr>
+                </a:tc>
+                <a:tc>
+                  <a:txBody>
+                    <a:bodyPr wrap="none"/>
+                    <a:lstStyle/>
+                    <a:p>
+                      <a:pPr>
+                        <a:lnSpc>
+                          <a:spcPts val="1600"/>
+                        </a:lnSpc>
+                        <a:spcAft>
+                          <a:spcPts val="0"/>
+                        </a:spcAft>
+                        <a:defRPr sz="1200" b="0">
+                          <a:solidFill>
+                            <a:srgbClr val="21243A"/>
+                          </a:solidFill>
+                          <a:latin typeface="Arial"/>
+                        </a:defRPr>
+                      </a:pPr>
+                      <a:r>
+                        <a:t>Martin, S. (2026) SDA Vision: Synthetic-media Discourse Analysis (version 0.1.0)</a:t>
+                      </a:r>
+                    </a:p>
+                    <a:p>
+                      <a:pPr>
+                        <a:lnSpc>
+                          <a:spcPts val="1600"/>
+                        </a:lnSpc>
+                        <a:spcAft>
+                          <a:spcPts val="0"/>
+                        </a:spcAft>
+                        <a:defRPr sz="1200" b="0">
+                          <a:solidFill>
+                            <a:srgbClr val="21243A"/>
+                          </a:solidFill>
+                          <a:latin typeface="Arial"/>
+                        </a:defRPr>
+                      </a:pPr>
+                      <a:r>
+                        <a:t>[Computer software]. Manchester Metropolitan University. Available at:</a:t>
+                      </a:r>
+                    </a:p>
+                    <a:p>
+                      <a:pPr>
+                        <a:lnSpc>
+                          <a:spcPts val="1600"/>
+                        </a:lnSpc>
+                        <a:spcAft>
+                          <a:spcPts val="0"/>
+                        </a:spcAft>
+                        <a:defRPr sz="1200" b="0">
+                          <a:solidFill>
+                            <a:srgbClr val="21243A"/>
+                          </a:solidFill>
+                          <a:latin typeface="Arial"/>
+                        </a:defRPr>
+                      </a:pPr>
+                      <a:r>
+                        <a:t>https://sdavision.io/</a:t>
+                      </a:r>
+                    </a:p>
+                  </a:txBody>
+                  <a:tcPr marL="82296" marR="82296" marT="64008" marB="64008">
+                    <a:solidFill>
+                      <a:srgbClr val="F1F7F7"/>
+                    </a:solidFill>
+                  </a:tcPr>
+                </a:tc>
+              </a:tr>
+            </a:tbl>
+          </a:graphicData>
+        </a:graphic>
+      </p:graphicFrame>
+      <p:graphicFrame>
+        <p:nvGraphicFramePr>
+          <p:cNvPr id="8" name="Table 7"/>
+          <p:cNvGraphicFramePr>
+            <a:graphicFrameLocks noGrp="1"/>
+          </p:cNvGraphicFramePr>
+          <p:nvPr/>
+        </p:nvGraphicFramePr>
+        <p:xfrm>
+          <a:off x="365760" y="2456688"/>
+          <a:ext cx="8412479" cy="552704"/>
+        </p:xfrm>
+        <a:graphic>
+          <a:graphicData uri="http://schemas.openxmlformats.org/drawingml/2006/table">
+            <a:tbl>
+              <a:tblPr firstRow="1" bandRow="1">
+                <a:tableStyleId>{5C22544A-7EE6-4342-B048-85BDC9FD1C3A}</a:tableStyleId>
+              </a:tblPr>
+              <a:tblGrid>
+                <a:gridCol w="2271369"/>
+                <a:gridCol w="6141110"/>
+              </a:tblGrid>
+              <a:tr h="552704">
+                <a:tc>
+                  <a:txBody>
+                    <a:bodyPr wrap="none"/>
+                    <a:lstStyle/>
+                    <a:p>
+                      <a:pPr>
+                        <a:lnSpc>
+                          <a:spcPts val="1600"/>
+                        </a:lnSpc>
+                        <a:spcAft>
+                          <a:spcPts val="0"/>
+                        </a:spcAft>
+                        <a:defRPr sz="1200" b="0">
+                          <a:solidFill>
+                            <a:srgbClr val="21243A"/>
+                          </a:solidFill>
+                          <a:latin typeface="Arial"/>
+                        </a:defRPr>
+                      </a:pPr>
+                      <a:r>
+                        <a:t>Software creator</a:t>
+                      </a:r>
+                    </a:p>
+                  </a:txBody>
+                  <a:tcPr marL="82296" marR="82296" marT="64008" marB="64008">
+                    <a:solidFill>
+                      <a:srgbClr val="FFFFFF"/>
+                    </a:solidFill>
+                  </a:tcPr>
+                </a:tc>
+                <a:tc>
+                  <a:txBody>
+                    <a:bodyPr wrap="none"/>
+                    <a:lstStyle/>
+                    <a:p>
+                      <a:pPr>
+                        <a:lnSpc>
+                          <a:spcPts val="1600"/>
+                        </a:lnSpc>
+                        <a:spcAft>
+                          <a:spcPts val="0"/>
+                        </a:spcAft>
+                        <a:defRPr sz="1200" b="0">
+                          <a:solidFill>
+                            <a:srgbClr val="21243A"/>
+                          </a:solidFill>
+                          <a:latin typeface="Arial"/>
+                        </a:defRPr>
+                      </a:pPr>
+                      <a:r>
+                        <a:t>Dr Sam Martin, Smart Data Research UK (UKRI) Fellow, Manchester Metropolitan</a:t>
+                      </a:r>
+                    </a:p>
+                    <a:p>
+                      <a:pPr>
+                        <a:lnSpc>
+                          <a:spcPts val="1600"/>
+                        </a:lnSpc>
+                        <a:spcAft>
+                          <a:spcPts val="0"/>
+                        </a:spcAft>
+                        <a:defRPr sz="1200" b="0">
+                          <a:solidFill>
+                            <a:srgbClr val="21243A"/>
+                          </a:solidFill>
+                          <a:latin typeface="Arial"/>
+                        </a:defRPr>
+                      </a:pPr>
+                      <a:r>
+                        <a:t>University (MMU). ORCID: https://orcid.org/0000-0002-4466-8374.</a:t>
+                      </a:r>
+                    </a:p>
+                  </a:txBody>
+                  <a:tcPr marL="82296" marR="82296" marT="64008" marB="64008">
+                    <a:solidFill>
+                      <a:srgbClr val="FFFFFF"/>
+                    </a:solidFill>
+                  </a:tcPr>
+                </a:tc>
+              </a:tr>
+            </a:tbl>
+          </a:graphicData>
+        </a:graphic>
+      </p:graphicFrame>
+      <p:graphicFrame>
+        <p:nvGraphicFramePr>
+          <p:cNvPr id="9" name="Table 8"/>
+          <p:cNvGraphicFramePr>
+            <a:graphicFrameLocks noGrp="1"/>
+          </p:cNvGraphicFramePr>
+          <p:nvPr/>
+        </p:nvGraphicFramePr>
+        <p:xfrm>
+          <a:off x="365760" y="3009392"/>
+          <a:ext cx="8412479" cy="552704"/>
+        </p:xfrm>
+        <a:graphic>
+          <a:graphicData uri="http://schemas.openxmlformats.org/drawingml/2006/table">
+            <a:tbl>
+              <a:tblPr firstRow="1" bandRow="1">
+                <a:tableStyleId>{5C22544A-7EE6-4342-B048-85BDC9FD1C3A}</a:tableStyleId>
+              </a:tblPr>
+              <a:tblGrid>
+                <a:gridCol w="2271369"/>
+                <a:gridCol w="6141110"/>
+              </a:tblGrid>
+              <a:tr h="552704">
+                <a:tc>
+                  <a:txBody>
+                    <a:bodyPr wrap="none"/>
+                    <a:lstStyle/>
+                    <a:p>
+                      <a:pPr>
+                        <a:lnSpc>
+                          <a:spcPts val="1600"/>
+                        </a:lnSpc>
+                        <a:spcAft>
+                          <a:spcPts val="0"/>
+                        </a:spcAft>
+                        <a:defRPr sz="1200" b="0">
+                          <a:solidFill>
+                            <a:srgbClr val="21243A"/>
+                          </a:solidFill>
+                          <a:latin typeface="Arial"/>
+                        </a:defRPr>
+                      </a:pPr>
+                      <a:r>
+                        <a:t>Funding acknowledgement</a:t>
+                      </a:r>
+                    </a:p>
+                  </a:txBody>
+                  <a:tcPr marL="82296" marR="82296" marT="64008" marB="64008">
+                    <a:solidFill>
+                      <a:srgbClr val="F1F7F7"/>
+                    </a:solidFill>
+                  </a:tcPr>
+                </a:tc>
+                <a:tc>
+                  <a:txBody>
+                    <a:bodyPr wrap="none"/>
+                    <a:lstStyle/>
+                    <a:p>
+                      <a:pPr>
+                        <a:lnSpc>
+                          <a:spcPts val="1600"/>
+                        </a:lnSpc>
+                        <a:spcAft>
+                          <a:spcPts val="0"/>
+                        </a:spcAft>
+                        <a:defRPr sz="1200" b="0">
+                          <a:solidFill>
+                            <a:srgbClr val="21243A"/>
+                          </a:solidFill>
+                          <a:latin typeface="Arial"/>
+                        </a:defRPr>
+                      </a:pPr>
+                      <a:r>
+                        <a:t>This work was supported by Smart Data Research UK, a UKRI investment; Grant</a:t>
+                      </a:r>
+                    </a:p>
+                    <a:p>
+                      <a:pPr>
+                        <a:lnSpc>
+                          <a:spcPts val="1600"/>
+                        </a:lnSpc>
+                        <a:spcAft>
+                          <a:spcPts val="0"/>
+                        </a:spcAft>
+                        <a:defRPr sz="1200" b="0">
+                          <a:solidFill>
+                            <a:srgbClr val="21243A"/>
+                          </a:solidFill>
+                          <a:latin typeface="Arial"/>
+                        </a:defRPr>
+                      </a:pPr>
+                      <a:r>
+                        <a:t>number UKRI4010.</a:t>
+                      </a:r>
+                    </a:p>
+                  </a:txBody>
+                  <a:tcPr marL="82296" marR="82296" marT="64008" marB="64008">
+                    <a:solidFill>
+                      <a:srgbClr val="F1F7F7"/>
+                    </a:solidFill>
+                  </a:tcPr>
+                </a:tc>
+              </a:tr>
+            </a:tbl>
+          </a:graphicData>
+        </a:graphic>
+      </p:graphicFrame>
+      <p:graphicFrame>
+        <p:nvGraphicFramePr>
+          <p:cNvPr id="10" name="Table 9"/>
+          <p:cNvGraphicFramePr>
+            <a:graphicFrameLocks noGrp="1"/>
+          </p:cNvGraphicFramePr>
+          <p:nvPr/>
+        </p:nvGraphicFramePr>
+        <p:xfrm>
+          <a:off x="365760" y="3562095"/>
+          <a:ext cx="8412479" cy="755904"/>
+        </p:xfrm>
+        <a:graphic>
+          <a:graphicData uri="http://schemas.openxmlformats.org/drawingml/2006/table">
+            <a:tbl>
+              <a:tblPr firstRow="1" bandRow="1">
+                <a:tableStyleId>{5C22544A-7EE6-4342-B048-85BDC9FD1C3A}</a:tableStyleId>
+              </a:tblPr>
+              <a:tblGrid>
+                <a:gridCol w="2271369"/>
+                <a:gridCol w="6141110"/>
+              </a:tblGrid>
+              <a:tr h="755904">
+                <a:tc>
+                  <a:txBody>
+                    <a:bodyPr wrap="none"/>
+                    <a:lstStyle/>
+                    <a:p>
+                      <a:pPr>
+                        <a:lnSpc>
+                          <a:spcPts val="1600"/>
+                        </a:lnSpc>
+                        <a:spcAft>
+                          <a:spcPts val="0"/>
+                        </a:spcAft>
+                        <a:defRPr sz="1200" b="0">
+                          <a:solidFill>
+                            <a:srgbClr val="21243A"/>
+                          </a:solidFill>
+                          <a:latin typeface="Arial"/>
+                        </a:defRPr>
+                      </a:pPr>
+                      <a:r>
+                        <a:t>Analysis record</a:t>
+                      </a:r>
+                    </a:p>
+                  </a:txBody>
+                  <a:tcPr marL="82296" marR="82296" marT="64008" marB="64008">
+                    <a:solidFill>
+                      <a:srgbClr val="FFFFFF"/>
+                    </a:solidFill>
+                  </a:tcPr>
+                </a:tc>
+                <a:tc>
+                  <a:txBody>
+                    <a:bodyPr wrap="none"/>
+                    <a:lstStyle/>
+                    <a:p>
+                      <a:pPr>
+                        <a:lnSpc>
+                          <a:spcPts val="1600"/>
+                        </a:lnSpc>
+                        <a:spcAft>
+                          <a:spcPts val="0"/>
+                        </a:spcAft>
+                        <a:defRPr sz="1200" b="0">
+                          <a:solidFill>
+                            <a:srgbClr val="21243A"/>
+                          </a:solidFill>
+                          <a:latin typeface="Arial"/>
+                        </a:defRPr>
+                      </a:pPr>
+                      <a:r>
+                        <a:t>File: journal-diagram.png; media type: image; recorded at:</a:t>
+                      </a:r>
+                    </a:p>
+                    <a:p>
+                      <a:pPr>
+                        <a:lnSpc>
+                          <a:spcPts val="1600"/>
+                        </a:lnSpc>
+                        <a:spcAft>
+                          <a:spcPts val="0"/>
+                        </a:spcAft>
+                        <a:defRPr sz="1200" b="0">
+                          <a:solidFill>
+                            <a:srgbClr val="21243A"/>
+                          </a:solidFill>
+                          <a:latin typeface="Arial"/>
+                        </a:defRPr>
+                      </a:pPr>
+                      <a:r>
+                        <a:t>2026-09-26T22:31:05+00:00; models: claude-opus-5-5, gemini-3.8-flash,</a:t>
+                      </a:r>
+                    </a:p>
+                    <a:p>
+                      <a:pPr>
+                        <a:lnSpc>
+                          <a:spcPts val="1600"/>
+                        </a:lnSpc>
+                        <a:spcAft>
+                          <a:spcPts val="0"/>
+                        </a:spcAft>
+                        <a:defRPr sz="1200" b="0">
+                          <a:solidFill>
+                            <a:srgbClr val="21243A"/>
+                          </a:solidFill>
+                          <a:latin typeface="Arial"/>
+                        </a:defRPr>
+                      </a:pPr>
+                      <a:r>
+                        <a:t>gpt-6-astra.</a:t>
+                      </a:r>
+                    </a:p>
+                  </a:txBody>
+                  <a:tcPr marL="82296" marR="82296" marT="64008" marB="64008">
+                    <a:solidFill>
+                      <a:srgbClr val="FFFFFF"/>
+                    </a:solidFill>
+                  </a:tcPr>
+                </a:tc>
+              </a:tr>
+            </a:tbl>
+          </a:graphicData>
+        </a:graphic>
+      </p:graphicFrame>
+    </p:spTree>
+  </p:cSld>
+  <p:clrMapOvr>
+    <a:masterClrMapping/>
+  </p:clrMapOvr>
+</p:sld>
+</file>
+
+<file path=ppt/slides/slide19.xml><?xml version="1.0" encoding="utf-8"?>
+<p:sld xmlns:a="http://schemas.openxmlformats.org/drawingml/2006/main" xmlns:p="http://schemas.openxmlformats.org/presentationml/2006/main" xmlns:r="http://schemas.openxmlformats.org/officeDocument/2006/relationships">
+  <p:cSld>
+    <p:spTree>
+      <p:nvGrpSpPr>
+        <p:cNvPr id="1" name=""/>
+        <p:cNvGrpSpPr/>
+        <p:nvPr/>
+      </p:nvGrpSpPr>
+      <p:grpSpPr/>
+      <p:sp>
+        <p:nvSpPr>
+          <p:cNvPr id="2" name="TextBox 1"/>
+          <p:cNvSpPr txBox="1"/>
+          <p:nvPr/>
+        </p:nvSpPr>
+        <p:spPr>
+          <a:xfrm>
+            <a:off x="365760" y="219456"/>
+            <a:ext cx="8412480" cy="228600"/>
+          </a:xfrm>
+          <a:prstGeom prst="rect">
+            <a:avLst/>
+          </a:prstGeom>
+          <a:noFill/>
+        </p:spPr>
+        <p:txBody>
+          <a:bodyPr wrap="square" lIns="0" rIns="0" tIns="0" bIns="0">
+            <a:spAutoFit/>
+          </a:bodyPr>
+          <a:lstStyle/>
+          <a:p>
+            <a:pPr>
+              <a:lnSpc>
+                <a:spcPct val="115000"/>
+              </a:lnSpc>
+              <a:spcAft>
+                <a:spcPts val="0"/>
+              </a:spcAft>
+              <a:defRPr sz="1100" b="1">
+                <a:solidFill>
+                  <a:srgbClr val="C5006A"/>
+                </a:solidFill>
+                <a:latin typeface="Arial"/>
+              </a:defRPr>
+            </a:pPr>
+            <a:r>
+              <a:t>SDA VISION / RESEARCH REPORT</a:t>
+            </a:r>
+          </a:p>
+        </p:txBody>
+      </p:sp>
+      <p:sp>
+        <p:nvSpPr>
+          <p:cNvPr id="3" name="TextBox 2"/>
+          <p:cNvSpPr txBox="1"/>
+          <p:nvPr/>
+        </p:nvSpPr>
+        <p:spPr>
+          <a:xfrm>
+            <a:off x="365760" y="658368"/>
+            <a:ext cx="8412480" cy="612648"/>
+          </a:xfrm>
+          <a:prstGeom prst="rect">
+            <a:avLst/>
+          </a:prstGeom>
+          <a:noFill/>
+        </p:spPr>
+        <p:txBody>
+          <a:bodyPr wrap="square" lIns="0" rIns="0" tIns="0" bIns="0">
+            <a:spAutoFit/>
+          </a:bodyPr>
+          <a:lstStyle/>
+          <a:p>
+            <a:pPr>
+              <a:lnSpc>
+                <a:spcPct val="115000"/>
+              </a:lnSpc>
+              <a:spcAft>
+                <a:spcPts val="0"/>
+              </a:spcAft>
+              <a:defRPr sz="2200" b="1">
+                <a:solidFill>
+                  <a:srgbClr val="21243A"/>
+                </a:solidFill>
+                <a:latin typeface="Arial"/>
+              </a:defRPr>
+            </a:pPr>
+            <a:r>
+              <a:t>File and analysis record</a:t>
+            </a:r>
+          </a:p>
+        </p:txBody>
+      </p:sp>
+      <p:sp>
+        <p:nvSpPr>
+          <p:cNvPr id="4" name="TextBox 3"/>
+          <p:cNvSpPr txBox="1"/>
+          <p:nvPr/>
+        </p:nvSpPr>
+        <p:spPr>
+          <a:xfrm>
+            <a:off x="365760" y="6291072"/>
+            <a:ext cx="8001000" cy="365760"/>
+          </a:xfrm>
+          <a:prstGeom prst="rect">
+            <a:avLst/>
+          </a:prstGeom>
+          <a:noFill/>
+        </p:spPr>
+        <p:txBody>
+          <a:bodyPr wrap="square" lIns="0" rIns="0" tIns="0" bIns="0">
+            <a:spAutoFit/>
+          </a:bodyPr>
+          <a:lstStyle/>
+          <a:p>
+            <a:pPr>
+              <a:lnSpc>
+                <a:spcPct val="115000"/>
+              </a:lnSpc>
+              <a:spcAft>
+                <a:spcPts val="0"/>
+              </a:spcAft>
+              <a:defRPr sz="800" b="0">
+                <a:solidFill>
+                  <a:srgbClr val="545B6D"/>
+                </a:solidFill>
+                <a:latin typeface="Arial"/>
+              </a:defRPr>
+            </a:pPr>
+            <a:r>
+              <a:t>Research assessment. Ratings are not calibrated probabilities.</a:t>
+            </a:r>
+          </a:p>
+        </p:txBody>
+      </p:sp>
+      <p:sp>
+        <p:nvSpPr>
+          <p:cNvPr id="5" name="TextBox 4"/>
+          <p:cNvSpPr txBox="1"/>
+          <p:nvPr/>
+        </p:nvSpPr>
+        <p:spPr>
+          <a:xfrm>
+            <a:off x="8394192" y="6318504"/>
+            <a:ext cx="365760" cy="228600"/>
+          </a:xfrm>
+          <a:prstGeom prst="rect">
+            <a:avLst/>
+          </a:prstGeom>
+          <a:noFill/>
+        </p:spPr>
+        <p:txBody>
+          <a:bodyPr wrap="square" lIns="0" rIns="0" tIns="0" bIns="0">
+            <a:spAutoFit/>
+          </a:bodyPr>
+          <a:lstStyle/>
+          <a:p>
+            <a:pPr>
+              <a:lnSpc>
+                <a:spcPct val="115000"/>
+              </a:lnSpc>
+              <a:spcAft>
+                <a:spcPts val="0"/>
+              </a:spcAft>
+              <a:defRPr sz="900" b="0">
+                <a:solidFill>
+                  <a:srgbClr val="545B6D"/>
+                </a:solidFill>
+                <a:latin typeface="Arial"/>
+              </a:defRPr>
+            </a:pPr>
+            <a:r>
+              <a:t>19</a:t>
             </a:r>
           </a:p>
         </p:txBody>

--- a/site/showcase/exports/journal_diagram.pptx
+++ b/site/showcase/exports/journal_diagram.pptx
@@ -1480,7 +1480,7 @@
           </a:p>
           <a:p>
             <a:r>
-              <a:t>Software (Harvard) | Martin, S. (2026) SDA Vision: Synthetic-media Discourse Analysis (version 0.1.0) [Computer software]. Manchester Metropolitan University. Available at: https://sdavision.io/</a:t>
+              <a:t>Software citation | Martin, S. (2026) SDA Vision: Synthetic-media Discourse Analysis (version 0.1.0) [Computer software]. Manchester Metropolitan University. Available at: https://sdavision.io/</a:t>
             </a:r>
           </a:p>
           <a:p>
@@ -11926,7 +11926,7 @@
                         </a:defRPr>
                       </a:pPr>
                       <a:r>
-                        <a:t>Software (Harvard)</a:t>
+                        <a:t>Software citation</a:t>
                       </a:r>
                     </a:p>
                   </a:txBody>

--- a/site/showcase/exports/journal_diagram.pptx
+++ b/site/showcase/exports/journal_diagram.pptx
@@ -23,7 +23,6 @@
     <p:sldId id="271" r:id="rId23"/>
     <p:sldId id="272" r:id="rId24"/>
     <p:sldId id="273" r:id="rId25"/>
-    <p:sldId id="274" r:id="rId26"/>
   </p:sldIdLst>
   <p:sldSz cx="9144000" cy="6858000" type="screen4x3"/>
   <p:notesSz cx="6858000" cy="9144000"/>
@@ -1426,101 +1425,6 @@
 </file>
 
 <file path=ppt/notesSlides/notesSlide18.xml><?xml version="1.0" encoding="utf-8"?>
-<p:notes xmlns:a="http://schemas.openxmlformats.org/drawingml/2006/main" xmlns:p="http://schemas.openxmlformats.org/presentationml/2006/main" xmlns:r="http://schemas.openxmlformats.org/officeDocument/2006/relationships">
-  <p:cSld>
-    <p:spTree>
-      <p:nvGrpSpPr>
-        <p:cNvPr id="1" name=""/>
-        <p:cNvGrpSpPr/>
-        <p:nvPr/>
-      </p:nvGrpSpPr>
-      <p:grpSpPr>
-        <a:xfrm>
-          <a:off x="0" y="0"/>
-          <a:ext cx="0" cy="0"/>
-          <a:chOff x="0" y="0"/>
-          <a:chExt cx="0" cy="0"/>
-        </a:xfrm>
-      </p:grpSpPr>
-      <p:sp>
-        <p:nvSpPr>
-          <p:cNvPr id="2" name="Slide Image Placeholder 1"/>
-          <p:cNvSpPr>
-            <a:spLocks noGrp="1"/>
-          </p:cNvSpPr>
-          <p:nvPr>
-            <p:ph type="sldImg" idx="2"/>
-          </p:nvPr>
-        </p:nvSpPr>
-        <p:spPr/>
-      </p:sp>
-      <p:sp>
-        <p:nvSpPr>
-          <p:cNvPr id="3" name="Notes Placeholder 2"/>
-          <p:cNvSpPr>
-            <a:spLocks noGrp="1"/>
-          </p:cNvSpPr>
-          <p:nvPr>
-            <p:ph type="body" idx="3" sz="quarter"/>
-          </p:nvPr>
-        </p:nvSpPr>
-        <p:spPr/>
-        <p:txBody>
-          <a:bodyPr/>
-          <a:lstStyle/>
-          <a:p>
-            <a:r>
-              <a:t>journal-diagram.png</a:t>
-            </a:r>
-          </a:p>
-          <a:p>
-            <a:r>
-              <a:t>Cite this analysis</a:t>
-            </a:r>
-          </a:p>
-          <a:p>
-            <a:r>
-              <a:t>Software citation | Martin, S. (2026) SDA Vision: Synthetic-media Discourse Analysis (version 0.1.0) [Computer software]. Manchester Metropolitan University. Available at: https://sdavision.io/</a:t>
-            </a:r>
-          </a:p>
-          <a:p>
-            <a:r>
-              <a:t>Software creator | Dr Sam Martin, Smart Data Research UK (UKRI) Fellow, Manchester Metropolitan University (MMU). ORCID: https://orcid.org/0000-0002-4466-8374.</a:t>
-            </a:r>
-          </a:p>
-          <a:p>
-            <a:r>
-              <a:t>Funding acknowledgement | This work was supported by Smart Data Research UK, a UKRI investment; Grant number UKRI4010.</a:t>
-            </a:r>
-          </a:p>
-          <a:p>
-            <a:r>
-              <a:t>Analysis record | File: journal-diagram.png; media type: image; recorded at: 2026-09-26T22:31:05+00:00; models: claude-opus-5-5, gemini-3.8-flash, gpt-6-astra.</a:t>
-            </a:r>
-          </a:p>
-        </p:txBody>
-      </p:sp>
-      <p:sp>
-        <p:nvSpPr>
-          <p:cNvPr id="4" name="Slide Number Placeholder 3"/>
-          <p:cNvSpPr>
-            <a:spLocks noGrp="1"/>
-          </p:cNvSpPr>
-          <p:nvPr>
-            <p:ph type="sldNum" idx="5" sz="quarter"/>
-          </p:nvPr>
-        </p:nvSpPr>
-        <p:spPr/>
-      </p:sp>
-    </p:spTree>
-  </p:cSld>
-  <p:clrMapOvr>
-    <a:masterClrMapping/>
-  </p:clrMapOvr>
-</p:notes>
-</file>
-
-<file path=ppt/notesSlides/notesSlide19.xml><?xml version="1.0" encoding="utf-8"?>
 <p:notes xmlns:a="http://schemas.openxmlformats.org/drawingml/2006/main" xmlns:p="http://schemas.openxmlformats.org/presentationml/2006/main" xmlns:r="http://schemas.openxmlformats.org/officeDocument/2006/relationships">
   <p:cSld>
     <p:spTree>
@@ -11706,7 +11610,7 @@
               </a:defRPr>
             </a:pPr>
             <a:r>
-              <a:t>Cite this analysis</a:t>
+              <a:t>File and analysis record</a:t>
             </a:r>
           </a:p>
         </p:txBody>
@@ -11791,746 +11695,6 @@
             </a:pPr>
             <a:r>
               <a:t>18</a:t>
-            </a:r>
-          </a:p>
-        </p:txBody>
-      </p:sp>
-      <p:graphicFrame>
-        <p:nvGraphicFramePr>
-          <p:cNvPr id="6" name="Table 5"/>
-          <p:cNvGraphicFramePr>
-            <a:graphicFrameLocks noGrp="1"/>
-          </p:cNvGraphicFramePr>
-          <p:nvPr/>
-        </p:nvGraphicFramePr>
-        <p:xfrm>
-          <a:off x="365760" y="1353312"/>
-          <a:ext cx="8412479" cy="347472"/>
-        </p:xfrm>
-        <a:graphic>
-          <a:graphicData uri="http://schemas.openxmlformats.org/drawingml/2006/table">
-            <a:tbl>
-              <a:tblPr firstRow="1" bandRow="1">
-                <a:tableStyleId>{5C22544A-7EE6-4342-B048-85BDC9FD1C3A}</a:tableStyleId>
-              </a:tblPr>
-              <a:tblGrid>
-                <a:gridCol w="2271369"/>
-                <a:gridCol w="6141110"/>
-              </a:tblGrid>
-              <a:tr h="347472">
-                <a:tc>
-                  <a:txBody>
-                    <a:bodyPr wrap="none"/>
-                    <a:lstStyle/>
-                    <a:p>
-                      <a:pPr>
-                        <a:lnSpc>
-                          <a:spcPts val="1600"/>
-                        </a:lnSpc>
-                        <a:spcAft>
-                          <a:spcPts val="0"/>
-                        </a:spcAft>
-                        <a:defRPr sz="1200" b="1">
-                          <a:solidFill>
-                            <a:srgbClr val="FFFFFF"/>
-                          </a:solidFill>
-                          <a:latin typeface="Arial"/>
-                        </a:defRPr>
-                      </a:pPr>
-                      <a:r>
-                        <a:t>Field</a:t>
-                      </a:r>
-                    </a:p>
-                  </a:txBody>
-                  <a:tcPr marL="82296" marR="82296" marT="64008" marB="64008">
-                    <a:solidFill>
-                      <a:srgbClr val="16787C"/>
-                    </a:solidFill>
-                  </a:tcPr>
-                </a:tc>
-                <a:tc>
-                  <a:txBody>
-                    <a:bodyPr wrap="none"/>
-                    <a:lstStyle/>
-                    <a:p>
-                      <a:pPr>
-                        <a:lnSpc>
-                          <a:spcPts val="1600"/>
-                        </a:lnSpc>
-                        <a:spcAft>
-                          <a:spcPts val="0"/>
-                        </a:spcAft>
-                        <a:defRPr sz="1200" b="1">
-                          <a:solidFill>
-                            <a:srgbClr val="FFFFFF"/>
-                          </a:solidFill>
-                          <a:latin typeface="Arial"/>
-                        </a:defRPr>
-                      </a:pPr>
-                      <a:r>
-                        <a:t>Recorded detail</a:t>
-                      </a:r>
-                    </a:p>
-                  </a:txBody>
-                  <a:tcPr marL="82296" marR="82296" marT="64008" marB="64008">
-                    <a:solidFill>
-                      <a:srgbClr val="16787C"/>
-                    </a:solidFill>
-                  </a:tcPr>
-                </a:tc>
-              </a:tr>
-            </a:tbl>
-          </a:graphicData>
-        </a:graphic>
-      </p:graphicFrame>
-      <p:graphicFrame>
-        <p:nvGraphicFramePr>
-          <p:cNvPr id="7" name="Table 6"/>
-          <p:cNvGraphicFramePr>
-            <a:graphicFrameLocks noGrp="1"/>
-          </p:cNvGraphicFramePr>
-          <p:nvPr/>
-        </p:nvGraphicFramePr>
-        <p:xfrm>
-          <a:off x="365760" y="1700784"/>
-          <a:ext cx="8412479" cy="755904"/>
-        </p:xfrm>
-        <a:graphic>
-          <a:graphicData uri="http://schemas.openxmlformats.org/drawingml/2006/table">
-            <a:tbl>
-              <a:tblPr firstRow="1" bandRow="1">
-                <a:tableStyleId>{5C22544A-7EE6-4342-B048-85BDC9FD1C3A}</a:tableStyleId>
-              </a:tblPr>
-              <a:tblGrid>
-                <a:gridCol w="2271369"/>
-                <a:gridCol w="6141110"/>
-              </a:tblGrid>
-              <a:tr h="755904">
-                <a:tc>
-                  <a:txBody>
-                    <a:bodyPr wrap="none"/>
-                    <a:lstStyle/>
-                    <a:p>
-                      <a:pPr>
-                        <a:lnSpc>
-                          <a:spcPts val="1600"/>
-                        </a:lnSpc>
-                        <a:spcAft>
-                          <a:spcPts val="0"/>
-                        </a:spcAft>
-                        <a:defRPr sz="1200" b="0">
-                          <a:solidFill>
-                            <a:srgbClr val="21243A"/>
-                          </a:solidFill>
-                          <a:latin typeface="Arial"/>
-                        </a:defRPr>
-                      </a:pPr>
-                      <a:r>
-                        <a:t>Software citation</a:t>
-                      </a:r>
-                    </a:p>
-                  </a:txBody>
-                  <a:tcPr marL="82296" marR="82296" marT="64008" marB="64008">
-                    <a:solidFill>
-                      <a:srgbClr val="F1F7F7"/>
-                    </a:solidFill>
-                  </a:tcPr>
-                </a:tc>
-                <a:tc>
-                  <a:txBody>
-                    <a:bodyPr wrap="none"/>
-                    <a:lstStyle/>
-                    <a:p>
-                      <a:pPr>
-                        <a:lnSpc>
-                          <a:spcPts val="1600"/>
-                        </a:lnSpc>
-                        <a:spcAft>
-                          <a:spcPts val="0"/>
-                        </a:spcAft>
-                        <a:defRPr sz="1200" b="0">
-                          <a:solidFill>
-                            <a:srgbClr val="21243A"/>
-                          </a:solidFill>
-                          <a:latin typeface="Arial"/>
-                        </a:defRPr>
-                      </a:pPr>
-                      <a:r>
-                        <a:t>Martin, S. (2026) SDA Vision: Synthetic-media Discourse Analysis (version 0.1.0)</a:t>
-                      </a:r>
-                    </a:p>
-                    <a:p>
-                      <a:pPr>
-                        <a:lnSpc>
-                          <a:spcPts val="1600"/>
-                        </a:lnSpc>
-                        <a:spcAft>
-                          <a:spcPts val="0"/>
-                        </a:spcAft>
-                        <a:defRPr sz="1200" b="0">
-                          <a:solidFill>
-                            <a:srgbClr val="21243A"/>
-                          </a:solidFill>
-                          <a:latin typeface="Arial"/>
-                        </a:defRPr>
-                      </a:pPr>
-                      <a:r>
-                        <a:t>[Computer software]. Manchester Metropolitan University. Available at:</a:t>
-                      </a:r>
-                    </a:p>
-                    <a:p>
-                      <a:pPr>
-                        <a:lnSpc>
-                          <a:spcPts val="1600"/>
-                        </a:lnSpc>
-                        <a:spcAft>
-                          <a:spcPts val="0"/>
-                        </a:spcAft>
-                        <a:defRPr sz="1200" b="0">
-                          <a:solidFill>
-                            <a:srgbClr val="21243A"/>
-                          </a:solidFill>
-                          <a:latin typeface="Arial"/>
-                        </a:defRPr>
-                      </a:pPr>
-                      <a:r>
-                        <a:t>https://sdavision.io/</a:t>
-                      </a:r>
-                    </a:p>
-                  </a:txBody>
-                  <a:tcPr marL="82296" marR="82296" marT="64008" marB="64008">
-                    <a:solidFill>
-                      <a:srgbClr val="F1F7F7"/>
-                    </a:solidFill>
-                  </a:tcPr>
-                </a:tc>
-              </a:tr>
-            </a:tbl>
-          </a:graphicData>
-        </a:graphic>
-      </p:graphicFrame>
-      <p:graphicFrame>
-        <p:nvGraphicFramePr>
-          <p:cNvPr id="8" name="Table 7"/>
-          <p:cNvGraphicFramePr>
-            <a:graphicFrameLocks noGrp="1"/>
-          </p:cNvGraphicFramePr>
-          <p:nvPr/>
-        </p:nvGraphicFramePr>
-        <p:xfrm>
-          <a:off x="365760" y="2456688"/>
-          <a:ext cx="8412479" cy="552704"/>
-        </p:xfrm>
-        <a:graphic>
-          <a:graphicData uri="http://schemas.openxmlformats.org/drawingml/2006/table">
-            <a:tbl>
-              <a:tblPr firstRow="1" bandRow="1">
-                <a:tableStyleId>{5C22544A-7EE6-4342-B048-85BDC9FD1C3A}</a:tableStyleId>
-              </a:tblPr>
-              <a:tblGrid>
-                <a:gridCol w="2271369"/>
-                <a:gridCol w="6141110"/>
-              </a:tblGrid>
-              <a:tr h="552704">
-                <a:tc>
-                  <a:txBody>
-                    <a:bodyPr wrap="none"/>
-                    <a:lstStyle/>
-                    <a:p>
-                      <a:pPr>
-                        <a:lnSpc>
-                          <a:spcPts val="1600"/>
-                        </a:lnSpc>
-                        <a:spcAft>
-                          <a:spcPts val="0"/>
-                        </a:spcAft>
-                        <a:defRPr sz="1200" b="0">
-                          <a:solidFill>
-                            <a:srgbClr val="21243A"/>
-                          </a:solidFill>
-                          <a:latin typeface="Arial"/>
-                        </a:defRPr>
-                      </a:pPr>
-                      <a:r>
-                        <a:t>Software creator</a:t>
-                      </a:r>
-                    </a:p>
-                  </a:txBody>
-                  <a:tcPr marL="82296" marR="82296" marT="64008" marB="64008">
-                    <a:solidFill>
-                      <a:srgbClr val="FFFFFF"/>
-                    </a:solidFill>
-                  </a:tcPr>
-                </a:tc>
-                <a:tc>
-                  <a:txBody>
-                    <a:bodyPr wrap="none"/>
-                    <a:lstStyle/>
-                    <a:p>
-                      <a:pPr>
-                        <a:lnSpc>
-                          <a:spcPts val="1600"/>
-                        </a:lnSpc>
-                        <a:spcAft>
-                          <a:spcPts val="0"/>
-                        </a:spcAft>
-                        <a:defRPr sz="1200" b="0">
-                          <a:solidFill>
-                            <a:srgbClr val="21243A"/>
-                          </a:solidFill>
-                          <a:latin typeface="Arial"/>
-                        </a:defRPr>
-                      </a:pPr>
-                      <a:r>
-                        <a:t>Dr Sam Martin, Smart Data Research UK (UKRI) Fellow, Manchester Metropolitan</a:t>
-                      </a:r>
-                    </a:p>
-                    <a:p>
-                      <a:pPr>
-                        <a:lnSpc>
-                          <a:spcPts val="1600"/>
-                        </a:lnSpc>
-                        <a:spcAft>
-                          <a:spcPts val="0"/>
-                        </a:spcAft>
-                        <a:defRPr sz="1200" b="0">
-                          <a:solidFill>
-                            <a:srgbClr val="21243A"/>
-                          </a:solidFill>
-                          <a:latin typeface="Arial"/>
-                        </a:defRPr>
-                      </a:pPr>
-                      <a:r>
-                        <a:t>University (MMU). ORCID: https://orcid.org/0000-0002-4466-8374.</a:t>
-                      </a:r>
-                    </a:p>
-                  </a:txBody>
-                  <a:tcPr marL="82296" marR="82296" marT="64008" marB="64008">
-                    <a:solidFill>
-                      <a:srgbClr val="FFFFFF"/>
-                    </a:solidFill>
-                  </a:tcPr>
-                </a:tc>
-              </a:tr>
-            </a:tbl>
-          </a:graphicData>
-        </a:graphic>
-      </p:graphicFrame>
-      <p:graphicFrame>
-        <p:nvGraphicFramePr>
-          <p:cNvPr id="9" name="Table 8"/>
-          <p:cNvGraphicFramePr>
-            <a:graphicFrameLocks noGrp="1"/>
-          </p:cNvGraphicFramePr>
-          <p:nvPr/>
-        </p:nvGraphicFramePr>
-        <p:xfrm>
-          <a:off x="365760" y="3009392"/>
-          <a:ext cx="8412479" cy="552704"/>
-        </p:xfrm>
-        <a:graphic>
-          <a:graphicData uri="http://schemas.openxmlformats.org/drawingml/2006/table">
-            <a:tbl>
-              <a:tblPr firstRow="1" bandRow="1">
-                <a:tableStyleId>{5C22544A-7EE6-4342-B048-85BDC9FD1C3A}</a:tableStyleId>
-              </a:tblPr>
-              <a:tblGrid>
-                <a:gridCol w="2271369"/>
-                <a:gridCol w="6141110"/>
-              </a:tblGrid>
-              <a:tr h="552704">
-                <a:tc>
-                  <a:txBody>
-                    <a:bodyPr wrap="none"/>
-                    <a:lstStyle/>
-                    <a:p>
-                      <a:pPr>
-                        <a:lnSpc>
-                          <a:spcPts val="1600"/>
-                        </a:lnSpc>
-                        <a:spcAft>
-                          <a:spcPts val="0"/>
-                        </a:spcAft>
-                        <a:defRPr sz="1200" b="0">
-                          <a:solidFill>
-                            <a:srgbClr val="21243A"/>
-                          </a:solidFill>
-                          <a:latin typeface="Arial"/>
-                        </a:defRPr>
-                      </a:pPr>
-                      <a:r>
-                        <a:t>Funding acknowledgement</a:t>
-                      </a:r>
-                    </a:p>
-                  </a:txBody>
-                  <a:tcPr marL="82296" marR="82296" marT="64008" marB="64008">
-                    <a:solidFill>
-                      <a:srgbClr val="F1F7F7"/>
-                    </a:solidFill>
-                  </a:tcPr>
-                </a:tc>
-                <a:tc>
-                  <a:txBody>
-                    <a:bodyPr wrap="none"/>
-                    <a:lstStyle/>
-                    <a:p>
-                      <a:pPr>
-                        <a:lnSpc>
-                          <a:spcPts val="1600"/>
-                        </a:lnSpc>
-                        <a:spcAft>
-                          <a:spcPts val="0"/>
-                        </a:spcAft>
-                        <a:defRPr sz="1200" b="0">
-                          <a:solidFill>
-                            <a:srgbClr val="21243A"/>
-                          </a:solidFill>
-                          <a:latin typeface="Arial"/>
-                        </a:defRPr>
-                      </a:pPr>
-                      <a:r>
-                        <a:t>This work was supported by Smart Data Research UK, a UKRI investment; Grant</a:t>
-                      </a:r>
-                    </a:p>
-                    <a:p>
-                      <a:pPr>
-                        <a:lnSpc>
-                          <a:spcPts val="1600"/>
-                        </a:lnSpc>
-                        <a:spcAft>
-                          <a:spcPts val="0"/>
-                        </a:spcAft>
-                        <a:defRPr sz="1200" b="0">
-                          <a:solidFill>
-                            <a:srgbClr val="21243A"/>
-                          </a:solidFill>
-                          <a:latin typeface="Arial"/>
-                        </a:defRPr>
-                      </a:pPr>
-                      <a:r>
-                        <a:t>number UKRI4010.</a:t>
-                      </a:r>
-                    </a:p>
-                  </a:txBody>
-                  <a:tcPr marL="82296" marR="82296" marT="64008" marB="64008">
-                    <a:solidFill>
-                      <a:srgbClr val="F1F7F7"/>
-                    </a:solidFill>
-                  </a:tcPr>
-                </a:tc>
-              </a:tr>
-            </a:tbl>
-          </a:graphicData>
-        </a:graphic>
-      </p:graphicFrame>
-      <p:graphicFrame>
-        <p:nvGraphicFramePr>
-          <p:cNvPr id="10" name="Table 9"/>
-          <p:cNvGraphicFramePr>
-            <a:graphicFrameLocks noGrp="1"/>
-          </p:cNvGraphicFramePr>
-          <p:nvPr/>
-        </p:nvGraphicFramePr>
-        <p:xfrm>
-          <a:off x="365760" y="3562095"/>
-          <a:ext cx="8412479" cy="755904"/>
-        </p:xfrm>
-        <a:graphic>
-          <a:graphicData uri="http://schemas.openxmlformats.org/drawingml/2006/table">
-            <a:tbl>
-              <a:tblPr firstRow="1" bandRow="1">
-                <a:tableStyleId>{5C22544A-7EE6-4342-B048-85BDC9FD1C3A}</a:tableStyleId>
-              </a:tblPr>
-              <a:tblGrid>
-                <a:gridCol w="2271369"/>
-                <a:gridCol w="6141110"/>
-              </a:tblGrid>
-              <a:tr h="755904">
-                <a:tc>
-                  <a:txBody>
-                    <a:bodyPr wrap="none"/>
-                    <a:lstStyle/>
-                    <a:p>
-                      <a:pPr>
-                        <a:lnSpc>
-                          <a:spcPts val="1600"/>
-                        </a:lnSpc>
-                        <a:spcAft>
-                          <a:spcPts val="0"/>
-                        </a:spcAft>
-                        <a:defRPr sz="1200" b="0">
-                          <a:solidFill>
-                            <a:srgbClr val="21243A"/>
-                          </a:solidFill>
-                          <a:latin typeface="Arial"/>
-                        </a:defRPr>
-                      </a:pPr>
-                      <a:r>
-                        <a:t>Analysis record</a:t>
-                      </a:r>
-                    </a:p>
-                  </a:txBody>
-                  <a:tcPr marL="82296" marR="82296" marT="64008" marB="64008">
-                    <a:solidFill>
-                      <a:srgbClr val="FFFFFF"/>
-                    </a:solidFill>
-                  </a:tcPr>
-                </a:tc>
-                <a:tc>
-                  <a:txBody>
-                    <a:bodyPr wrap="none"/>
-                    <a:lstStyle/>
-                    <a:p>
-                      <a:pPr>
-                        <a:lnSpc>
-                          <a:spcPts val="1600"/>
-                        </a:lnSpc>
-                        <a:spcAft>
-                          <a:spcPts val="0"/>
-                        </a:spcAft>
-                        <a:defRPr sz="1200" b="0">
-                          <a:solidFill>
-                            <a:srgbClr val="21243A"/>
-                          </a:solidFill>
-                          <a:latin typeface="Arial"/>
-                        </a:defRPr>
-                      </a:pPr>
-                      <a:r>
-                        <a:t>File: journal-diagram.png; media type: image; recorded at:</a:t>
-                      </a:r>
-                    </a:p>
-                    <a:p>
-                      <a:pPr>
-                        <a:lnSpc>
-                          <a:spcPts val="1600"/>
-                        </a:lnSpc>
-                        <a:spcAft>
-                          <a:spcPts val="0"/>
-                        </a:spcAft>
-                        <a:defRPr sz="1200" b="0">
-                          <a:solidFill>
-                            <a:srgbClr val="21243A"/>
-                          </a:solidFill>
-                          <a:latin typeface="Arial"/>
-                        </a:defRPr>
-                      </a:pPr>
-                      <a:r>
-                        <a:t>2026-09-26T22:31:05+00:00; models: claude-opus-5-5, gemini-3.8-flash,</a:t>
-                      </a:r>
-                    </a:p>
-                    <a:p>
-                      <a:pPr>
-                        <a:lnSpc>
-                          <a:spcPts val="1600"/>
-                        </a:lnSpc>
-                        <a:spcAft>
-                          <a:spcPts val="0"/>
-                        </a:spcAft>
-                        <a:defRPr sz="1200" b="0">
-                          <a:solidFill>
-                            <a:srgbClr val="21243A"/>
-                          </a:solidFill>
-                          <a:latin typeface="Arial"/>
-                        </a:defRPr>
-                      </a:pPr>
-                      <a:r>
-                        <a:t>gpt-6-astra.</a:t>
-                      </a:r>
-                    </a:p>
-                  </a:txBody>
-                  <a:tcPr marL="82296" marR="82296" marT="64008" marB="64008">
-                    <a:solidFill>
-                      <a:srgbClr val="FFFFFF"/>
-                    </a:solidFill>
-                  </a:tcPr>
-                </a:tc>
-              </a:tr>
-            </a:tbl>
-          </a:graphicData>
-        </a:graphic>
-      </p:graphicFrame>
-    </p:spTree>
-  </p:cSld>
-  <p:clrMapOvr>
-    <a:masterClrMapping/>
-  </p:clrMapOvr>
-</p:sld>
-</file>
-
-<file path=ppt/slides/slide19.xml><?xml version="1.0" encoding="utf-8"?>
-<p:sld xmlns:a="http://schemas.openxmlformats.org/drawingml/2006/main" xmlns:p="http://schemas.openxmlformats.org/presentationml/2006/main" xmlns:r="http://schemas.openxmlformats.org/officeDocument/2006/relationships">
-  <p:cSld>
-    <p:spTree>
-      <p:nvGrpSpPr>
-        <p:cNvPr id="1" name=""/>
-        <p:cNvGrpSpPr/>
-        <p:nvPr/>
-      </p:nvGrpSpPr>
-      <p:grpSpPr/>
-      <p:sp>
-        <p:nvSpPr>
-          <p:cNvPr id="2" name="TextBox 1"/>
-          <p:cNvSpPr txBox="1"/>
-          <p:nvPr/>
-        </p:nvSpPr>
-        <p:spPr>
-          <a:xfrm>
-            <a:off x="365760" y="219456"/>
-            <a:ext cx="8412480" cy="228600"/>
-          </a:xfrm>
-          <a:prstGeom prst="rect">
-            <a:avLst/>
-          </a:prstGeom>
-          <a:noFill/>
-        </p:spPr>
-        <p:txBody>
-          <a:bodyPr wrap="square" lIns="0" rIns="0" tIns="0" bIns="0">
-            <a:spAutoFit/>
-          </a:bodyPr>
-          <a:lstStyle/>
-          <a:p>
-            <a:pPr>
-              <a:lnSpc>
-                <a:spcPct val="115000"/>
-              </a:lnSpc>
-              <a:spcAft>
-                <a:spcPts val="0"/>
-              </a:spcAft>
-              <a:defRPr sz="1100" b="1">
-                <a:solidFill>
-                  <a:srgbClr val="C5006A"/>
-                </a:solidFill>
-                <a:latin typeface="Arial"/>
-              </a:defRPr>
-            </a:pPr>
-            <a:r>
-              <a:t>SDA VISION / RESEARCH REPORT</a:t>
-            </a:r>
-          </a:p>
-        </p:txBody>
-      </p:sp>
-      <p:sp>
-        <p:nvSpPr>
-          <p:cNvPr id="3" name="TextBox 2"/>
-          <p:cNvSpPr txBox="1"/>
-          <p:nvPr/>
-        </p:nvSpPr>
-        <p:spPr>
-          <a:xfrm>
-            <a:off x="365760" y="658368"/>
-            <a:ext cx="8412480" cy="612648"/>
-          </a:xfrm>
-          <a:prstGeom prst="rect">
-            <a:avLst/>
-          </a:prstGeom>
-          <a:noFill/>
-        </p:spPr>
-        <p:txBody>
-          <a:bodyPr wrap="square" lIns="0" rIns="0" tIns="0" bIns="0">
-            <a:spAutoFit/>
-          </a:bodyPr>
-          <a:lstStyle/>
-          <a:p>
-            <a:pPr>
-              <a:lnSpc>
-                <a:spcPct val="115000"/>
-              </a:lnSpc>
-              <a:spcAft>
-                <a:spcPts val="0"/>
-              </a:spcAft>
-              <a:defRPr sz="2200" b="1">
-                <a:solidFill>
-                  <a:srgbClr val="21243A"/>
-                </a:solidFill>
-                <a:latin typeface="Arial"/>
-              </a:defRPr>
-            </a:pPr>
-            <a:r>
-              <a:t>File and analysis record</a:t>
-            </a:r>
-          </a:p>
-        </p:txBody>
-      </p:sp>
-      <p:sp>
-        <p:nvSpPr>
-          <p:cNvPr id="4" name="TextBox 3"/>
-          <p:cNvSpPr txBox="1"/>
-          <p:nvPr/>
-        </p:nvSpPr>
-        <p:spPr>
-          <a:xfrm>
-            <a:off x="365760" y="6291072"/>
-            <a:ext cx="8001000" cy="365760"/>
-          </a:xfrm>
-          <a:prstGeom prst="rect">
-            <a:avLst/>
-          </a:prstGeom>
-          <a:noFill/>
-        </p:spPr>
-        <p:txBody>
-          <a:bodyPr wrap="square" lIns="0" rIns="0" tIns="0" bIns="0">
-            <a:spAutoFit/>
-          </a:bodyPr>
-          <a:lstStyle/>
-          <a:p>
-            <a:pPr>
-              <a:lnSpc>
-                <a:spcPct val="115000"/>
-              </a:lnSpc>
-              <a:spcAft>
-                <a:spcPts val="0"/>
-              </a:spcAft>
-              <a:defRPr sz="800" b="0">
-                <a:solidFill>
-                  <a:srgbClr val="545B6D"/>
-                </a:solidFill>
-                <a:latin typeface="Arial"/>
-              </a:defRPr>
-            </a:pPr>
-            <a:r>
-              <a:t>Research assessment. Ratings are not calibrated probabilities.</a:t>
-            </a:r>
-          </a:p>
-        </p:txBody>
-      </p:sp>
-      <p:sp>
-        <p:nvSpPr>
-          <p:cNvPr id="5" name="TextBox 4"/>
-          <p:cNvSpPr txBox="1"/>
-          <p:nvPr/>
-        </p:nvSpPr>
-        <p:spPr>
-          <a:xfrm>
-            <a:off x="8394192" y="6318504"/>
-            <a:ext cx="365760" cy="228600"/>
-          </a:xfrm>
-          <a:prstGeom prst="rect">
-            <a:avLst/>
-          </a:prstGeom>
-          <a:noFill/>
-        </p:spPr>
-        <p:txBody>
-          <a:bodyPr wrap="square" lIns="0" rIns="0" tIns="0" bIns="0">
-            <a:spAutoFit/>
-          </a:bodyPr>
-          <a:lstStyle/>
-          <a:p>
-            <a:pPr>
-              <a:lnSpc>
-                <a:spcPct val="115000"/>
-              </a:lnSpc>
-              <a:spcAft>
-                <a:spcPts val="0"/>
-              </a:spcAft>
-              <a:defRPr sz="900" b="0">
-                <a:solidFill>
-                  <a:srgbClr val="545B6D"/>
-                </a:solidFill>
-                <a:latin typeface="Arial"/>
-              </a:defRPr>
-            </a:pPr>
-            <a:r>
-              <a:t>19</a:t>
             </a:r>
           </a:p>
         </p:txBody>
